--- a/kb/seminars/Research_Seminar_2026_10_13_cascade_progress.pptx
+++ b/kb/seminars/Research_Seminar_2026_10_13_cascade_progress.pptx
@@ -25,8 +25,9 @@
     <p:sldId id="1345" r:id="rId35"/>
     <p:sldId id="1346" r:id="rId36"/>
     <p:sldId id="1347" r:id="rId37"/>
+    <p:sldId id="1348" r:id="rId38"/>
     <p:sldId id="1263" r:id="rId23"/>
-    <p:sldId id="1348" r:id="rId38"/>
+    <p:sldId id="1349" r:id="rId39"/>
     <p:sldId id="1330" r:id="rId14"/>
     <p:sldId id="1336" r:id="rId19"/>
   </p:sldIdLst>
@@ -3748,7 +3749,7 @@
       </p:sp>
       <p:pic>
         <p:nvPicPr>
-          <p:cNvPr id="248" name="Site-pair heatmap" descr="Configurations per cation-anion site pair"/>
+          <p:cNvPr id="249" name="Site-pair heatmap" descr="Configurations per cation-anion site pair"/>
           <p:cNvPicPr>
             <a:picLocks noChangeAspect="1"/>
           </p:cNvPicPr>
@@ -3772,7 +3773,7 @@
       </p:pic>
       <p:sp>
         <p:nvSpPr>
-          <p:cNvPr id="249" name="Caption left"/>
+          <p:cNvPr id="250" name="Caption left"/>
           <p:cNvSpPr txBox="1"/>
           <p:nvPr/>
         </p:nvSpPr>
@@ -3800,7 +3801,7 @@
               <a:defRPr/>
             </a:pPr>
             <a:r>
-              <a:rPr kumimoji="1" lang="en-US" altLang="ko-KR" sz="1150" dirty="0">
+              <a:rPr kumimoji="1" lang="en-US" altLang="ko-KR" sz="1100" dirty="0">
                 <a:solidFill>
                   <a:srgbClr val="1F2937"/>
                 </a:solidFill>
@@ -3808,14 +3809,14 @@
                 <a:ea typeface="-윤고딕340" pitchFamily="18" charset="-127"/>
                 <a:cs typeface="Calibri" panose="020F0502020204030204" pitchFamily="34" charset="0"/>
               </a:rPr>
-              <a:t>&lt; configurations per cation–anion site pair (3,615 in total) &gt;</a:t>
+              <a:t>&lt; configurations per cation–anion site pair: main batch 3,615 (+60 in the August re-run) &gt;</a:t>
             </a:r>
           </a:p>
         </p:txBody>
       </p:sp>
       <p:pic>
         <p:nvPicPr>
-          <p:cNvPr id="250" name="Anneal schematic" descr="What a short anneal does"/>
+          <p:cNvPr id="251" name="Anneal schematic" descr="What a short anneal does"/>
           <p:cNvPicPr>
             <a:picLocks noChangeAspect="1"/>
           </p:cNvPicPr>
@@ -3839,7 +3840,7 @@
       </p:pic>
       <p:sp>
         <p:nvSpPr>
-          <p:cNvPr id="251" name="Caption right"/>
+          <p:cNvPr id="252" name="Caption right"/>
           <p:cNvSpPr txBox="1"/>
           <p:nvPr/>
         </p:nvSpPr>
@@ -3882,7 +3883,7 @@
       </p:sp>
       <p:sp>
         <p:nvSpPr>
-          <p:cNvPr id="252" name="Bottom note"/>
+          <p:cNvPr id="253" name="Bottom note"/>
           <p:cNvSpPr txBox="1"/>
           <p:nvPr/>
         </p:nvSpPr>
@@ -5463,7 +5464,7 @@
       </p:sp>
       <p:sp>
         <p:nvSpPr>
-          <p:cNvPr id="253" name="References"/>
+          <p:cNvPr id="254" name="References"/>
           <p:cNvSpPr txBox="1"/>
           <p:nvPr/>
         </p:nvSpPr>
@@ -7485,7 +7486,7 @@
                 <a:spcPct val="110000"/>
               </a:lnSpc>
               <a:spcAft>
-                <a:spcPts val="400"/>
+                <a:spcPts val="300"/>
               </a:spcAft>
               <a:buNone/>
               <a:defRPr/>
@@ -7508,7 +7509,7 @@
                 <a:spcPct val="110000"/>
               </a:lnSpc>
               <a:spcAft>
-                <a:spcPts val="400"/>
+                <a:spcPts val="300"/>
               </a:spcAft>
               <a:buNone/>
               <a:defRPr/>
@@ -7584,7 +7585,7 @@
                 <a:spcPct val="110000"/>
               </a:lnSpc>
               <a:spcAft>
-                <a:spcPts val="400"/>
+                <a:spcPts val="300"/>
               </a:spcAft>
               <a:buClr>
                 <a:srgbClr val="1F2937"/>
@@ -7603,7 +7604,7 @@
                 <a:ea typeface="-윤고딕340" pitchFamily="18" charset="-127"/>
                 <a:cs typeface="Calibri" panose="020F0502020204030204" pitchFamily="34" charset="0"/>
               </a:rPr>
-              <a:t>Site enumeration + MLIP relaxation: 89 of 91 precursors (3,615 configurations)</a:t>
+              <a:t>Stage 1: all 91 precursors enumerated and relaxed (3,675 configurations)</a:t>
             </a:r>
           </a:p>
           <a:p>
@@ -7612,7 +7613,7 @@
                 <a:spcPct val="110000"/>
               </a:lnSpc>
               <a:spcAft>
-                <a:spcPts val="400"/>
+                <a:spcPts val="300"/>
               </a:spcAft>
               <a:buClr>
                 <a:srgbClr val="1F2937"/>
@@ -7631,7 +7632,7 @@
                 <a:ea typeface="-윤고딕340" pitchFamily="18" charset="-127"/>
                 <a:cs typeface="Calibri" panose="020F0502020204030204" pitchFamily="34" charset="0"/>
               </a:rPr>
-              <a:t>DFT equation of state of the reference compositions</a:t>
+              <a:t>DFT equation of state; stability windows recomputed</a:t>
             </a:r>
           </a:p>
           <a:p>
@@ -7640,7 +7641,7 @@
                 <a:spcPct val="110000"/>
               </a:lnSpc>
               <a:spcAft>
-                <a:spcPts val="400"/>
+                <a:spcPts val="300"/>
               </a:spcAft>
               <a:buClr>
                 <a:srgbClr val="1F2937"/>
@@ -7659,7 +7660,7 @@
                 <a:ea typeface="-윤고딕340" pitchFamily="18" charset="-127"/>
                 <a:cs typeface="Calibri" panose="020F0502020204030204" pitchFamily="34" charset="0"/>
               </a:rPr>
-              <a:t>Stability windows recomputed with one consistent definition</a:t>
+              <a:t>September audit → Stage 2 with one primary readout</a:t>
             </a:r>
           </a:p>
         </p:txBody>
@@ -7721,7 +7722,7 @@
                 <a:spcPct val="110000"/>
               </a:lnSpc>
               <a:spcAft>
-                <a:spcPts val="400"/>
+                <a:spcPts val="300"/>
               </a:spcAft>
               <a:buClr>
                 <a:srgbClr val="1F2937"/>
@@ -7740,7 +7741,7 @@
                 <a:ea typeface="-윤고딕340" pitchFamily="18" charset="-127"/>
                 <a:cs typeface="Calibri" panose="020F0502020204030204" pitchFamily="34" charset="0"/>
               </a:rPr>
-              <a:t>MLIP-MD Li diffusivity: Al₂O₃- vs Al₂S₃-derived doping (12 of 40 runs)</a:t>
+              <a:t>Stage 2 pilot: MLIP-MD Li diffusivity, Al₂O₃- vs Al₂S₃-derived doping (12 of 40 runs)</a:t>
             </a:r>
           </a:p>
           <a:p>
@@ -7749,7 +7750,7 @@
                 <a:spcPct val="110000"/>
               </a:lnSpc>
               <a:spcAft>
-                <a:spcPts val="400"/>
+                <a:spcPts val="300"/>
               </a:spcAft>
               <a:buClr>
                 <a:srgbClr val="1F2937"/>
@@ -7830,7 +7831,7 @@
                 <a:spcPct val="110000"/>
               </a:lnSpc>
               <a:spcAft>
-                <a:spcPts val="400"/>
+                <a:spcPts val="300"/>
               </a:spcAft>
               <a:buClr>
                 <a:srgbClr val="1F2937"/>
@@ -7849,7 +7850,7 @@
                 <a:ea typeface="-윤고딕340" pitchFamily="18" charset="-127"/>
                 <a:cs typeface="Calibri" panose="020F0502020204030204" pitchFamily="34" charset="0"/>
               </a:rPr>
-              <a:t>Interfacial reaction products with ground-state reference phases</a:t>
+              <a:t>Scope over the 237-design roster and the ranking margin, fixed in advance</a:t>
             </a:r>
           </a:p>
           <a:p>
@@ -7858,7 +7859,7 @@
                 <a:spcPct val="110000"/>
               </a:lnSpc>
               <a:spcAft>
-                <a:spcPts val="400"/>
+                <a:spcPts val="300"/>
               </a:spcAft>
               <a:buClr>
                 <a:srgbClr val="1F2937"/>
@@ -7877,7 +7878,7 @@
                 <a:ea typeface="-윤고딕340" pitchFamily="18" charset="-127"/>
                 <a:cs typeface="Calibri" panose="020F0502020204030204" pitchFamily="34" charset="0"/>
               </a:rPr>
-              <a:t>Selection rule fixed before combining descriptors</a:t>
+              <a:t>Check whether Stage-1 descriptors predict the measured transport</a:t>
             </a:r>
           </a:p>
           <a:p>
@@ -7886,7 +7887,7 @@
                 <a:spcPct val="110000"/>
               </a:lnSpc>
               <a:spcAft>
-                <a:spcPts val="400"/>
+                <a:spcPts val="300"/>
               </a:spcAft>
               <a:buClr>
                 <a:srgbClr val="1F2937"/>
@@ -7948,7 +7949,7 @@
                 <a:ea typeface="-윤고딕340" pitchFamily="18" charset="-127"/>
                 <a:cs typeface="Calibri" panose="020F0502020204030204" pitchFamily="34" charset="0"/>
               </a:rPr>
-              <a:t>At this stage the screening descriptors are used for exploration; </a:t>
+              <a:t>Stage-1 descriptors are used for exploration; </a:t>
             </a:r>
             <a:r>
               <a:rPr kumimoji="1" lang="en-US" altLang="ko-KR" sz="1300" b="1" dirty="0">
@@ -8087,7 +8088,7 @@
                 <a:ea typeface="-윤고딕340" pitchFamily="18" charset="-127"/>
                 <a:cs typeface="Calibri" panose="020F0502020204030204" pitchFamily="34" charset="0"/>
               </a:rPr>
-              <a:t>Simulation workflow and status</a:t>
+              <a:t>Stage 1 — exploration screen (Jun–Aug): workflow and status</a:t>
             </a:r>
           </a:p>
         </p:txBody>
@@ -8102,7 +8103,7 @@
         </p:nvGraphicFramePr>
         <p:xfrm>
           <a:off x="411480" y="1389888"/>
-          <a:ext cx="8321040" cy="4151376"/>
+          <a:ext cx="8321040" cy="3675888"/>
         </p:xfrm>
         <a:graphic>
           <a:graphicData uri="http://schemas.openxmlformats.org/drawingml/2006/table">
@@ -8589,7 +8590,7 @@
                           <a:ea typeface="-윤고딕340" pitchFamily="18" charset="-127"/>
                           <a:cs typeface="Calibri" panose="020F0502020204030204" pitchFamily="34" charset="0"/>
                         </a:rPr>
-                        <a:t>Charge-balanced placement of the precursor cation and anion on the Li, P, S and Cl sublattices</a:t>
+                        <a:t>Charge-balanced placement of precursor cation and anion on Li, P, S, Cl sites</a:t>
                       </a:r>
                     </a:p>
                   </a:txBody>
@@ -8978,7 +8979,7 @@
                           <a:ea typeface="-윤고딕340" pitchFamily="18" charset="-127"/>
                           <a:cs typeface="Calibri" panose="020F0502020204030204" pitchFamily="34" charset="0"/>
                         </a:rPr>
-                        <a:t>3,615 configurations</a:t>
+                        <a:t>3,675 configurations</a:t>
                       </a:r>
                     </a:p>
                   </a:txBody>
@@ -9303,7 +9304,7 @@
                           <a:ea typeface="-윤고딕340" pitchFamily="18" charset="-127"/>
                           <a:cs typeface="Calibri" panose="020F0502020204030204" pitchFamily="34" charset="0"/>
                         </a:rPr>
-                        <a:t>681 configurations</a:t>
+                        <a:t>693 configurations</a:t>
                       </a:r>
                     </a:p>
                   </a:txBody>
@@ -10300,7 +10301,7 @@
                           <a:ea typeface="-윤고딕340" pitchFamily="18" charset="-127"/>
                           <a:cs typeface="Calibri" panose="020F0502020204030204" pitchFamily="34" charset="0"/>
                         </a:rPr>
-                        <a:t>89 compositions</a:t>
+                        <a:t>90 precursors</a:t>
                       </a:r>
                     </a:p>
                   </a:txBody>
@@ -10364,7 +10365,7 @@
                           <a:ea typeface="-윤고딕340" pitchFamily="18" charset="-127"/>
                           <a:cs typeface="Calibri" panose="020F0502020204030204" pitchFamily="34" charset="0"/>
                         </a:rPr>
-                        <a:t>Recomputed</a:t>
+                        <a:t>Recomputed (Oct)</a:t>
                       </a:r>
                     </a:p>
                   </a:txBody>
@@ -10497,7 +10498,7 @@
                           <a:ea typeface="-윤고딕340" pitchFamily="18" charset="-127"/>
                           <a:cs typeface="Calibri" panose="020F0502020204030204" pitchFamily="34" charset="0"/>
                         </a:rPr>
-                        <a:t>Interfacial reactivity</a:t>
+                        <a:t>Interface reactivity</a:t>
                       </a:r>
                     </a:p>
                   </a:txBody>
@@ -10561,7 +10562,7 @@
                           <a:ea typeface="-윤고딕340" pitchFamily="18" charset="-127"/>
                           <a:cs typeface="Calibri" panose="020F0502020204030204" pitchFamily="34" charset="0"/>
                         </a:rPr>
-                        <a:t>Pseudo-binary reaction energy vs Li metal, LiCoO₂, LiMn₂O₄</a:t>
+                        <a:t>Reaction energy of each doped composition vs cathodes, Li metal, carbon</a:t>
                       </a:r>
                     </a:p>
                   </a:txBody>
@@ -10625,7 +10626,7 @@
                           <a:ea typeface="-윤고딕340" pitchFamily="18" charset="-127"/>
                           <a:cs typeface="Calibri" panose="020F0502020204030204" pitchFamily="34" charset="0"/>
                         </a:rPr>
-                        <a:t>90 compounds</a:t>
+                        <a:t>90 precursors</a:t>
                       </a:r>
                     </a:p>
                   </a:txBody>
@@ -10689,7 +10690,7 @@
                           <a:ea typeface="-윤고딕340" pitchFamily="18" charset="-127"/>
                           <a:cs typeface="Calibri" panose="020F0502020204030204" pitchFamily="34" charset="0"/>
                         </a:rPr>
-                        <a:t>Re-evaluation planned</a:t>
+                        <a:t>Done · products redo</a:t>
                       </a:r>
                     </a:p>
                   </a:txBody>
@@ -10732,331 +10733,6 @@
                     </a:lnB>
                     <a:solidFill>
                       <a:srgbClr val="EFEFEF"/>
-                    </a:solidFill>
-                  </a:tcPr>
-                </a:tc>
-              </a:tr>
-              <a:tr h="475488">
-                <a:tc>
-                  <a:txBody>
-                    <a:bodyPr/>
-                    <a:lstStyle/>
-                    <a:p>
-                      <a:pPr marL="0" indent="0" latinLnBrk="0" algn="ctr">
-                        <a:lnSpc>
-                          <a:spcPct val="100000"/>
-                        </a:lnSpc>
-                        <a:buNone/>
-                        <a:defRPr/>
-                      </a:pPr>
-                      <a:r>
-                        <a:rPr kumimoji="1" lang="en-US" altLang="ko-KR" sz="1150" dirty="0">
-                          <a:solidFill>
-                            <a:srgbClr val="1F2937"/>
-                          </a:solidFill>
-                          <a:latin typeface="Calibri" panose="020F0502020204030204" pitchFamily="34" charset="0"/>
-                          <a:ea typeface="-윤고딕340" pitchFamily="18" charset="-127"/>
-                          <a:cs typeface="Calibri" panose="020F0502020204030204" pitchFamily="34" charset="0"/>
-                        </a:rPr>
-                        <a:t>8</a:t>
-                      </a:r>
-                    </a:p>
-                  </a:txBody>
-                  <a:tcPr marL="54864" marR="54864" marT="27432" marB="27432" anchor="ctr">
-                    <a:lnL w="12700" cap="flat" cmpd="sng" algn="ctr">
-                      <a:solidFill>
-                        <a:srgbClr val="C9D3E3"/>
-                      </a:solidFill>
-                      <a:prstDash val="solid"/>
-                      <a:round/>
-                      <a:headEnd type="none" w="med" len="med"/>
-                      <a:tailEnd type="none" w="med" len="med"/>
-                    </a:lnL>
-                    <a:lnR w="12700" cap="flat" cmpd="sng" algn="ctr">
-                      <a:solidFill>
-                        <a:srgbClr val="C9D3E3"/>
-                      </a:solidFill>
-                      <a:prstDash val="solid"/>
-                      <a:round/>
-                      <a:headEnd type="none" w="med" len="med"/>
-                      <a:tailEnd type="none" w="med" len="med"/>
-                    </a:lnR>
-                    <a:lnT w="12700" cap="flat" cmpd="sng" algn="ctr">
-                      <a:solidFill>
-                        <a:srgbClr val="C9D3E3"/>
-                      </a:solidFill>
-                      <a:prstDash val="solid"/>
-                      <a:round/>
-                      <a:headEnd type="none" w="med" len="med"/>
-                      <a:tailEnd type="none" w="med" len="med"/>
-                    </a:lnT>
-                    <a:lnB w="12700" cap="flat" cmpd="sng" algn="ctr">
-                      <a:solidFill>
-                        <a:srgbClr val="C9D3E3"/>
-                      </a:solidFill>
-                      <a:prstDash val="solid"/>
-                      <a:round/>
-                      <a:headEnd type="none" w="med" len="med"/>
-                      <a:tailEnd type="none" w="med" len="med"/>
-                    </a:lnB>
-                  </a:tcPr>
-                </a:tc>
-                <a:tc>
-                  <a:txBody>
-                    <a:bodyPr/>
-                    <a:lstStyle/>
-                    <a:p>
-                      <a:pPr marL="0" indent="0" latinLnBrk="0" algn="l">
-                        <a:lnSpc>
-                          <a:spcPct val="100000"/>
-                        </a:lnSpc>
-                        <a:buNone/>
-                        <a:defRPr/>
-                      </a:pPr>
-                      <a:r>
-                        <a:rPr kumimoji="1" lang="en-US" altLang="ko-KR" sz="1150" dirty="0">
-                          <a:solidFill>
-                            <a:srgbClr val="1F2937"/>
-                          </a:solidFill>
-                          <a:latin typeface="Calibri" panose="020F0502020204030204" pitchFamily="34" charset="0"/>
-                          <a:ea typeface="-윤고딕340" pitchFamily="18" charset="-127"/>
-                          <a:cs typeface="Calibri" panose="020F0502020204030204" pitchFamily="34" charset="0"/>
-                        </a:rPr>
-                        <a:t>Li transport</a:t>
-                      </a:r>
-                    </a:p>
-                  </a:txBody>
-                  <a:tcPr marL="54864" marR="54864" marT="27432" marB="27432" anchor="ctr">
-                    <a:lnL w="12700" cap="flat" cmpd="sng" algn="ctr">
-                      <a:solidFill>
-                        <a:srgbClr val="C9D3E3"/>
-                      </a:solidFill>
-                      <a:prstDash val="solid"/>
-                      <a:round/>
-                      <a:headEnd type="none" w="med" len="med"/>
-                      <a:tailEnd type="none" w="med" len="med"/>
-                    </a:lnL>
-                    <a:lnR w="12700" cap="flat" cmpd="sng" algn="ctr">
-                      <a:solidFill>
-                        <a:srgbClr val="C9D3E3"/>
-                      </a:solidFill>
-                      <a:prstDash val="solid"/>
-                      <a:round/>
-                      <a:headEnd type="none" w="med" len="med"/>
-                      <a:tailEnd type="none" w="med" len="med"/>
-                    </a:lnR>
-                    <a:lnT w="12700" cap="flat" cmpd="sng" algn="ctr">
-                      <a:solidFill>
-                        <a:srgbClr val="C9D3E3"/>
-                      </a:solidFill>
-                      <a:prstDash val="solid"/>
-                      <a:round/>
-                      <a:headEnd type="none" w="med" len="med"/>
-                      <a:tailEnd type="none" w="med" len="med"/>
-                    </a:lnT>
-                    <a:lnB w="12700" cap="flat" cmpd="sng" algn="ctr">
-                      <a:solidFill>
-                        <a:srgbClr val="C9D3E3"/>
-                      </a:solidFill>
-                      <a:prstDash val="solid"/>
-                      <a:round/>
-                      <a:headEnd type="none" w="med" len="med"/>
-                      <a:tailEnd type="none" w="med" len="med"/>
-                    </a:lnB>
-                  </a:tcPr>
-                </a:tc>
-                <a:tc>
-                  <a:txBody>
-                    <a:bodyPr/>
-                    <a:lstStyle/>
-                    <a:p>
-                      <a:pPr marL="0" indent="0" latinLnBrk="0" algn="l">
-                        <a:lnSpc>
-                          <a:spcPct val="100000"/>
-                        </a:lnSpc>
-                        <a:buNone/>
-                        <a:defRPr/>
-                      </a:pPr>
-                      <a:r>
-                        <a:rPr kumimoji="1" lang="en-US" altLang="ko-KR" sz="1150" dirty="0">
-                          <a:solidFill>
-                            <a:srgbClr val="1F2937"/>
-                          </a:solidFill>
-                          <a:latin typeface="Calibri" panose="020F0502020204030204" pitchFamily="34" charset="0"/>
-                          <a:ea typeface="-윤고딕340" pitchFamily="18" charset="-127"/>
-                          <a:cs typeface="Calibri" panose="020F0502020204030204" pitchFamily="34" charset="0"/>
-                        </a:rPr>
-                        <a:t>MLIP-MD (NVT); MSD → Li diffusivity ratio between two precursors</a:t>
-                      </a:r>
-                    </a:p>
-                  </a:txBody>
-                  <a:tcPr marL="54864" marR="54864" marT="27432" marB="27432" anchor="ctr">
-                    <a:lnL w="12700" cap="flat" cmpd="sng" algn="ctr">
-                      <a:solidFill>
-                        <a:srgbClr val="C9D3E3"/>
-                      </a:solidFill>
-                      <a:prstDash val="solid"/>
-                      <a:round/>
-                      <a:headEnd type="none" w="med" len="med"/>
-                      <a:tailEnd type="none" w="med" len="med"/>
-                    </a:lnL>
-                    <a:lnR w="12700" cap="flat" cmpd="sng" algn="ctr">
-                      <a:solidFill>
-                        <a:srgbClr val="C9D3E3"/>
-                      </a:solidFill>
-                      <a:prstDash val="solid"/>
-                      <a:round/>
-                      <a:headEnd type="none" w="med" len="med"/>
-                      <a:tailEnd type="none" w="med" len="med"/>
-                    </a:lnR>
-                    <a:lnT w="12700" cap="flat" cmpd="sng" algn="ctr">
-                      <a:solidFill>
-                        <a:srgbClr val="C9D3E3"/>
-                      </a:solidFill>
-                      <a:prstDash val="solid"/>
-                      <a:round/>
-                      <a:headEnd type="none" w="med" len="med"/>
-                      <a:tailEnd type="none" w="med" len="med"/>
-                    </a:lnT>
-                    <a:lnB w="12700" cap="flat" cmpd="sng" algn="ctr">
-                      <a:solidFill>
-                        <a:srgbClr val="C9D3E3"/>
-                      </a:solidFill>
-                      <a:prstDash val="solid"/>
-                      <a:round/>
-                      <a:headEnd type="none" w="med" len="med"/>
-                      <a:tailEnd type="none" w="med" len="med"/>
-                    </a:lnB>
-                  </a:tcPr>
-                </a:tc>
-                <a:tc>
-                  <a:txBody>
-                    <a:bodyPr/>
-                    <a:lstStyle/>
-                    <a:p>
-                      <a:pPr marL="0" indent="0" latinLnBrk="0" algn="l">
-                        <a:lnSpc>
-                          <a:spcPct val="100000"/>
-                        </a:lnSpc>
-                        <a:buNone/>
-                        <a:defRPr/>
-                      </a:pPr>
-                      <a:r>
-                        <a:rPr kumimoji="1" lang="en-US" altLang="ko-KR" sz="1150" dirty="0">
-                          <a:solidFill>
-                            <a:srgbClr val="1F2937"/>
-                          </a:solidFill>
-                          <a:latin typeface="Calibri" panose="020F0502020204030204" pitchFamily="34" charset="0"/>
-                          <a:ea typeface="-윤고딕340" pitchFamily="18" charset="-127"/>
-                          <a:cs typeface="Calibri" panose="020F0502020204030204" pitchFamily="34" charset="0"/>
-                        </a:rPr>
-                        <a:t>40 runs</a:t>
-                      </a:r>
-                    </a:p>
-                  </a:txBody>
-                  <a:tcPr marL="54864" marR="54864" marT="27432" marB="27432" anchor="ctr">
-                    <a:lnL w="12700" cap="flat" cmpd="sng" algn="ctr">
-                      <a:solidFill>
-                        <a:srgbClr val="C9D3E3"/>
-                      </a:solidFill>
-                      <a:prstDash val="solid"/>
-                      <a:round/>
-                      <a:headEnd type="none" w="med" len="med"/>
-                      <a:tailEnd type="none" w="med" len="med"/>
-                    </a:lnL>
-                    <a:lnR w="12700" cap="flat" cmpd="sng" algn="ctr">
-                      <a:solidFill>
-                        <a:srgbClr val="C9D3E3"/>
-                      </a:solidFill>
-                      <a:prstDash val="solid"/>
-                      <a:round/>
-                      <a:headEnd type="none" w="med" len="med"/>
-                      <a:tailEnd type="none" w="med" len="med"/>
-                    </a:lnR>
-                    <a:lnT w="12700" cap="flat" cmpd="sng" algn="ctr">
-                      <a:solidFill>
-                        <a:srgbClr val="C9D3E3"/>
-                      </a:solidFill>
-                      <a:prstDash val="solid"/>
-                      <a:round/>
-                      <a:headEnd type="none" w="med" len="med"/>
-                      <a:tailEnd type="none" w="med" len="med"/>
-                    </a:lnT>
-                    <a:lnB w="12700" cap="flat" cmpd="sng" algn="ctr">
-                      <a:solidFill>
-                        <a:srgbClr val="C9D3E3"/>
-                      </a:solidFill>
-                      <a:prstDash val="solid"/>
-                      <a:round/>
-                      <a:headEnd type="none" w="med" len="med"/>
-                      <a:tailEnd type="none" w="med" len="med"/>
-                    </a:lnB>
-                  </a:tcPr>
-                </a:tc>
-                <a:tc>
-                  <a:txBody>
-                    <a:bodyPr/>
-                    <a:lstStyle/>
-                    <a:p>
-                      <a:pPr marL="0" indent="0" latinLnBrk="0" algn="ctr">
-                        <a:lnSpc>
-                          <a:spcPct val="100000"/>
-                        </a:lnSpc>
-                        <a:buNone/>
-                        <a:defRPr/>
-                      </a:pPr>
-                      <a:r>
-                        <a:rPr kumimoji="1" lang="en-US" altLang="ko-KR" sz="1150" dirty="0">
-                          <a:solidFill>
-                            <a:srgbClr val="0B5394"/>
-                          </a:solidFill>
-                          <a:latin typeface="Calibri" panose="020F0502020204030204" pitchFamily="34" charset="0"/>
-                          <a:ea typeface="-윤고딕340" pitchFamily="18" charset="-127"/>
-                          <a:cs typeface="Calibri" panose="020F0502020204030204" pitchFamily="34" charset="0"/>
-                        </a:rPr>
-                        <a:t>Running (12/40)</a:t>
-                      </a:r>
-                    </a:p>
-                  </a:txBody>
-                  <a:tcPr marL="54864" marR="54864" marT="27432" marB="27432" anchor="ctr">
-                    <a:lnL w="12700" cap="flat" cmpd="sng" algn="ctr">
-                      <a:solidFill>
-                        <a:srgbClr val="C9D3E3"/>
-                      </a:solidFill>
-                      <a:prstDash val="solid"/>
-                      <a:round/>
-                      <a:headEnd type="none" w="med" len="med"/>
-                      <a:tailEnd type="none" w="med" len="med"/>
-                    </a:lnL>
-                    <a:lnR w="12700" cap="flat" cmpd="sng" algn="ctr">
-                      <a:solidFill>
-                        <a:srgbClr val="C9D3E3"/>
-                      </a:solidFill>
-                      <a:prstDash val="solid"/>
-                      <a:round/>
-                      <a:headEnd type="none" w="med" len="med"/>
-                      <a:tailEnd type="none" w="med" len="med"/>
-                    </a:lnR>
-                    <a:lnT w="12700" cap="flat" cmpd="sng" algn="ctr">
-                      <a:solidFill>
-                        <a:srgbClr val="C9D3E3"/>
-                      </a:solidFill>
-                      <a:prstDash val="solid"/>
-                      <a:round/>
-                      <a:headEnd type="none" w="med" len="med"/>
-                      <a:tailEnd type="none" w="med" len="med"/>
-                    </a:lnT>
-                    <a:lnB w="12700" cap="flat" cmpd="sng" algn="ctr">
-                      <a:solidFill>
-                        <a:srgbClr val="C9D3E3"/>
-                      </a:solidFill>
-                      <a:prstDash val="solid"/>
-                      <a:round/>
-                      <a:headEnd type="none" w="med" len="med"/>
-                      <a:tailEnd type="none" w="med" len="med"/>
-                    </a:lnB>
-                    <a:solidFill>
-                      <a:srgbClr val="DCEBF8"/>
                     </a:solidFill>
                   </a:tcPr>
                 </a:tc>
@@ -11067,13 +10743,13 @@
       </p:graphicFrame>
       <p:sp>
         <p:nvSpPr>
-          <p:cNvPr id="247" name="Abbreviations"/>
+          <p:cNvPr id="247" name="Stage note"/>
           <p:cNvSpPr txBox="1"/>
           <p:nvPr/>
         </p:nvSpPr>
         <p:spPr>
           <a:xfrm>
-            <a:off x="411480" y="5650992"/>
+            <a:off x="411480" y="5138928"/>
             <a:ext cx="8321040" cy="548640"/>
           </a:xfrm>
           <a:prstGeom prst="rect">
@@ -11089,6 +10765,71 @@
           <a:p>
             <a:pPr marL="0" indent="0" latinLnBrk="0">
               <a:lnSpc>
+                <a:spcPct val="110000"/>
+              </a:lnSpc>
+              <a:buNone/>
+              <a:defRPr/>
+            </a:pPr>
+            <a:r>
+              <a:rPr kumimoji="1" lang="en-US" altLang="ko-KR" sz="1150" dirty="0">
+                <a:solidFill>
+                  <a:srgbClr val="0070C0"/>
+                </a:solidFill>
+                <a:latin typeface="Calibri" panose="020F0502020204030204" pitchFamily="34" charset="0"/>
+                <a:ea typeface="-윤고딕340" pitchFamily="18" charset="-127"/>
+                <a:cs typeface="Calibri" panose="020F0502020204030204" pitchFamily="34" charset="0"/>
+              </a:rPr>
+              <a:t>As₂S₃ and AlI₃ were completed in an August re-run; As₂S₃ is not yet in the stability and interface tables (rows 6–7). Since the September audit these outputs are </a:t>
+            </a:r>
+            <a:r>
+              <a:rPr kumimoji="1" lang="en-US" altLang="ko-KR" sz="1150" b="1" dirty="0">
+                <a:solidFill>
+                  <a:srgbClr val="0070C0"/>
+                </a:solidFill>
+                <a:latin typeface="Calibri" panose="020F0502020204030204" pitchFamily="34" charset="0"/>
+                <a:ea typeface="-윤고딕340" pitchFamily="18" charset="-127"/>
+                <a:cs typeface="Calibri" panose="020F0502020204030204" pitchFamily="34" charset="0"/>
+              </a:rPr>
+              <a:t>exploratory data</a:t>
+            </a:r>
+            <a:r>
+              <a:rPr kumimoji="1" lang="en-US" altLang="ko-KR" sz="1150" dirty="0">
+                <a:solidFill>
+                  <a:srgbClr val="0070C0"/>
+                </a:solidFill>
+                <a:latin typeface="Calibri" panose="020F0502020204030204" pitchFamily="34" charset="0"/>
+                <a:ea typeface="-윤고딕340" pitchFamily="18" charset="-127"/>
+                <a:cs typeface="Calibri" panose="020F0502020204030204" pitchFamily="34" charset="0"/>
+              </a:rPr>
+              <a:t> — Li transport is measured in Stage 2.</a:t>
+            </a:r>
+          </a:p>
+        </p:txBody>
+      </p:sp>
+      <p:sp>
+        <p:nvSpPr>
+          <p:cNvPr id="248" name="Abbreviations"/>
+          <p:cNvSpPr txBox="1"/>
+          <p:nvPr/>
+        </p:nvSpPr>
+        <p:spPr>
+          <a:xfrm>
+            <a:off x="411480" y="5715000"/>
+            <a:ext cx="8321040" cy="502920"/>
+          </a:xfrm>
+          <a:prstGeom prst="rect">
+            <a:avLst/>
+          </a:prstGeom>
+          <a:noFill/>
+        </p:spPr>
+        <p:txBody>
+          <a:bodyPr wrap="square" lIns="45720" tIns="27432" rIns="45720" bIns="27432" rtlCol="0" anchor="t">
+            <a:noAutofit/>
+          </a:bodyPr>
+          <a:lstStyle/>
+          <a:p>
+            <a:pPr marL="0" indent="0" latinLnBrk="0">
+              <a:lnSpc>
                 <a:spcPct val="105000"/>
               </a:lnSpc>
               <a:buNone/>
@@ -11103,7 +10844,7 @@
                 <a:ea typeface="-윤고딕340" pitchFamily="18" charset="-127"/>
                 <a:cs typeface="Calibri" panose="020F0502020204030204" pitchFamily="34" charset="0"/>
               </a:rPr>
-              <a:t>MLIP: machine-learning interatomic potential (UMA, a universal model) · MSD: mean squared displacement · EOS: equation of state · all configurations at one dopant concentration</a:t>
+              <a:t>MLIP: machine-learning interatomic potential (UMA, a universal model) · EOS: equation of state · all Stage-1 configurations use one dopant level (one precursor unit per four formula units)</a:t>
             </a:r>
           </a:p>
         </p:txBody>
@@ -11187,7 +10928,7 @@
       </p:sp>
       <p:sp>
         <p:nvSpPr>
-          <p:cNvPr id="254" name="Rectangle 4"/>
+          <p:cNvPr id="255" name="Rectangle 4"/>
           <p:cNvSpPr txBox="1"/>
           <p:nvPr/>
         </p:nvSpPr>
@@ -11238,7 +10979,7 @@
       </p:sp>
       <p:sp>
         <p:nvSpPr>
-          <p:cNvPr id="255" name="Window bullets"/>
+          <p:cNvPr id="256" name="Window bullets"/>
           <p:cNvSpPr txBox="1"/>
           <p:nvPr/>
         </p:nvSpPr>
@@ -11357,14 +11098,14 @@
                 <a:ea typeface="-윤고딕340" pitchFamily="18" charset="-127"/>
                 <a:cs typeface="Calibri" panose="020F0502020204030204" pitchFamily="34" charset="0"/>
               </a:rPr>
-              <a:t>Recomputed for all 89 compositions with this definition (Sep–Oct); the earlier definition overestimated window widths.</a:t>
+              <a:t>Recomputed for the 90 precursors in the stability table with this definition (Oct); the earlier definition overestimated window widths.</a:t>
             </a:r>
           </a:p>
         </p:txBody>
       </p:sp>
       <p:sp>
         <p:nvSpPr>
-          <p:cNvPr id="256" name="Schematic title"/>
+          <p:cNvPr id="257" name="Schematic title"/>
           <p:cNvSpPr txBox="1"/>
           <p:nvPr/>
         </p:nvSpPr>
@@ -11407,7 +11148,7 @@
       </p:sp>
       <p:sp>
         <p:nvSpPr>
-          <p:cNvPr id="257" name="Window label"/>
+          <p:cNvPr id="258" name="Window label"/>
           <p:cNvSpPr txBox="1"/>
           <p:nvPr/>
         </p:nvSpPr>
@@ -11450,7 +11191,7 @@
       </p:sp>
       <p:sp>
         <p:nvSpPr>
-          <p:cNvPr id="258" name="Reduction zone"/>
+          <p:cNvPr id="259" name="Reduction zone"/>
           <p:cNvSpPr/>
           <p:nvPr/>
         </p:nvSpPr>
@@ -11498,7 +11239,7 @@
       </p:sp>
       <p:sp>
         <p:nvSpPr>
-          <p:cNvPr id="259" name="Window zone"/>
+          <p:cNvPr id="260" name="Window zone"/>
           <p:cNvSpPr/>
           <p:nvPr/>
         </p:nvSpPr>
@@ -11546,7 +11287,7 @@
       </p:sp>
       <p:sp>
         <p:nvSpPr>
-          <p:cNvPr id="260" name="Oxidation zone"/>
+          <p:cNvPr id="261" name="Oxidation zone"/>
           <p:cNvSpPr/>
           <p:nvPr/>
         </p:nvSpPr>
@@ -11594,7 +11335,7 @@
       </p:sp>
       <p:sp>
         <p:nvSpPr>
-          <p:cNvPr id="261" name="Tick low"/>
+          <p:cNvPr id="262" name="Tick low"/>
           <p:cNvSpPr txBox="1"/>
           <p:nvPr/>
         </p:nvSpPr>
@@ -11637,7 +11378,7 @@
       </p:sp>
       <p:sp>
         <p:nvSpPr>
-          <p:cNvPr id="262" name="Tick high"/>
+          <p:cNvPr id="263" name="Tick high"/>
           <p:cNvSpPr txBox="1"/>
           <p:nvPr/>
         </p:nvSpPr>
@@ -11680,7 +11421,7 @@
       </p:sp>
       <p:sp>
         <p:nvSpPr>
-          <p:cNvPr id="263" name="Axis label"/>
+          <p:cNvPr id="264" name="Axis label"/>
           <p:cNvSpPr txBox="1"/>
           <p:nvPr/>
         </p:nvSpPr>
@@ -11723,7 +11464,7 @@
       </p:sp>
       <p:sp>
         <p:nvSpPr>
-          <p:cNvPr id="264" name="Reactions"/>
+          <p:cNvPr id="265" name="Reactions"/>
           <p:cNvSpPr txBox="1"/>
           <p:nvPr/>
         </p:nvSpPr>
@@ -11766,7 +11507,7 @@
       </p:sp>
       <p:pic>
         <p:nvPicPr>
-          <p:cNvPr id="265" name="Sundar 2025 Fig 2" descr="Coating reaction energy at four interfaces"/>
+          <p:cNvPr id="266" name="Sundar 2025 Fig 2" descr="Coating reaction energy at four interfaces"/>
           <p:cNvPicPr>
             <a:picLocks noChangeAspect="1"/>
           </p:cNvPicPr>
@@ -11790,7 +11531,7 @@
       </p:pic>
       <p:sp>
         <p:nvSpPr>
-          <p:cNvPr id="266" name="Caption right"/>
+          <p:cNvPr id="267" name="Caption right"/>
           <p:cNvSpPr txBox="1"/>
           <p:nvPr/>
         </p:nvSpPr>
@@ -11833,7 +11574,7 @@
       </p:sp>
       <p:sp>
         <p:nvSpPr>
-          <p:cNvPr id="267" name="Credit right"/>
+          <p:cNvPr id="268" name="Credit right"/>
           <p:cNvSpPr txBox="1"/>
           <p:nvPr/>
         </p:nvSpPr>
@@ -11876,7 +11617,7 @@
       </p:sp>
       <p:sp>
         <p:nvSpPr>
-          <p:cNvPr id="268" name="Interface bullets"/>
+          <p:cNvPr id="269" name="Interface bullets"/>
           <p:cNvSpPr txBox="1"/>
           <p:nvPr/>
         </p:nvSpPr>
@@ -11920,7 +11661,7 @@
                 <a:ea typeface="-윤고딕340" pitchFamily="18" charset="-127"/>
                 <a:cs typeface="Calibri" panose="020F0502020204030204" pitchFamily="34" charset="0"/>
               </a:rPr>
-              <a:t>Interfacial reactivity uses the same phase data: reaction energy of each dopant phase against Li₆PS₅Cl, Li metal and cathode materials.</a:t>
+              <a:t>Same phase data: reaction energy of each doped composition against LiCoO₂, LiNiO₂, LiMn₂O₄, Li metal and carbon.</a:t>
             </a:r>
           </a:p>
           <a:p>
@@ -11945,7 +11686,7 @@
                 <a:ea typeface="-윤고딕340" pitchFamily="18" charset="-127"/>
                 <a:cs typeface="Calibri" panose="020F0502020204030204" pitchFamily="34" charset="0"/>
               </a:rPr>
-              <a:t>Our reaction-product analysis is being </a:t>
+              <a:t>A separate table treats the precursor itself as a second phase (coating view, as in the figure); its product band gaps are being </a:t>
             </a:r>
             <a:r>
               <a:rPr kumimoji="1" lang="en-US" altLang="ko-KR" sz="1250" dirty="0">
@@ -11956,7 +11697,7 @@
                 <a:ea typeface="-윤고딕340" pitchFamily="18" charset="-127"/>
                 <a:cs typeface="Calibri" panose="020F0502020204030204" pitchFamily="34" charset="0"/>
               </a:rPr>
-              <a:t>redone with ground-state reference phases</a:t>
+              <a:t>re-derived with ground-state phases</a:t>
             </a:r>
             <a:r>
               <a:rPr kumimoji="1" lang="en-US" altLang="ko-KR" sz="1250" dirty="0">
@@ -11996,7 +11737,7 @@
       </p:sp>
       <p:sp>
         <p:nvSpPr>
-          <p:cNvPr id="269" name="References"/>
+          <p:cNvPr id="270" name="References"/>
           <p:cNvSpPr txBox="1"/>
           <p:nvPr/>
         </p:nvSpPr>
@@ -12116,7 +11857,7 @@
       </p:sp>
       <p:sp>
         <p:nvSpPr>
-          <p:cNvPr id="270" name="Rectangle 4"/>
+          <p:cNvPr id="271" name="Rectangle 4"/>
           <p:cNvSpPr txBox="1"/>
           <p:nvPr/>
         </p:nvSpPr>
@@ -12160,21 +11901,255 @@
                 <a:ea typeface="-윤고딕340" pitchFamily="18" charset="-127"/>
                 <a:cs typeface="Calibri" panose="020F0502020204030204" pitchFamily="34" charset="0"/>
               </a:rPr>
-              <a:t>Li transport by MLIP molecular dynamics: setup</a:t>
+              <a:t>September audit → Stage 2: rules fixed before new results</a:t>
             </a:r>
           </a:p>
         </p:txBody>
       </p:sp>
       <p:sp>
         <p:nvSpPr>
-          <p:cNvPr id="271" name="Setup bullets"/>
+          <p:cNvPr id="272" name="Audit findings"/>
+          <p:cNvSpPr/>
+          <p:nvPr/>
+        </p:nvSpPr>
+        <p:spPr>
+          <a:xfrm>
+            <a:off x="502920" y="1417320"/>
+            <a:ext cx="3931920" cy="3291840"/>
+          </a:xfrm>
+          <a:prstGeom prst="roundRect">
+            <a:avLst>
+              <a:gd name="adj" fmla="val 6000"/>
+            </a:avLst>
+          </a:prstGeom>
+          <a:solidFill>
+            <a:srgbClr val="F5F7FA"/>
+          </a:solidFill>
+          <a:ln>
+            <a:noFill/>
+          </a:ln>
+        </p:spPr>
+        <p:txBody>
+          <a:bodyPr wrap="square" lIns="146304" tIns="109728" rIns="146304" bIns="91440" rtlCol="0" anchor="t">
+            <a:noAutofit/>
+          </a:bodyPr>
+          <a:lstStyle/>
+          <a:p>
+            <a:pPr marL="0" indent="0" latinLnBrk="0">
+              <a:lnSpc>
+                <a:spcPct val="100000"/>
+              </a:lnSpc>
+              <a:spcAft>
+                <a:spcPts val="600"/>
+              </a:spcAft>
+              <a:buNone/>
+              <a:defRPr/>
+            </a:pPr>
+            <a:r>
+              <a:rPr kumimoji="1" lang="en-US" altLang="ko-KR" sz="1300" b="1" dirty="0">
+                <a:solidFill>
+                  <a:srgbClr val="1F497D"/>
+                </a:solidFill>
+                <a:latin typeface="Calibri" panose="020F0502020204030204" pitchFamily="34" charset="0"/>
+                <a:ea typeface="-윤고딕340" pitchFamily="18" charset="-127"/>
+                <a:cs typeface="Calibri" panose="020F0502020204030204" pitchFamily="34" charset="0"/>
+              </a:rPr>
+              <a:t>What the audit of Stage 1 found</a:t>
+            </a:r>
+          </a:p>
+          <a:p>
+            <a:pPr marL="182880" indent="-182880" latinLnBrk="0">
+              <a:lnSpc>
+                <a:spcPct val="108000"/>
+              </a:lnSpc>
+              <a:spcAft>
+                <a:spcPts val="450"/>
+              </a:spcAft>
+              <a:buClr>
+                <a:srgbClr val="1F2937"/>
+              </a:buClr>
+              <a:buSzPct val="80000"/>
+              <a:buFont typeface="Arial" panose="020B0604020202020204" pitchFamily="34" charset="0"/>
+              <a:buChar char="•"/>
+              <a:defRPr/>
+            </a:pPr>
+            <a:r>
+              <a:rPr kumimoji="1" lang="en-US" altLang="ko-KR" sz="1150" dirty="0">
+                <a:solidFill>
+                  <a:srgbClr val="1F2937"/>
+                </a:solidFill>
+                <a:latin typeface="Calibri" panose="020F0502020204030204" pitchFamily="34" charset="0"/>
+                <a:ea typeface="-윤고딕340" pitchFamily="18" charset="-127"/>
+                <a:cs typeface="Calibri" panose="020F0502020204030204" pitchFamily="34" charset="0"/>
+              </a:rPr>
+              <a:t>Concentration labels did not change the dopant level: every configuration has one precursor unit per four formula units.</a:t>
+            </a:r>
+          </a:p>
+          <a:p>
+            <a:pPr marL="182880" indent="-182880" latinLnBrk="0">
+              <a:lnSpc>
+                <a:spcPct val="108000"/>
+              </a:lnSpc>
+              <a:spcAft>
+                <a:spcPts val="450"/>
+              </a:spcAft>
+              <a:buClr>
+                <a:srgbClr val="1F2937"/>
+              </a:buClr>
+              <a:buSzPct val="80000"/>
+              <a:buFont typeface="Arial" panose="020B0604020202020204" pitchFamily="34" charset="0"/>
+              <a:buChar char="•"/>
+              <a:defRPr/>
+            </a:pPr>
+            <a:r>
+              <a:rPr kumimoji="1" lang="en-US" altLang="ko-KR" sz="1150" dirty="0">
+                <a:solidFill>
+                  <a:srgbClr val="1F2937"/>
+                </a:solidFill>
+                <a:latin typeface="Calibri" panose="020F0502020204030204" pitchFamily="34" charset="0"/>
+                <a:ea typeface="-윤고딕340" pitchFamily="18" charset="-127"/>
+                <a:cs typeface="Calibri" panose="020F0502020204030204" pitchFamily="34" charset="0"/>
+              </a:rPr>
+              <a:t>The volume filter used a host reference ~40 % above the DFT equilibrium volume of the same composition → Stage 2 builds from the DFT-equilibrium host.</a:t>
+            </a:r>
+          </a:p>
+          <a:p>
+            <a:pPr marL="182880" indent="-182880" latinLnBrk="0">
+              <a:lnSpc>
+                <a:spcPct val="108000"/>
+              </a:lnSpc>
+              <a:spcAft>
+                <a:spcPts val="450"/>
+              </a:spcAft>
+              <a:buClr>
+                <a:srgbClr val="1F2937"/>
+              </a:buClr>
+              <a:buSzPct val="80000"/>
+              <a:buFont typeface="Arial" panose="020B0604020202020204" pitchFamily="34" charset="0"/>
+              <a:buChar char="•"/>
+              <a:defRPr/>
+            </a:pPr>
+            <a:r>
+              <a:rPr kumimoji="1" lang="en-US" altLang="ko-KR" sz="1150" dirty="0">
+                <a:solidFill>
+                  <a:srgbClr val="1F2937"/>
+                </a:solidFill>
+                <a:latin typeface="Calibri" panose="020F0502020204030204" pitchFamily="34" charset="0"/>
+                <a:ea typeface="-윤고딕340" pitchFamily="18" charset="-127"/>
+                <a:cs typeface="Calibri" panose="020F0502020204030204" pitchFamily="34" charset="0"/>
+              </a:rPr>
+              <a:t>Young's modulus: scatter among configurations of one precursor ≈ spread between precursors (ratio 1.1; substitution energy 0.2).</a:t>
+            </a:r>
+          </a:p>
+          <a:p>
+            <a:pPr marL="182880" indent="-182880" latinLnBrk="0">
+              <a:lnSpc>
+                <a:spcPct val="108000"/>
+              </a:lnSpc>
+              <a:buClr>
+                <a:srgbClr val="1F2937"/>
+              </a:buClr>
+              <a:buSzPct val="80000"/>
+              <a:buFont typeface="Arial" panose="020B0604020202020204" pitchFamily="34" charset="0"/>
+              <a:buChar char="•"/>
+              <a:defRPr/>
+            </a:pPr>
+            <a:r>
+              <a:rPr kumimoji="1" lang="en-US" altLang="ko-KR" sz="1150" dirty="0">
+                <a:solidFill>
+                  <a:srgbClr val="1F2937"/>
+                </a:solidFill>
+                <a:latin typeface="Calibri" panose="020F0502020204030204" pitchFamily="34" charset="0"/>
+                <a:ea typeface="-윤고딕340" pitchFamily="18" charset="-127"/>
+                <a:cs typeface="Calibri" panose="020F0502020204030204" pitchFamily="34" charset="0"/>
+              </a:rPr>
+              <a:t>Several descriptors were merged into one score without a stated primary objective.</a:t>
+            </a:r>
+          </a:p>
+        </p:txBody>
+      </p:sp>
+      <p:sp>
+        <p:nvSpPr>
+          <p:cNvPr id="273" name="Audit verdict"/>
+          <p:cNvSpPr/>
+          <p:nvPr/>
+        </p:nvSpPr>
+        <p:spPr>
+          <a:xfrm>
+            <a:off x="502920" y="4818888"/>
+            <a:ext cx="3931920" cy="566928"/>
+          </a:xfrm>
+          <a:prstGeom prst="roundRect">
+            <a:avLst>
+              <a:gd name="adj" fmla="val 6000"/>
+            </a:avLst>
+          </a:prstGeom>
+          <a:solidFill>
+            <a:srgbClr val="FDF1F1"/>
+          </a:solidFill>
+          <a:ln>
+            <a:noFill/>
+          </a:ln>
+        </p:spPr>
+        <p:txBody>
+          <a:bodyPr wrap="square" lIns="91440" tIns="64008" rIns="91440" bIns="64008" rtlCol="0" anchor="ctr">
+            <a:noAutofit/>
+          </a:bodyPr>
+          <a:lstStyle/>
+          <a:p>
+            <a:pPr marL="0" indent="0" latinLnBrk="0">
+              <a:lnSpc>
+                <a:spcPct val="105000"/>
+              </a:lnSpc>
+              <a:buNone/>
+              <a:defRPr/>
+            </a:pPr>
+            <a:r>
+              <a:rPr kumimoji="1" lang="en-US" altLang="ko-KR" sz="1150" dirty="0">
+                <a:solidFill>
+                  <a:srgbClr val="A50021"/>
+                </a:solidFill>
+                <a:latin typeface="Calibri" panose="020F0502020204030204" pitchFamily="34" charset="0"/>
+                <a:ea typeface="-윤고딕340" pitchFamily="18" charset="-127"/>
+                <a:cs typeface="Calibri" panose="020F0502020204030204" pitchFamily="34" charset="0"/>
+              </a:rPr>
+              <a:t>→ Stage-1 outputs are kept as </a:t>
+            </a:r>
+            <a:r>
+              <a:rPr kumimoji="1" lang="en-US" altLang="ko-KR" sz="1150" b="1" dirty="0">
+                <a:solidFill>
+                  <a:srgbClr val="A50021"/>
+                </a:solidFill>
+                <a:latin typeface="Calibri" panose="020F0502020204030204" pitchFamily="34" charset="0"/>
+                <a:ea typeface="-윤고딕340" pitchFamily="18" charset="-127"/>
+                <a:cs typeface="Calibri" panose="020F0502020204030204" pitchFamily="34" charset="0"/>
+              </a:rPr>
+              <a:t>exploratory data</a:t>
+            </a:r>
+            <a:r>
+              <a:rPr kumimoji="1" lang="en-US" altLang="ko-KR" sz="1150" dirty="0">
+                <a:solidFill>
+                  <a:srgbClr val="A50021"/>
+                </a:solidFill>
+                <a:latin typeface="Calibri" panose="020F0502020204030204" pitchFamily="34" charset="0"/>
+                <a:ea typeface="-윤고딕340" pitchFamily="18" charset="-127"/>
+                <a:cs typeface="Calibri" panose="020F0502020204030204" pitchFamily="34" charset="0"/>
+              </a:rPr>
+              <a:t>; approved dopant ranking: none.</a:t>
+            </a:r>
+          </a:p>
+        </p:txBody>
+      </p:sp>
+      <p:sp>
+        <p:nvSpPr>
+          <p:cNvPr id="274" name="Rules title"/>
           <p:cNvSpPr txBox="1"/>
           <p:nvPr/>
         </p:nvSpPr>
         <p:spPr>
           <a:xfrm>
-            <a:off x="502920" y="1371600"/>
-            <a:ext cx="4206240" cy="2651760"/>
+            <a:off x="4617720" y="1371600"/>
+            <a:ext cx="4023360" cy="310896"/>
           </a:xfrm>
           <a:prstGeom prst="rect">
             <a:avLst/>
@@ -12187,131 +12162,37 @@
           </a:bodyPr>
           <a:lstStyle/>
           <a:p>
-            <a:pPr marL="182880" indent="-182880" latinLnBrk="0">
+            <a:pPr marL="0" indent="0" latinLnBrk="0">
               <a:lnSpc>
-                <a:spcPct val="110000"/>
+                <a:spcPct val="100000"/>
               </a:lnSpc>
-              <a:spcAft>
-                <a:spcPts val="600"/>
-              </a:spcAft>
-              <a:buClr>
-                <a:srgbClr val="1F2937"/>
-              </a:buClr>
-              <a:buSzPct val="80000"/>
-              <a:buFont typeface="Arial" panose="020B0604020202020204" pitchFamily="34" charset="0"/>
-              <a:buChar char="•"/>
+              <a:buNone/>
               <a:defRPr/>
             </a:pPr>
             <a:r>
-              <a:rPr kumimoji="1" lang="en-US" altLang="ko-KR" sz="1250" b="1" dirty="0">
-                <a:solidFill>
-                  <a:srgbClr val="1F2937"/>
+              <a:rPr kumimoji="1" lang="en-US" altLang="ko-KR" sz="1300" b="1" dirty="0">
+                <a:solidFill>
+                  <a:srgbClr val="1F497D"/>
                 </a:solidFill>
                 <a:latin typeface="Calibri" panose="020F0502020204030204" pitchFamily="34" charset="0"/>
                 <a:ea typeface="-윤고딕340" pitchFamily="18" charset="-127"/>
                 <a:cs typeface="Calibri" panose="020F0502020204030204" pitchFamily="34" charset="0"/>
               </a:rPr>
-              <a:t>Question</a:t>
-            </a:r>
-            <a:r>
-              <a:rPr kumimoji="1" lang="en-US" altLang="ko-KR" sz="1250" dirty="0">
-                <a:solidFill>
-                  <a:srgbClr val="1F2937"/>
-                </a:solidFill>
-                <a:latin typeface="Calibri" panose="020F0502020204030204" pitchFamily="34" charset="0"/>
-                <a:ea typeface="-윤고딕340" pitchFamily="18" charset="-127"/>
-                <a:cs typeface="Calibri" panose="020F0502020204030204" pitchFamily="34" charset="0"/>
-              </a:rPr>
-              <a:t>: does the precursor anion (Al₂O₃ vs Al₂S₃) change Li diffusivity in Al-doped Li₆PS₅Cl?</a:t>
-            </a:r>
-          </a:p>
-          <a:p>
-            <a:pPr marL="182880" indent="-182880" latinLnBrk="0">
-              <a:lnSpc>
-                <a:spcPct val="110000"/>
-              </a:lnSpc>
-              <a:spcAft>
-                <a:spcPts val="600"/>
-              </a:spcAft>
-              <a:buClr>
-                <a:srgbClr val="1F2937"/>
-              </a:buClr>
-              <a:buSzPct val="80000"/>
-              <a:buFont typeface="Arial" panose="020B0604020202020204" pitchFamily="34" charset="0"/>
-              <a:buChar char="•"/>
-              <a:defRPr/>
-            </a:pPr>
-            <a:r>
-              <a:rPr kumimoji="1" lang="en-US" altLang="ko-KR" sz="1250" b="1" dirty="0">
-                <a:solidFill>
-                  <a:srgbClr val="1F2937"/>
-                </a:solidFill>
-                <a:latin typeface="Calibri" panose="020F0502020204030204" pitchFamily="34" charset="0"/>
-                <a:ea typeface="-윤고딕340" pitchFamily="18" charset="-127"/>
-                <a:cs typeface="Calibri" panose="020F0502020204030204" pitchFamily="34" charset="0"/>
-              </a:rPr>
-              <a:t>Reported quantity</a:t>
-            </a:r>
-            <a:r>
-              <a:rPr kumimoji="1" lang="en-US" altLang="ko-KR" sz="1250" dirty="0">
-                <a:solidFill>
-                  <a:srgbClr val="1F2937"/>
-                </a:solidFill>
-                <a:latin typeface="Calibri" panose="020F0502020204030204" pitchFamily="34" charset="0"/>
-                <a:ea typeface="-윤고딕340" pitchFamily="18" charset="-127"/>
-                <a:cs typeface="Calibri" panose="020F0502020204030204" pitchFamily="34" charset="0"/>
-              </a:rPr>
-              <a:t>: ratio of Li tracer diffusivities from MSD slopes — relative, not an absolute conductivity.</a:t>
-            </a:r>
-          </a:p>
-          <a:p>
-            <a:pPr marL="182880" indent="-182880" latinLnBrk="0">
-              <a:lnSpc>
-                <a:spcPct val="110000"/>
-              </a:lnSpc>
-              <a:buClr>
-                <a:srgbClr val="1F2937"/>
-              </a:buClr>
-              <a:buSzPct val="80000"/>
-              <a:buFont typeface="Arial" panose="020B0604020202020204" pitchFamily="34" charset="0"/>
-              <a:buChar char="•"/>
-              <a:defRPr/>
-            </a:pPr>
-            <a:r>
-              <a:rPr kumimoji="1" lang="en-US" altLang="ko-KR" sz="1250" b="1" dirty="0">
-                <a:solidFill>
-                  <a:srgbClr val="1F2937"/>
-                </a:solidFill>
-                <a:latin typeface="Calibri" panose="020F0502020204030204" pitchFamily="34" charset="0"/>
-                <a:ea typeface="-윤고딕340" pitchFamily="18" charset="-127"/>
-                <a:cs typeface="Calibri" panose="020F0502020204030204" pitchFamily="34" charset="0"/>
-              </a:rPr>
-              <a:t>Analysis plan fixed before the runs</a:t>
-            </a:r>
-            <a:r>
-              <a:rPr kumimoji="1" lang="en-US" altLang="ko-KR" sz="1250" dirty="0">
-                <a:solidFill>
-                  <a:srgbClr val="1F2937"/>
-                </a:solidFill>
-                <a:latin typeface="Calibri" panose="020F0502020204030204" pitchFamily="34" charset="0"/>
-                <a:ea typeface="-윤고딕340" pitchFamily="18" charset="-127"/>
-                <a:cs typeface="Calibri" panose="020F0502020204030204" pitchFamily="34" charset="0"/>
-              </a:rPr>
-              <a:t>: diffusive-regime checks, then an equivalence test (margin ±ln 1.5) on the log-ratio.</a:t>
+              <a:t>Fixed before any new result (Sep 12–19)</a:t>
             </a:r>
           </a:p>
         </p:txBody>
       </p:sp>
       <p:sp>
         <p:nvSpPr>
-          <p:cNvPr id="272" name="Recipe A"/>
+          <p:cNvPr id="275" name="Rule 1"/>
           <p:cNvSpPr/>
           <p:nvPr/>
         </p:nvSpPr>
         <p:spPr>
           <a:xfrm>
-            <a:off x="548640" y="4114800"/>
-            <a:ext cx="1920240" cy="868680"/>
+            <a:off x="4617720" y="1737360"/>
+            <a:ext cx="4023360" cy="676656"/>
           </a:xfrm>
           <a:prstGeom prst="roundRect">
             <a:avLst>
@@ -12319,14 +12200,111 @@
             </a:avLst>
           </a:prstGeom>
           <a:solidFill>
-            <a:srgbClr val="EEF3FA"/>
+            <a:srgbClr val="FFFFFF"/>
+          </a:solidFill>
+          <a:ln w="12700">
+            <a:solidFill>
+              <a:srgbClr val="C9D3E3"/>
+            </a:solidFill>
+          </a:ln>
+        </p:spPr>
+        <p:txBody>
+          <a:bodyPr wrap="square" lIns="109728" tIns="45720" rIns="109728" bIns="45720" rtlCol="0" anchor="t">
+            <a:noAutofit/>
+          </a:bodyPr>
+          <a:lstStyle/>
+          <a:p>
+            <a:pPr marL="0" indent="0" latinLnBrk="0">
+              <a:lnSpc>
+                <a:spcPct val="100000"/>
+              </a:lnSpc>
+              <a:spcAft>
+                <a:spcPts val="300"/>
+              </a:spcAft>
+              <a:buNone/>
+              <a:defRPr/>
+            </a:pPr>
+            <a:r>
+              <a:rPr kumimoji="1" lang="en-US" altLang="ko-KR" sz="1150" b="1" dirty="0">
+                <a:solidFill>
+                  <a:srgbClr val="1F497D"/>
+                </a:solidFill>
+                <a:latin typeface="Calibri" panose="020F0502020204030204" pitchFamily="34" charset="0"/>
+                <a:ea typeface="-윤고딕340" pitchFamily="18" charset="-127"/>
+                <a:cs typeface="Calibri" panose="020F0502020204030204" pitchFamily="34" charset="0"/>
+              </a:rPr>
+              <a:t>Primary readout</a:t>
+            </a:r>
+          </a:p>
+          <a:p>
+            <a:pPr marL="0" indent="0" latinLnBrk="0">
+              <a:lnSpc>
+                <a:spcPct val="100000"/>
+              </a:lnSpc>
+              <a:buNone/>
+              <a:defRPr/>
+            </a:pPr>
+            <a:r>
+              <a:rPr kumimoji="1" lang="en-US" altLang="ko-KR" sz="1000" dirty="0">
+                <a:solidFill>
+                  <a:srgbClr val="1F2937"/>
+                </a:solidFill>
+                <a:latin typeface="Calibri" panose="020F0502020204030204" pitchFamily="34" charset="0"/>
+                <a:ea typeface="-윤고딕340" pitchFamily="18" charset="-127"/>
+                <a:cs typeface="Calibri" panose="020F0502020204030204" pitchFamily="34" charset="0"/>
+              </a:rPr>
+              <a:t>D</a:t>
+            </a:r>
+            <a:r>
+              <a:rPr kumimoji="1" lang="en-US" altLang="ko-KR" sz="1000" baseline="-25000" dirty="0">
+                <a:solidFill>
+                  <a:srgbClr val="1F2937"/>
+                </a:solidFill>
+                <a:latin typeface="Calibri" panose="020F0502020204030204" pitchFamily="34" charset="0"/>
+                <a:ea typeface="-윤고딕340" pitchFamily="18" charset="-127"/>
+                <a:cs typeface="Calibri" panose="020F0502020204030204" pitchFamily="34" charset="0"/>
+              </a:rPr>
+              <a:t>rel</a:t>
+            </a:r>
+            <a:r>
+              <a:rPr kumimoji="1" lang="en-US" altLang="ko-KR" sz="1000" dirty="0">
+                <a:solidFill>
+                  <a:srgbClr val="1F2937"/>
+                </a:solidFill>
+                <a:latin typeface="Calibri" panose="020F0502020204030204" pitchFamily="34" charset="0"/>
+                <a:ea typeface="-윤고딕340" pitchFamily="18" charset="-127"/>
+                <a:cs typeface="Calibri" panose="020F0502020204030204" pitchFamily="34" charset="0"/>
+              </a:rPr>
+              <a:t> = D*(design) / D*(host): Li tracer diffusivity relative to the host, compared across designs</a:t>
+            </a:r>
+          </a:p>
+        </p:txBody>
+      </p:sp>
+      <p:sp>
+        <p:nvSpPr>
+          <p:cNvPr id="276" name="Rule 1 status"/>
+          <p:cNvSpPr/>
+          <p:nvPr/>
+        </p:nvSpPr>
+        <p:spPr>
+          <a:xfrm>
+            <a:off x="7086600" y="1783080"/>
+            <a:ext cx="1481328" cy="219456"/>
+          </a:xfrm>
+          <a:prstGeom prst="roundRect">
+            <a:avLst>
+              <a:gd name="adj" fmla="val 30000"/>
+            </a:avLst>
+          </a:prstGeom>
+          <a:solidFill>
+            <a:srgbClr val="E8F3EA"/>
           </a:solidFill>
           <a:ln>
             <a:noFill/>
           </a:ln>
         </p:spPr>
         <p:txBody>
-          <a:bodyPr wrap="square" lIns="91440" tIns="64008" rIns="91440" bIns="64008" rtlCol="0" anchor="ctr">
+          <a:bodyPr wrap="square" lIns="18288" tIns="0" rIns="18288" bIns="0" rtlCol="0" anchor="ctr">
             <a:noAutofit/>
           </a:bodyPr>
           <a:lstStyle/>
@@ -12339,7 +12317,62 @@
               <a:defRPr/>
             </a:pPr>
             <a:r>
-              <a:rPr kumimoji="1" lang="en-US" altLang="ko-KR" sz="1200" b="1" dirty="0">
+              <a:rPr kumimoji="1" lang="en-US" altLang="ko-KR" sz="900" b="1" dirty="0">
+                <a:solidFill>
+                  <a:srgbClr val="1B5E20"/>
+                </a:solidFill>
+                <a:latin typeface="Calibri" panose="020F0502020204030204" pitchFamily="34" charset="0"/>
+                <a:ea typeface="-윤고딕340" pitchFamily="18" charset="-127"/>
+                <a:cs typeface="Calibri" panose="020F0502020204030204" pitchFamily="34" charset="0"/>
+              </a:rPr>
+              <a:t>Ratified</a:t>
+            </a:r>
+          </a:p>
+        </p:txBody>
+      </p:sp>
+      <p:sp>
+        <p:nvSpPr>
+          <p:cNvPr id="277" name="Rule 2"/>
+          <p:cNvSpPr/>
+          <p:nvPr/>
+        </p:nvSpPr>
+        <p:spPr>
+          <a:xfrm>
+            <a:off x="4617720" y="2487168"/>
+            <a:ext cx="4023360" cy="676656"/>
+          </a:xfrm>
+          <a:prstGeom prst="roundRect">
+            <a:avLst>
+              <a:gd name="adj" fmla="val 6000"/>
+            </a:avLst>
+          </a:prstGeom>
+          <a:solidFill>
+            <a:srgbClr val="FFFFFF"/>
+          </a:solidFill>
+          <a:ln w="12700">
+            <a:solidFill>
+              <a:srgbClr val="C9D3E3"/>
+            </a:solidFill>
+          </a:ln>
+        </p:spPr>
+        <p:txBody>
+          <a:bodyPr wrap="square" lIns="109728" tIns="45720" rIns="109728" bIns="45720" rtlCol="0" anchor="t">
+            <a:noAutofit/>
+          </a:bodyPr>
+          <a:lstStyle/>
+          <a:p>
+            <a:pPr marL="0" indent="0" latinLnBrk="0">
+              <a:lnSpc>
+                <a:spcPct val="100000"/>
+              </a:lnSpc>
+              <a:spcAft>
+                <a:spcPts val="300"/>
+              </a:spcAft>
+              <a:buNone/>
+              <a:defRPr/>
+            </a:pPr>
+            <a:r>
+              <a:rPr kumimoji="1" lang="en-US" altLang="ko-KR" sz="1150" b="1" dirty="0">
                 <a:solidFill>
                   <a:srgbClr val="1F497D"/>
                 </a:solidFill>
@@ -12347,9 +12380,59 @@
                 <a:ea typeface="-윤고딕340" pitchFamily="18" charset="-127"/>
                 <a:cs typeface="Calibri" panose="020F0502020204030204" pitchFamily="34" charset="0"/>
               </a:rPr>
-              <a:t>Al₂O₃-derived</a:t>
-            </a:r>
-          </a:p>
+              <a:t>Design roster</a:t>
+            </a:r>
+          </a:p>
+          <a:p>
+            <a:pPr marL="0" indent="0" latinLnBrk="0">
+              <a:lnSpc>
+                <a:spcPct val="100000"/>
+              </a:lnSpc>
+              <a:buNone/>
+              <a:defRPr/>
+            </a:pPr>
+            <a:r>
+              <a:rPr kumimoji="1" lang="en-US" altLang="ko-KR" sz="1000" dirty="0">
+                <a:solidFill>
+                  <a:srgbClr val="1F2937"/>
+                </a:solidFill>
+                <a:latin typeface="Calibri" panose="020F0502020204030204" pitchFamily="34" charset="0"/>
+                <a:ea typeface="-윤고딕340" pitchFamily="18" charset="-127"/>
+                <a:cs typeface="Calibri" panose="020F0502020204030204" pitchFamily="34" charset="0"/>
+              </a:rPr>
+              <a:t>237 designs; one design = one composition (file names are not identifiers)</a:t>
+            </a:r>
+          </a:p>
+        </p:txBody>
+      </p:sp>
+      <p:sp>
+        <p:nvSpPr>
+          <p:cNvPr id="278" name="Rule 2 status"/>
+          <p:cNvSpPr/>
+          <p:nvPr/>
+        </p:nvSpPr>
+        <p:spPr>
+          <a:xfrm>
+            <a:off x="7086600" y="2532888"/>
+            <a:ext cx="1481328" cy="219456"/>
+          </a:xfrm>
+          <a:prstGeom prst="roundRect">
+            <a:avLst>
+              <a:gd name="adj" fmla="val 30000"/>
+            </a:avLst>
+          </a:prstGeom>
+          <a:solidFill>
+            <a:srgbClr val="E8F3EA"/>
+          </a:solidFill>
+          <a:ln>
+            <a:noFill/>
+          </a:ln>
+        </p:spPr>
+        <p:txBody>
+          <a:bodyPr wrap="square" lIns="18288" tIns="0" rIns="18288" bIns="0" rtlCol="0" anchor="ctr">
+            <a:noAutofit/>
+          </a:bodyPr>
+          <a:lstStyle/>
           <a:p>
             <a:pPr marL="0" indent="0" latinLnBrk="0" algn="ctr">
               <a:lnSpc>
@@ -12359,29 +12442,29 @@
               <a:defRPr/>
             </a:pPr>
             <a:r>
-              <a:rPr kumimoji="1" lang="en-US" altLang="ko-KR" sz="1050" dirty="0">
-                <a:solidFill>
-                  <a:srgbClr val="1F2937"/>
+              <a:rPr kumimoji="1" lang="en-US" altLang="ko-KR" sz="900" b="1" dirty="0">
+                <a:solidFill>
+                  <a:srgbClr val="1B5E20"/>
                 </a:solidFill>
                 <a:latin typeface="Calibri" panose="020F0502020204030204" pitchFamily="34" charset="0"/>
                 <a:ea typeface="-윤고딕340" pitchFamily="18" charset="-127"/>
                 <a:cs typeface="Calibri" panose="020F0502020204030204" pitchFamily="34" charset="0"/>
               </a:rPr>
-              <a:t>2 Al + 3 O + 4 Li vacancies</a:t>
+              <a:t>Ratified</a:t>
             </a:r>
           </a:p>
         </p:txBody>
       </p:sp>
       <p:sp>
         <p:nvSpPr>
-          <p:cNvPr id="273" name="Recipe B"/>
+          <p:cNvPr id="279" name="Rule 3"/>
           <p:cNvSpPr/>
           <p:nvPr/>
         </p:nvSpPr>
         <p:spPr>
           <a:xfrm>
-            <a:off x="2697480" y="4114800"/>
-            <a:ext cx="1920240" cy="868680"/>
+            <a:off x="4617720" y="3236976"/>
+            <a:ext cx="4023360" cy="676656"/>
           </a:xfrm>
           <a:prstGeom prst="roundRect">
             <a:avLst>
@@ -12389,14 +12472,89 @@
             </a:avLst>
           </a:prstGeom>
           <a:solidFill>
-            <a:srgbClr val="F3F4F6"/>
+            <a:srgbClr val="FFFFFF"/>
+          </a:solidFill>
+          <a:ln w="12700">
+            <a:solidFill>
+              <a:srgbClr val="C9D3E3"/>
+            </a:solidFill>
+          </a:ln>
+        </p:spPr>
+        <p:txBody>
+          <a:bodyPr wrap="square" lIns="109728" tIns="45720" rIns="109728" bIns="45720" rtlCol="0" anchor="t">
+            <a:noAutofit/>
+          </a:bodyPr>
+          <a:lstStyle/>
+          <a:p>
+            <a:pPr marL="0" indent="0" latinLnBrk="0">
+              <a:lnSpc>
+                <a:spcPct val="100000"/>
+              </a:lnSpc>
+              <a:spcAft>
+                <a:spcPts val="300"/>
+              </a:spcAft>
+              <a:buNone/>
+              <a:defRPr/>
+            </a:pPr>
+            <a:r>
+              <a:rPr kumimoji="1" lang="en-US" altLang="ko-KR" sz="1150" b="1" dirty="0">
+                <a:solidFill>
+                  <a:srgbClr val="1F497D"/>
+                </a:solidFill>
+                <a:latin typeface="Calibri" panose="020F0502020204030204" pitchFamily="34" charset="0"/>
+                <a:ea typeface="-윤고딕340" pitchFamily="18" charset="-127"/>
+                <a:cs typeface="Calibri" panose="020F0502020204030204" pitchFamily="34" charset="0"/>
+              </a:rPr>
+              <a:t>Build rules</a:t>
+            </a:r>
+          </a:p>
+          <a:p>
+            <a:pPr marL="0" indent="0" latinLnBrk="0">
+              <a:lnSpc>
+                <a:spcPct val="100000"/>
+              </a:lnSpc>
+              <a:buNone/>
+              <a:defRPr/>
+            </a:pPr>
+            <a:r>
+              <a:rPr kumimoji="1" lang="en-US" altLang="ko-KR" sz="1000" dirty="0">
+                <a:solidFill>
+                  <a:srgbClr val="1F2937"/>
+                </a:solidFill>
+                <a:latin typeface="Calibri" panose="020F0502020204030204" pitchFamily="34" charset="0"/>
+                <a:ea typeface="-윤고딕340" pitchFamily="18" charset="-127"/>
+                <a:cs typeface="Calibri" panose="020F0502020204030204" pitchFamily="34" charset="0"/>
+              </a:rPr>
+              <a:t>Parent sites fixed before substitution · full charge balance incl. vacancies · refusals counted separately</a:t>
+            </a:r>
+          </a:p>
+        </p:txBody>
+      </p:sp>
+      <p:sp>
+        <p:nvSpPr>
+          <p:cNvPr id="280" name="Rule 3 status"/>
+          <p:cNvSpPr/>
+          <p:nvPr/>
+        </p:nvSpPr>
+        <p:spPr>
+          <a:xfrm>
+            <a:off x="7086600" y="3282696"/>
+            <a:ext cx="1481328" cy="219456"/>
+          </a:xfrm>
+          <a:prstGeom prst="roundRect">
+            <a:avLst>
+              <a:gd name="adj" fmla="val 30000"/>
+            </a:avLst>
+          </a:prstGeom>
+          <a:solidFill>
+            <a:srgbClr val="E8F3EA"/>
           </a:solidFill>
           <a:ln>
             <a:noFill/>
           </a:ln>
         </p:spPr>
         <p:txBody>
-          <a:bodyPr wrap="square" lIns="91440" tIns="64008" rIns="91440" bIns="64008" rtlCol="0" anchor="ctr">
+          <a:bodyPr wrap="square" lIns="18288" tIns="0" rIns="18288" bIns="0" rtlCol="0" anchor="ctr">
             <a:noAutofit/>
           </a:bodyPr>
           <a:lstStyle/>
@@ -12409,17 +12567,122 @@
               <a:defRPr/>
             </a:pPr>
             <a:r>
-              <a:rPr kumimoji="1" lang="en-US" altLang="ko-KR" sz="1200" b="1" dirty="0">
-                <a:solidFill>
-                  <a:srgbClr val="374151"/>
+              <a:rPr kumimoji="1" lang="en-US" altLang="ko-KR" sz="900" b="1" dirty="0">
+                <a:solidFill>
+                  <a:srgbClr val="1B5E20"/>
                 </a:solidFill>
                 <a:latin typeface="Calibri" panose="020F0502020204030204" pitchFamily="34" charset="0"/>
                 <a:ea typeface="-윤고딕340" pitchFamily="18" charset="-127"/>
                 <a:cs typeface="Calibri" panose="020F0502020204030204" pitchFamily="34" charset="0"/>
               </a:rPr>
-              <a:t>Al₂S₃-derived</a:t>
-            </a:r>
-          </a:p>
+              <a:t>Ratified</a:t>
+            </a:r>
+          </a:p>
+        </p:txBody>
+      </p:sp>
+      <p:sp>
+        <p:nvSpPr>
+          <p:cNvPr id="281" name="Rule 4"/>
+          <p:cNvSpPr/>
+          <p:nvPr/>
+        </p:nvSpPr>
+        <p:spPr>
+          <a:xfrm>
+            <a:off x="4617720" y="3986784"/>
+            <a:ext cx="4023360" cy="676656"/>
+          </a:xfrm>
+          <a:prstGeom prst="roundRect">
+            <a:avLst>
+              <a:gd name="adj" fmla="val 6000"/>
+            </a:avLst>
+          </a:prstGeom>
+          <a:solidFill>
+            <a:srgbClr val="FFFFFF"/>
+          </a:solidFill>
+          <a:ln w="12700">
+            <a:solidFill>
+              <a:srgbClr val="C9D3E3"/>
+            </a:solidFill>
+          </a:ln>
+        </p:spPr>
+        <p:txBody>
+          <a:bodyPr wrap="square" lIns="109728" tIns="45720" rIns="109728" bIns="45720" rtlCol="0" anchor="t">
+            <a:noAutofit/>
+          </a:bodyPr>
+          <a:lstStyle/>
+          <a:p>
+            <a:pPr marL="0" indent="0" latinLnBrk="0">
+              <a:lnSpc>
+                <a:spcPct val="100000"/>
+              </a:lnSpc>
+              <a:spcAft>
+                <a:spcPts val="300"/>
+              </a:spcAft>
+              <a:buNone/>
+              <a:defRPr/>
+            </a:pPr>
+            <a:r>
+              <a:rPr kumimoji="1" lang="en-US" altLang="ko-KR" sz="1150" b="1" dirty="0">
+                <a:solidFill>
+                  <a:srgbClr val="1F497D"/>
+                </a:solidFill>
+                <a:latin typeface="Calibri" panose="020F0502020204030204" pitchFamily="34" charset="0"/>
+                <a:ea typeface="-윤고딕340" pitchFamily="18" charset="-127"/>
+                <a:cs typeface="Calibri" panose="020F0502020204030204" pitchFamily="34" charset="0"/>
+              </a:rPr>
+              <a:t>Representative</a:t>
+            </a:r>
+          </a:p>
+          <a:p>
+            <a:pPr marL="0" indent="0" latinLnBrk="0">
+              <a:lnSpc>
+                <a:spcPct val="100000"/>
+              </a:lnSpc>
+              <a:buNone/>
+              <a:defRPr/>
+            </a:pPr>
+            <a:r>
+              <a:rPr kumimoji="1" lang="en-US" altLang="ko-KR" sz="1000" dirty="0">
+                <a:solidFill>
+                  <a:srgbClr val="1F2937"/>
+                </a:solidFill>
+                <a:latin typeface="Calibri" panose="020F0502020204030204" pitchFamily="34" charset="0"/>
+                <a:ea typeface="-윤고딕340" pitchFamily="18" charset="-127"/>
+                <a:cs typeface="Calibri" panose="020F0502020204030204" pitchFamily="34" charset="0"/>
+              </a:rPr>
+              <a:t>The configuration with the median substitution energy stands for its design</a:t>
+            </a:r>
+          </a:p>
+        </p:txBody>
+      </p:sp>
+      <p:sp>
+        <p:nvSpPr>
+          <p:cNvPr id="282" name="Rule 4 status"/>
+          <p:cNvSpPr/>
+          <p:nvPr/>
+        </p:nvSpPr>
+        <p:spPr>
+          <a:xfrm>
+            <a:off x="7086600" y="4032504"/>
+            <a:ext cx="1481328" cy="219456"/>
+          </a:xfrm>
+          <a:prstGeom prst="roundRect">
+            <a:avLst>
+              <a:gd name="adj" fmla="val 30000"/>
+            </a:avLst>
+          </a:prstGeom>
+          <a:solidFill>
+            <a:srgbClr val="E8F3EA"/>
+          </a:solidFill>
+          <a:ln>
+            <a:noFill/>
+          </a:ln>
+        </p:spPr>
+        <p:txBody>
+          <a:bodyPr wrap="square" lIns="18288" tIns="0" rIns="18288" bIns="0" rtlCol="0" anchor="ctr">
+            <a:noAutofit/>
+          </a:bodyPr>
+          <a:lstStyle/>
           <a:p>
             <a:pPr marL="0" indent="0" latinLnBrk="0" algn="ctr">
               <a:lnSpc>
@@ -12429,29 +12692,154 @@
               <a:defRPr/>
             </a:pPr>
             <a:r>
-              <a:rPr kumimoji="1" lang="en-US" altLang="ko-KR" sz="1050" dirty="0">
-                <a:solidFill>
-                  <a:srgbClr val="1F2937"/>
+              <a:rPr kumimoji="1" lang="en-US" altLang="ko-KR" sz="900" b="1" dirty="0">
+                <a:solidFill>
+                  <a:srgbClr val="1B5E20"/>
                 </a:solidFill>
                 <a:latin typeface="Calibri" panose="020F0502020204030204" pitchFamily="34" charset="0"/>
                 <a:ea typeface="-윤고딕340" pitchFamily="18" charset="-127"/>
                 <a:cs typeface="Calibri" panose="020F0502020204030204" pitchFamily="34" charset="0"/>
               </a:rPr>
-              <a:t>2 Al + 4 Li vacancies (S unchanged)</a:t>
+              <a:t>Ratified</a:t>
             </a:r>
           </a:p>
         </p:txBody>
       </p:sp>
       <p:sp>
         <p:nvSpPr>
-          <p:cNvPr id="274" name="Recipe note"/>
+          <p:cNvPr id="283" name="Rule 5"/>
+          <p:cNvSpPr/>
+          <p:nvPr/>
+        </p:nvSpPr>
+        <p:spPr>
+          <a:xfrm>
+            <a:off x="4617720" y="4736592"/>
+            <a:ext cx="4023360" cy="676656"/>
+          </a:xfrm>
+          <a:prstGeom prst="roundRect">
+            <a:avLst>
+              <a:gd name="adj" fmla="val 6000"/>
+            </a:avLst>
+          </a:prstGeom>
+          <a:solidFill>
+            <a:srgbClr val="FFFFFF"/>
+          </a:solidFill>
+          <a:ln w="12700">
+            <a:solidFill>
+              <a:srgbClr val="C9D3E3"/>
+            </a:solidFill>
+          </a:ln>
+        </p:spPr>
+        <p:txBody>
+          <a:bodyPr wrap="square" lIns="109728" tIns="45720" rIns="109728" bIns="45720" rtlCol="0" anchor="t">
+            <a:noAutofit/>
+          </a:bodyPr>
+          <a:lstStyle/>
+          <a:p>
+            <a:pPr marL="0" indent="0" latinLnBrk="0">
+              <a:lnSpc>
+                <a:spcPct val="100000"/>
+              </a:lnSpc>
+              <a:spcAft>
+                <a:spcPts val="300"/>
+              </a:spcAft>
+              <a:buNone/>
+              <a:defRPr/>
+            </a:pPr>
+            <a:r>
+              <a:rPr kumimoji="1" lang="en-US" altLang="ko-KR" sz="1150" b="1" dirty="0">
+                <a:solidFill>
+                  <a:srgbClr val="1F497D"/>
+                </a:solidFill>
+                <a:latin typeface="Calibri" panose="020F0502020204030204" pitchFamily="34" charset="0"/>
+                <a:ea typeface="-윤고딕340" pitchFamily="18" charset="-127"/>
+                <a:cs typeface="Calibri" panose="020F0502020204030204" pitchFamily="34" charset="0"/>
+              </a:rPr>
+              <a:t>Ranking margin</a:t>
+            </a:r>
+          </a:p>
+          <a:p>
+            <a:pPr marL="0" indent="0" latinLnBrk="0">
+              <a:lnSpc>
+                <a:spcPct val="100000"/>
+              </a:lnSpc>
+              <a:buNone/>
+              <a:defRPr/>
+            </a:pPr>
+            <a:r>
+              <a:rPr kumimoji="1" lang="en-US" altLang="ko-KR" sz="1000" dirty="0">
+                <a:solidFill>
+                  <a:srgbClr val="1F2937"/>
+                </a:solidFill>
+                <a:latin typeface="Calibri" panose="020F0502020204030204" pitchFamily="34" charset="0"/>
+                <a:ea typeface="-윤고딕340" pitchFamily="18" charset="-127"/>
+                <a:cs typeface="Calibri" panose="020F0502020204030204" pitchFamily="34" charset="0"/>
+              </a:rPr>
+              <a:t>How large a difference must be before one design is called better (δ)</a:t>
+            </a:r>
+          </a:p>
+        </p:txBody>
+      </p:sp>
+      <p:sp>
+        <p:nvSpPr>
+          <p:cNvPr id="284" name="Rule 5 status"/>
+          <p:cNvSpPr/>
+          <p:nvPr/>
+        </p:nvSpPr>
+        <p:spPr>
+          <a:xfrm>
+            <a:off x="7086600" y="4782312"/>
+            <a:ext cx="1481328" cy="219456"/>
+          </a:xfrm>
+          <a:prstGeom prst="roundRect">
+            <a:avLst>
+              <a:gd name="adj" fmla="val 30000"/>
+            </a:avLst>
+          </a:prstGeom>
+          <a:solidFill>
+            <a:srgbClr val="FFF4E0"/>
+          </a:solidFill>
+          <a:ln>
+            <a:noFill/>
+          </a:ln>
+        </p:spPr>
+        <p:txBody>
+          <a:bodyPr wrap="square" lIns="18288" tIns="0" rIns="18288" bIns="0" rtlCol="0" anchor="ctr">
+            <a:noAutofit/>
+          </a:bodyPr>
+          <a:lstStyle/>
+          <a:p>
+            <a:pPr marL="0" indent="0" latinLnBrk="0" algn="ctr">
+              <a:lnSpc>
+                <a:spcPct val="100000"/>
+              </a:lnSpc>
+              <a:buNone/>
+              <a:defRPr/>
+            </a:pPr>
+            <a:r>
+              <a:rPr kumimoji="1" lang="en-US" altLang="ko-KR" sz="900" b="1" dirty="0">
+                <a:solidFill>
+                  <a:srgbClr val="8A5A00"/>
+                </a:solidFill>
+                <a:latin typeface="Calibri" panose="020F0502020204030204" pitchFamily="34" charset="0"/>
+                <a:ea typeface="-윤고딕340" pitchFamily="18" charset="-127"/>
+                <a:cs typeface="Calibri" panose="020F0502020204030204" pitchFamily="34" charset="0"/>
+              </a:rPr>
+              <a:t>Proposed · δ open</a:t>
+            </a:r>
+          </a:p>
+        </p:txBody>
+      </p:sp>
+      <p:sp>
+        <p:nvSpPr>
+          <p:cNvPr id="285" name="Scope note"/>
           <p:cNvSpPr txBox="1"/>
           <p:nvPr/>
         </p:nvSpPr>
         <p:spPr>
           <a:xfrm>
-            <a:off x="548640" y="5047488"/>
-            <a:ext cx="4069080" cy="685800"/>
+            <a:off x="502920" y="5623560"/>
+            <a:ext cx="8138160" cy="457200"/>
           </a:xfrm>
           <a:prstGeom prst="rect">
             <a:avLst/>
@@ -12464,7 +12852,7 @@
           </a:bodyPr>
           <a:lstStyle/>
           <a:p>
-            <a:pPr marL="0" indent="0" latinLnBrk="0" algn="ctr">
+            <a:pPr marL="0" indent="0" latinLnBrk="0">
               <a:lnSpc>
                 <a:spcPct val="105000"/>
               </a:lnSpc>
@@ -12472,27 +12860,18 @@
               <a:defRPr/>
             </a:pPr>
             <a:r>
-              <a:rPr kumimoji="1" lang="en-US" altLang="ko-KR" sz="1050" dirty="0">
-                <a:solidFill>
-                  <a:srgbClr val="6B7280"/>
+              <a:rPr kumimoji="1" lang="en-US" altLang="ko-KR" sz="1200" dirty="0">
+                <a:solidFill>
+                  <a:srgbClr val="0070C0"/>
                 </a:solidFill>
                 <a:latin typeface="Calibri" panose="020F0502020204030204" pitchFamily="34" charset="0"/>
                 <a:ea typeface="-윤고딕340" pitchFamily="18" charset="-127"/>
                 <a:cs typeface="Calibri" panose="020F0502020204030204" pitchFamily="34" charset="0"/>
               </a:rPr>
-              <a:t>Same host configuration and cell volume — only the precursor anion differs</a:t>
-            </a:r>
-          </a:p>
-          <a:p>
-            <a:pPr marL="0" indent="0" latinLnBrk="0" algn="ctr">
-              <a:lnSpc>
-                <a:spcPct val="110000"/>
-              </a:lnSpc>
-              <a:buNone/>
-              <a:defRPr/>
-            </a:pPr>
-            <a:r>
-              <a:rPr kumimoji="1" lang="en-US" altLang="ko-KR" sz="1300" b="1" dirty="0">
+              <a:t>237 designs ≠ 237 runs: the execution scope is decided </a:t>
+            </a:r>
+            <a:r>
+              <a:rPr kumimoji="1" lang="en-US" altLang="ko-KR" sz="1200" b="1" dirty="0">
                 <a:solidFill>
                   <a:srgbClr val="0070C0"/>
                 </a:solidFill>
@@ -12500,1116 +12879,18 @@
                 <a:ea typeface="-윤고딕340" pitchFamily="18" charset="-127"/>
                 <a:cs typeface="Calibri" panose="020F0502020204030204" pitchFamily="34" charset="0"/>
               </a:rPr>
-              <a:t>→ D(Al₂O₃) / D(Al₂S₃)</a:t>
-            </a:r>
-          </a:p>
-        </p:txBody>
-      </p:sp>
-      <p:graphicFrame>
-        <p:nvGraphicFramePr>
-          <p:cNvPr id="275" name="Settings table"/>
-          <p:cNvGraphicFramePr>
-            <a:graphicFrameLocks noGrp="1"/>
-          </p:cNvGraphicFramePr>
-          <p:nvPr/>
-        </p:nvGraphicFramePr>
-        <p:xfrm>
-          <a:off x="4846320" y="1371600"/>
-          <a:ext cx="3794760" cy="3657600"/>
-        </p:xfrm>
-        <a:graphic>
-          <a:graphicData uri="http://schemas.openxmlformats.org/drawingml/2006/table">
-            <a:tbl>
-              <a:tblPr firstRow="1" bandRow="1">
-                <a:tableStyleId>{3B4B98B0-60AC-42C2-AFA5-B58CD77FA1E5}</a:tableStyleId>
-              </a:tblPr>
-              <a:tblGrid>
-                <a:gridCol w="1280160"/>
-                <a:gridCol w="2514600"/>
-              </a:tblGrid>
-              <a:tr h="310896">
-                <a:tc>
-                  <a:txBody>
-                    <a:bodyPr/>
-                    <a:lstStyle/>
-                    <a:p>
-                      <a:pPr marL="0" indent="0" latinLnBrk="0" algn="ctr">
-                        <a:lnSpc>
-                          <a:spcPct val="100000"/>
-                        </a:lnSpc>
-                        <a:buNone/>
-                        <a:defRPr/>
-                      </a:pPr>
-                      <a:r>
-                        <a:rPr kumimoji="1" lang="en-US" altLang="ko-KR" sz="1200" b="1" dirty="0">
-                          <a:solidFill>
-                            <a:srgbClr val="1F2937"/>
-                          </a:solidFill>
-                          <a:latin typeface="Calibri" panose="020F0502020204030204" pitchFamily="34" charset="0"/>
-                          <a:ea typeface="-윤고딕340" pitchFamily="18" charset="-127"/>
-                          <a:cs typeface="Calibri" panose="020F0502020204030204" pitchFamily="34" charset="0"/>
-                        </a:rPr>
-                        <a:t>Setting</a:t>
-                      </a:r>
-                    </a:p>
-                  </a:txBody>
-                  <a:tcPr marL="54864" marR="54864" marT="27432" marB="27432" anchor="ctr">
-                    <a:lnL w="12700" cap="flat" cmpd="sng" algn="ctr">
-                      <a:solidFill>
-                        <a:srgbClr val="C9D3E3"/>
-                      </a:solidFill>
-                      <a:prstDash val="solid"/>
-                      <a:round/>
-                      <a:headEnd type="none" w="med" len="med"/>
-                      <a:tailEnd type="none" w="med" len="med"/>
-                    </a:lnL>
-                    <a:lnR w="12700" cap="flat" cmpd="sng" algn="ctr">
-                      <a:solidFill>
-                        <a:srgbClr val="C9D3E3"/>
-                      </a:solidFill>
-                      <a:prstDash val="solid"/>
-                      <a:round/>
-                      <a:headEnd type="none" w="med" len="med"/>
-                      <a:tailEnd type="none" w="med" len="med"/>
-                    </a:lnR>
-                    <a:lnT w="12700" cap="flat" cmpd="sng" algn="ctr">
-                      <a:solidFill>
-                        <a:srgbClr val="C9D3E3"/>
-                      </a:solidFill>
-                      <a:prstDash val="solid"/>
-                      <a:round/>
-                      <a:headEnd type="none" w="med" len="med"/>
-                      <a:tailEnd type="none" w="med" len="med"/>
-                    </a:lnT>
-                    <a:lnB w="12700" cap="flat" cmpd="sng" algn="ctr">
-                      <a:solidFill>
-                        <a:srgbClr val="C9D3E3"/>
-                      </a:solidFill>
-                      <a:prstDash val="solid"/>
-                      <a:round/>
-                      <a:headEnd type="none" w="med" len="med"/>
-                      <a:tailEnd type="none" w="med" len="med"/>
-                    </a:lnB>
-                  </a:tcPr>
-                </a:tc>
-                <a:tc>
-                  <a:txBody>
-                    <a:bodyPr/>
-                    <a:lstStyle/>
-                    <a:p>
-                      <a:pPr marL="0" indent="0" latinLnBrk="0" algn="ctr">
-                        <a:lnSpc>
-                          <a:spcPct val="100000"/>
-                        </a:lnSpc>
-                        <a:buNone/>
-                        <a:defRPr/>
-                      </a:pPr>
-                      <a:r>
-                        <a:rPr kumimoji="1" lang="en-US" altLang="ko-KR" sz="1200" b="1" dirty="0">
-                          <a:solidFill>
-                            <a:srgbClr val="1F2937"/>
-                          </a:solidFill>
-                          <a:latin typeface="Calibri" panose="020F0502020204030204" pitchFamily="34" charset="0"/>
-                          <a:ea typeface="-윤고딕340" pitchFamily="18" charset="-127"/>
-                          <a:cs typeface="Calibri" panose="020F0502020204030204" pitchFamily="34" charset="0"/>
-                        </a:rPr>
-                        <a:t>Value</a:t>
-                      </a:r>
-                    </a:p>
-                  </a:txBody>
-                  <a:tcPr marL="54864" marR="54864" marT="27432" marB="27432" anchor="ctr">
-                    <a:lnL w="12700" cap="flat" cmpd="sng" algn="ctr">
-                      <a:solidFill>
-                        <a:srgbClr val="C9D3E3"/>
-                      </a:solidFill>
-                      <a:prstDash val="solid"/>
-                      <a:round/>
-                      <a:headEnd type="none" w="med" len="med"/>
-                      <a:tailEnd type="none" w="med" len="med"/>
-                    </a:lnL>
-                    <a:lnR w="12700" cap="flat" cmpd="sng" algn="ctr">
-                      <a:solidFill>
-                        <a:srgbClr val="C9D3E3"/>
-                      </a:solidFill>
-                      <a:prstDash val="solid"/>
-                      <a:round/>
-                      <a:headEnd type="none" w="med" len="med"/>
-                      <a:tailEnd type="none" w="med" len="med"/>
-                    </a:lnR>
-                    <a:lnT w="12700" cap="flat" cmpd="sng" algn="ctr">
-                      <a:solidFill>
-                        <a:srgbClr val="C9D3E3"/>
-                      </a:solidFill>
-                      <a:prstDash val="solid"/>
-                      <a:round/>
-                      <a:headEnd type="none" w="med" len="med"/>
-                      <a:tailEnd type="none" w="med" len="med"/>
-                    </a:lnT>
-                    <a:lnB w="12700" cap="flat" cmpd="sng" algn="ctr">
-                      <a:solidFill>
-                        <a:srgbClr val="C9D3E3"/>
-                      </a:solidFill>
-                      <a:prstDash val="solid"/>
-                      <a:round/>
-                      <a:headEnd type="none" w="med" len="med"/>
-                      <a:tailEnd type="none" w="med" len="med"/>
-                    </a:lnB>
-                  </a:tcPr>
-                </a:tc>
-              </a:tr>
-              <a:tr h="384048">
-                <a:tc>
-                  <a:txBody>
-                    <a:bodyPr/>
-                    <a:lstStyle/>
-                    <a:p>
-                      <a:pPr marL="0" indent="0" latinLnBrk="0" algn="l">
-                        <a:lnSpc>
-                          <a:spcPct val="100000"/>
-                        </a:lnSpc>
-                        <a:buNone/>
-                        <a:defRPr/>
-                      </a:pPr>
-                      <a:r>
-                        <a:rPr kumimoji="1" lang="en-US" altLang="ko-KR" sz="1100" dirty="0">
-                          <a:solidFill>
-                            <a:srgbClr val="1F2937"/>
-                          </a:solidFill>
-                          <a:latin typeface="Calibri" panose="020F0502020204030204" pitchFamily="34" charset="0"/>
-                          <a:ea typeface="-윤고딕340" pitchFamily="18" charset="-127"/>
-                          <a:cs typeface="Calibri" panose="020F0502020204030204" pitchFamily="34" charset="0"/>
-                        </a:rPr>
-                        <a:t>Potential</a:t>
-                      </a:r>
-                    </a:p>
-                  </a:txBody>
-                  <a:tcPr marL="54864" marR="54864" marT="27432" marB="27432" anchor="ctr">
-                    <a:lnL w="12700" cap="flat" cmpd="sng" algn="ctr">
-                      <a:solidFill>
-                        <a:srgbClr val="C9D3E3"/>
-                      </a:solidFill>
-                      <a:prstDash val="solid"/>
-                      <a:round/>
-                      <a:headEnd type="none" w="med" len="med"/>
-                      <a:tailEnd type="none" w="med" len="med"/>
-                    </a:lnL>
-                    <a:lnR w="12700" cap="flat" cmpd="sng" algn="ctr">
-                      <a:solidFill>
-                        <a:srgbClr val="C9D3E3"/>
-                      </a:solidFill>
-                      <a:prstDash val="solid"/>
-                      <a:round/>
-                      <a:headEnd type="none" w="med" len="med"/>
-                      <a:tailEnd type="none" w="med" len="med"/>
-                    </a:lnR>
-                    <a:lnT w="12700" cap="flat" cmpd="sng" algn="ctr">
-                      <a:solidFill>
-                        <a:srgbClr val="C9D3E3"/>
-                      </a:solidFill>
-                      <a:prstDash val="solid"/>
-                      <a:round/>
-                      <a:headEnd type="none" w="med" len="med"/>
-                      <a:tailEnd type="none" w="med" len="med"/>
-                    </a:lnT>
-                    <a:lnB w="12700" cap="flat" cmpd="sng" algn="ctr">
-                      <a:solidFill>
-                        <a:srgbClr val="C9D3E3"/>
-                      </a:solidFill>
-                      <a:prstDash val="solid"/>
-                      <a:round/>
-                      <a:headEnd type="none" w="med" len="med"/>
-                      <a:tailEnd type="none" w="med" len="med"/>
-                    </a:lnB>
-                  </a:tcPr>
-                </a:tc>
-                <a:tc>
-                  <a:txBody>
-                    <a:bodyPr/>
-                    <a:lstStyle/>
-                    <a:p>
-                      <a:pPr marL="0" indent="0" latinLnBrk="0" algn="l">
-                        <a:lnSpc>
-                          <a:spcPct val="100000"/>
-                        </a:lnSpc>
-                        <a:buNone/>
-                        <a:defRPr/>
-                      </a:pPr>
-                      <a:r>
-                        <a:rPr kumimoji="1" lang="en-US" altLang="ko-KR" sz="1100" dirty="0">
-                          <a:solidFill>
-                            <a:srgbClr val="1F2937"/>
-                          </a:solidFill>
-                          <a:latin typeface="Calibri" panose="020F0502020204030204" pitchFamily="34" charset="0"/>
-                          <a:ea typeface="-윤고딕340" pitchFamily="18" charset="-127"/>
-                          <a:cs typeface="Calibri" panose="020F0502020204030204" pitchFamily="34" charset="0"/>
-                        </a:rPr>
-                        <a:t>UMA (universal MLIP)</a:t>
-                      </a:r>
-                    </a:p>
-                  </a:txBody>
-                  <a:tcPr marL="54864" marR="54864" marT="27432" marB="27432" anchor="ctr">
-                    <a:lnL w="12700" cap="flat" cmpd="sng" algn="ctr">
-                      <a:solidFill>
-                        <a:srgbClr val="C9D3E3"/>
-                      </a:solidFill>
-                      <a:prstDash val="solid"/>
-                      <a:round/>
-                      <a:headEnd type="none" w="med" len="med"/>
-                      <a:tailEnd type="none" w="med" len="med"/>
-                    </a:lnL>
-                    <a:lnR w="12700" cap="flat" cmpd="sng" algn="ctr">
-                      <a:solidFill>
-                        <a:srgbClr val="C9D3E3"/>
-                      </a:solidFill>
-                      <a:prstDash val="solid"/>
-                      <a:round/>
-                      <a:headEnd type="none" w="med" len="med"/>
-                      <a:tailEnd type="none" w="med" len="med"/>
-                    </a:lnR>
-                    <a:lnT w="12700" cap="flat" cmpd="sng" algn="ctr">
-                      <a:solidFill>
-                        <a:srgbClr val="C9D3E3"/>
-                      </a:solidFill>
-                      <a:prstDash val="solid"/>
-                      <a:round/>
-                      <a:headEnd type="none" w="med" len="med"/>
-                      <a:tailEnd type="none" w="med" len="med"/>
-                    </a:lnT>
-                    <a:lnB w="12700" cap="flat" cmpd="sng" algn="ctr">
-                      <a:solidFill>
-                        <a:srgbClr val="C9D3E3"/>
-                      </a:solidFill>
-                      <a:prstDash val="solid"/>
-                      <a:round/>
-                      <a:headEnd type="none" w="med" len="med"/>
-                      <a:tailEnd type="none" w="med" len="med"/>
-                    </a:lnB>
-                  </a:tcPr>
-                </a:tc>
-              </a:tr>
-              <a:tr h="384048">
-                <a:tc>
-                  <a:txBody>
-                    <a:bodyPr/>
-                    <a:lstStyle/>
-                    <a:p>
-                      <a:pPr marL="0" indent="0" latinLnBrk="0" algn="l">
-                        <a:lnSpc>
-                          <a:spcPct val="100000"/>
-                        </a:lnSpc>
-                        <a:buNone/>
-                        <a:defRPr/>
-                      </a:pPr>
-                      <a:r>
-                        <a:rPr kumimoji="1" lang="en-US" altLang="ko-KR" sz="1100" dirty="0">
-                          <a:solidFill>
-                            <a:srgbClr val="1F2937"/>
-                          </a:solidFill>
-                          <a:latin typeface="Calibri" panose="020F0502020204030204" pitchFamily="34" charset="0"/>
-                          <a:ea typeface="-윤고딕340" pitchFamily="18" charset="-127"/>
-                          <a:cs typeface="Calibri" panose="020F0502020204030204" pitchFamily="34" charset="0"/>
-                        </a:rPr>
-                        <a:t>Ensemble</a:t>
-                      </a:r>
-                    </a:p>
-                  </a:txBody>
-                  <a:tcPr marL="54864" marR="54864" marT="27432" marB="27432" anchor="ctr">
-                    <a:lnL w="12700" cap="flat" cmpd="sng" algn="ctr">
-                      <a:solidFill>
-                        <a:srgbClr val="C9D3E3"/>
-                      </a:solidFill>
-                      <a:prstDash val="solid"/>
-                      <a:round/>
-                      <a:headEnd type="none" w="med" len="med"/>
-                      <a:tailEnd type="none" w="med" len="med"/>
-                    </a:lnL>
-                    <a:lnR w="12700" cap="flat" cmpd="sng" algn="ctr">
-                      <a:solidFill>
-                        <a:srgbClr val="C9D3E3"/>
-                      </a:solidFill>
-                      <a:prstDash val="solid"/>
-                      <a:round/>
-                      <a:headEnd type="none" w="med" len="med"/>
-                      <a:tailEnd type="none" w="med" len="med"/>
-                    </a:lnR>
-                    <a:lnT w="12700" cap="flat" cmpd="sng" algn="ctr">
-                      <a:solidFill>
-                        <a:srgbClr val="C9D3E3"/>
-                      </a:solidFill>
-                      <a:prstDash val="solid"/>
-                      <a:round/>
-                      <a:headEnd type="none" w="med" len="med"/>
-                      <a:tailEnd type="none" w="med" len="med"/>
-                    </a:lnT>
-                    <a:lnB w="12700" cap="flat" cmpd="sng" algn="ctr">
-                      <a:solidFill>
-                        <a:srgbClr val="C9D3E3"/>
-                      </a:solidFill>
-                      <a:prstDash val="solid"/>
-                      <a:round/>
-                      <a:headEnd type="none" w="med" len="med"/>
-                      <a:tailEnd type="none" w="med" len="med"/>
-                    </a:lnB>
-                  </a:tcPr>
-                </a:tc>
-                <a:tc>
-                  <a:txBody>
-                    <a:bodyPr/>
-                    <a:lstStyle/>
-                    <a:p>
-                      <a:pPr marL="0" indent="0" latinLnBrk="0" algn="l">
-                        <a:lnSpc>
-                          <a:spcPct val="100000"/>
-                        </a:lnSpc>
-                        <a:buNone/>
-                        <a:defRPr/>
-                      </a:pPr>
-                      <a:r>
-                        <a:rPr kumimoji="1" lang="en-US" altLang="ko-KR" sz="1100" dirty="0">
-                          <a:solidFill>
-                            <a:srgbClr val="1F2937"/>
-                          </a:solidFill>
-                          <a:latin typeface="Calibri" panose="020F0502020204030204" pitchFamily="34" charset="0"/>
-                          <a:ea typeface="-윤고딕340" pitchFamily="18" charset="-127"/>
-                          <a:cs typeface="Calibri" panose="020F0502020204030204" pitchFamily="34" charset="0"/>
-                        </a:rPr>
-                        <a:t>NVT, Langevin thermostat</a:t>
-                      </a:r>
-                    </a:p>
-                  </a:txBody>
-                  <a:tcPr marL="54864" marR="54864" marT="27432" marB="27432" anchor="ctr">
-                    <a:lnL w="12700" cap="flat" cmpd="sng" algn="ctr">
-                      <a:solidFill>
-                        <a:srgbClr val="C9D3E3"/>
-                      </a:solidFill>
-                      <a:prstDash val="solid"/>
-                      <a:round/>
-                      <a:headEnd type="none" w="med" len="med"/>
-                      <a:tailEnd type="none" w="med" len="med"/>
-                    </a:lnL>
-                    <a:lnR w="12700" cap="flat" cmpd="sng" algn="ctr">
-                      <a:solidFill>
-                        <a:srgbClr val="C9D3E3"/>
-                      </a:solidFill>
-                      <a:prstDash val="solid"/>
-                      <a:round/>
-                      <a:headEnd type="none" w="med" len="med"/>
-                      <a:tailEnd type="none" w="med" len="med"/>
-                    </a:lnR>
-                    <a:lnT w="12700" cap="flat" cmpd="sng" algn="ctr">
-                      <a:solidFill>
-                        <a:srgbClr val="C9D3E3"/>
-                      </a:solidFill>
-                      <a:prstDash val="solid"/>
-                      <a:round/>
-                      <a:headEnd type="none" w="med" len="med"/>
-                      <a:tailEnd type="none" w="med" len="med"/>
-                    </a:lnT>
-                    <a:lnB w="12700" cap="flat" cmpd="sng" algn="ctr">
-                      <a:solidFill>
-                        <a:srgbClr val="C9D3E3"/>
-                      </a:solidFill>
-                      <a:prstDash val="solid"/>
-                      <a:round/>
-                      <a:headEnd type="none" w="med" len="med"/>
-                      <a:tailEnd type="none" w="med" len="med"/>
-                    </a:lnB>
-                  </a:tcPr>
-                </a:tc>
-              </a:tr>
-              <a:tr h="384048">
-                <a:tc>
-                  <a:txBody>
-                    <a:bodyPr/>
-                    <a:lstStyle/>
-                    <a:p>
-                      <a:pPr marL="0" indent="0" latinLnBrk="0" algn="l">
-                        <a:lnSpc>
-                          <a:spcPct val="100000"/>
-                        </a:lnSpc>
-                        <a:buNone/>
-                        <a:defRPr/>
-                      </a:pPr>
-                      <a:r>
-                        <a:rPr kumimoji="1" lang="en-US" altLang="ko-KR" sz="1100" dirty="0">
-                          <a:solidFill>
-                            <a:srgbClr val="1F2937"/>
-                          </a:solidFill>
-                          <a:latin typeface="Calibri" panose="020F0502020204030204" pitchFamily="34" charset="0"/>
-                          <a:ea typeface="-윤고딕340" pitchFamily="18" charset="-127"/>
-                          <a:cs typeface="Calibri" panose="020F0502020204030204" pitchFamily="34" charset="0"/>
-                        </a:rPr>
-                        <a:t>Temperature</a:t>
-                      </a:r>
-                    </a:p>
-                  </a:txBody>
-                  <a:tcPr marL="54864" marR="54864" marT="27432" marB="27432" anchor="ctr">
-                    <a:lnL w="12700" cap="flat" cmpd="sng" algn="ctr">
-                      <a:solidFill>
-                        <a:srgbClr val="C9D3E3"/>
-                      </a:solidFill>
-                      <a:prstDash val="solid"/>
-                      <a:round/>
-                      <a:headEnd type="none" w="med" len="med"/>
-                      <a:tailEnd type="none" w="med" len="med"/>
-                    </a:lnL>
-                    <a:lnR w="12700" cap="flat" cmpd="sng" algn="ctr">
-                      <a:solidFill>
-                        <a:srgbClr val="C9D3E3"/>
-                      </a:solidFill>
-                      <a:prstDash val="solid"/>
-                      <a:round/>
-                      <a:headEnd type="none" w="med" len="med"/>
-                      <a:tailEnd type="none" w="med" len="med"/>
-                    </a:lnR>
-                    <a:lnT w="12700" cap="flat" cmpd="sng" algn="ctr">
-                      <a:solidFill>
-                        <a:srgbClr val="C9D3E3"/>
-                      </a:solidFill>
-                      <a:prstDash val="solid"/>
-                      <a:round/>
-                      <a:headEnd type="none" w="med" len="med"/>
-                      <a:tailEnd type="none" w="med" len="med"/>
-                    </a:lnT>
-                    <a:lnB w="12700" cap="flat" cmpd="sng" algn="ctr">
-                      <a:solidFill>
-                        <a:srgbClr val="C9D3E3"/>
-                      </a:solidFill>
-                      <a:prstDash val="solid"/>
-                      <a:round/>
-                      <a:headEnd type="none" w="med" len="med"/>
-                      <a:tailEnd type="none" w="med" len="med"/>
-                    </a:lnB>
-                  </a:tcPr>
-                </a:tc>
-                <a:tc>
-                  <a:txBody>
-                    <a:bodyPr/>
-                    <a:lstStyle/>
-                    <a:p>
-                      <a:pPr marL="0" indent="0" latinLnBrk="0" algn="l">
-                        <a:lnSpc>
-                          <a:spcPct val="100000"/>
-                        </a:lnSpc>
-                        <a:buNone/>
-                        <a:defRPr/>
-                      </a:pPr>
-                      <a:r>
-                        <a:rPr kumimoji="1" lang="en-US" altLang="ko-KR" sz="1100" dirty="0">
-                          <a:solidFill>
-                            <a:srgbClr val="1F2937"/>
-                          </a:solidFill>
-                          <a:latin typeface="Calibri" panose="020F0502020204030204" pitchFamily="34" charset="0"/>
-                          <a:ea typeface="-윤고딕340" pitchFamily="18" charset="-127"/>
-                          <a:cs typeface="Calibri" panose="020F0502020204030204" pitchFamily="34" charset="0"/>
-                        </a:rPr>
-                        <a:t>1000 K (selected in a pilot)</a:t>
-                      </a:r>
-                    </a:p>
-                  </a:txBody>
-                  <a:tcPr marL="54864" marR="54864" marT="27432" marB="27432" anchor="ctr">
-                    <a:lnL w="12700" cap="flat" cmpd="sng" algn="ctr">
-                      <a:solidFill>
-                        <a:srgbClr val="C9D3E3"/>
-                      </a:solidFill>
-                      <a:prstDash val="solid"/>
-                      <a:round/>
-                      <a:headEnd type="none" w="med" len="med"/>
-                      <a:tailEnd type="none" w="med" len="med"/>
-                    </a:lnL>
-                    <a:lnR w="12700" cap="flat" cmpd="sng" algn="ctr">
-                      <a:solidFill>
-                        <a:srgbClr val="C9D3E3"/>
-                      </a:solidFill>
-                      <a:prstDash val="solid"/>
-                      <a:round/>
-                      <a:headEnd type="none" w="med" len="med"/>
-                      <a:tailEnd type="none" w="med" len="med"/>
-                    </a:lnR>
-                    <a:lnT w="12700" cap="flat" cmpd="sng" algn="ctr">
-                      <a:solidFill>
-                        <a:srgbClr val="C9D3E3"/>
-                      </a:solidFill>
-                      <a:prstDash val="solid"/>
-                      <a:round/>
-                      <a:headEnd type="none" w="med" len="med"/>
-                      <a:tailEnd type="none" w="med" len="med"/>
-                    </a:lnT>
-                    <a:lnB w="12700" cap="flat" cmpd="sng" algn="ctr">
-                      <a:solidFill>
-                        <a:srgbClr val="C9D3E3"/>
-                      </a:solidFill>
-                      <a:prstDash val="solid"/>
-                      <a:round/>
-                      <a:headEnd type="none" w="med" len="med"/>
-                      <a:tailEnd type="none" w="med" len="med"/>
-                    </a:lnB>
-                  </a:tcPr>
-                </a:tc>
-              </a:tr>
-              <a:tr h="457200">
-                <a:tc>
-                  <a:txBody>
-                    <a:bodyPr/>
-                    <a:lstStyle/>
-                    <a:p>
-                      <a:pPr marL="0" indent="0" latinLnBrk="0" algn="l">
-                        <a:lnSpc>
-                          <a:spcPct val="100000"/>
-                        </a:lnSpc>
-                        <a:buNone/>
-                        <a:defRPr/>
-                      </a:pPr>
-                      <a:r>
-                        <a:rPr kumimoji="1" lang="en-US" altLang="ko-KR" sz="1100" dirty="0">
-                          <a:solidFill>
-                            <a:srgbClr val="1F2937"/>
-                          </a:solidFill>
-                          <a:latin typeface="Calibri" panose="020F0502020204030204" pitchFamily="34" charset="0"/>
-                          <a:ea typeface="-윤고딕340" pitchFamily="18" charset="-127"/>
-                          <a:cs typeface="Calibri" panose="020F0502020204030204" pitchFamily="34" charset="0"/>
-                        </a:rPr>
-                        <a:t>Run length</a:t>
-                      </a:r>
-                    </a:p>
-                  </a:txBody>
-                  <a:tcPr marL="54864" marR="54864" marT="27432" marB="27432" anchor="ctr">
-                    <a:lnL w="12700" cap="flat" cmpd="sng" algn="ctr">
-                      <a:solidFill>
-                        <a:srgbClr val="C9D3E3"/>
-                      </a:solidFill>
-                      <a:prstDash val="solid"/>
-                      <a:round/>
-                      <a:headEnd type="none" w="med" len="med"/>
-                      <a:tailEnd type="none" w="med" len="med"/>
-                    </a:lnL>
-                    <a:lnR w="12700" cap="flat" cmpd="sng" algn="ctr">
-                      <a:solidFill>
-                        <a:srgbClr val="C9D3E3"/>
-                      </a:solidFill>
-                      <a:prstDash val="solid"/>
-                      <a:round/>
-                      <a:headEnd type="none" w="med" len="med"/>
-                      <a:tailEnd type="none" w="med" len="med"/>
-                    </a:lnR>
-                    <a:lnT w="12700" cap="flat" cmpd="sng" algn="ctr">
-                      <a:solidFill>
-                        <a:srgbClr val="C9D3E3"/>
-                      </a:solidFill>
-                      <a:prstDash val="solid"/>
-                      <a:round/>
-                      <a:headEnd type="none" w="med" len="med"/>
-                      <a:tailEnd type="none" w="med" len="med"/>
-                    </a:lnT>
-                    <a:lnB w="12700" cap="flat" cmpd="sng" algn="ctr">
-                      <a:solidFill>
-                        <a:srgbClr val="C9D3E3"/>
-                      </a:solidFill>
-                      <a:prstDash val="solid"/>
-                      <a:round/>
-                      <a:headEnd type="none" w="med" len="med"/>
-                      <a:tailEnd type="none" w="med" len="med"/>
-                    </a:lnB>
-                  </a:tcPr>
-                </a:tc>
-                <a:tc>
-                  <a:txBody>
-                    <a:bodyPr/>
-                    <a:lstStyle/>
-                    <a:p>
-                      <a:pPr marL="0" indent="0" latinLnBrk="0" algn="l">
-                        <a:lnSpc>
-                          <a:spcPct val="100000"/>
-                        </a:lnSpc>
-                        <a:buNone/>
-                        <a:defRPr/>
-                      </a:pPr>
-                      <a:r>
-                        <a:rPr kumimoji="1" lang="en-US" altLang="ko-KR" sz="1100" dirty="0">
-                          <a:solidFill>
-                            <a:srgbClr val="1F2937"/>
-                          </a:solidFill>
-                          <a:latin typeface="Calibri" panose="020F0502020204030204" pitchFamily="34" charset="0"/>
-                          <a:ea typeface="-윤고딕340" pitchFamily="18" charset="-127"/>
-                          <a:cs typeface="Calibri" panose="020F0502020204030204" pitchFamily="34" charset="0"/>
-                        </a:rPr>
-                        <a:t>400 ps production; MSD fit 2–50 ps</a:t>
-                      </a:r>
-                    </a:p>
-                  </a:txBody>
-                  <a:tcPr marL="54864" marR="54864" marT="27432" marB="27432" anchor="ctr">
-                    <a:lnL w="12700" cap="flat" cmpd="sng" algn="ctr">
-                      <a:solidFill>
-                        <a:srgbClr val="C9D3E3"/>
-                      </a:solidFill>
-                      <a:prstDash val="solid"/>
-                      <a:round/>
-                      <a:headEnd type="none" w="med" len="med"/>
-                      <a:tailEnd type="none" w="med" len="med"/>
-                    </a:lnL>
-                    <a:lnR w="12700" cap="flat" cmpd="sng" algn="ctr">
-                      <a:solidFill>
-                        <a:srgbClr val="C9D3E3"/>
-                      </a:solidFill>
-                      <a:prstDash val="solid"/>
-                      <a:round/>
-                      <a:headEnd type="none" w="med" len="med"/>
-                      <a:tailEnd type="none" w="med" len="med"/>
-                    </a:lnR>
-                    <a:lnT w="12700" cap="flat" cmpd="sng" algn="ctr">
-                      <a:solidFill>
-                        <a:srgbClr val="C9D3E3"/>
-                      </a:solidFill>
-                      <a:prstDash val="solid"/>
-                      <a:round/>
-                      <a:headEnd type="none" w="med" len="med"/>
-                      <a:tailEnd type="none" w="med" len="med"/>
-                    </a:lnT>
-                    <a:lnB w="12700" cap="flat" cmpd="sng" algn="ctr">
-                      <a:solidFill>
-                        <a:srgbClr val="C9D3E3"/>
-                      </a:solidFill>
-                      <a:prstDash val="solid"/>
-                      <a:round/>
-                      <a:headEnd type="none" w="med" len="med"/>
-                      <a:tailEnd type="none" w="med" len="med"/>
-                    </a:lnB>
-                  </a:tcPr>
-                </a:tc>
-              </a:tr>
-              <a:tr h="457200">
-                <a:tc>
-                  <a:txBody>
-                    <a:bodyPr/>
-                    <a:lstStyle/>
-                    <a:p>
-                      <a:pPr marL="0" indent="0" latinLnBrk="0" algn="l">
-                        <a:lnSpc>
-                          <a:spcPct val="100000"/>
-                        </a:lnSpc>
-                        <a:buNone/>
-                        <a:defRPr/>
-                      </a:pPr>
-                      <a:r>
-                        <a:rPr kumimoji="1" lang="en-US" altLang="ko-KR" sz="1100" dirty="0">
-                          <a:solidFill>
-                            <a:srgbClr val="1F2937"/>
-                          </a:solidFill>
-                          <a:latin typeface="Calibri" panose="020F0502020204030204" pitchFamily="34" charset="0"/>
-                          <a:ea typeface="-윤고딕340" pitchFamily="18" charset="-127"/>
-                          <a:cs typeface="Calibri" panose="020F0502020204030204" pitchFamily="34" charset="0"/>
-                        </a:rPr>
-                        <a:t>Cell</a:t>
-                      </a:r>
-                    </a:p>
-                  </a:txBody>
-                  <a:tcPr marL="54864" marR="54864" marT="27432" marB="27432" anchor="ctr">
-                    <a:lnL w="12700" cap="flat" cmpd="sng" algn="ctr">
-                      <a:solidFill>
-                        <a:srgbClr val="C9D3E3"/>
-                      </a:solidFill>
-                      <a:prstDash val="solid"/>
-                      <a:round/>
-                      <a:headEnd type="none" w="med" len="med"/>
-                      <a:tailEnd type="none" w="med" len="med"/>
-                    </a:lnL>
-                    <a:lnR w="12700" cap="flat" cmpd="sng" algn="ctr">
-                      <a:solidFill>
-                        <a:srgbClr val="C9D3E3"/>
-                      </a:solidFill>
-                      <a:prstDash val="solid"/>
-                      <a:round/>
-                      <a:headEnd type="none" w="med" len="med"/>
-                      <a:tailEnd type="none" w="med" len="med"/>
-                    </a:lnR>
-                    <a:lnT w="12700" cap="flat" cmpd="sng" algn="ctr">
-                      <a:solidFill>
-                        <a:srgbClr val="C9D3E3"/>
-                      </a:solidFill>
-                      <a:prstDash val="solid"/>
-                      <a:round/>
-                      <a:headEnd type="none" w="med" len="med"/>
-                      <a:tailEnd type="none" w="med" len="med"/>
-                    </a:lnT>
-                    <a:lnB w="12700" cap="flat" cmpd="sng" algn="ctr">
-                      <a:solidFill>
-                        <a:srgbClr val="C9D3E3"/>
-                      </a:solidFill>
-                      <a:prstDash val="solid"/>
-                      <a:round/>
-                      <a:headEnd type="none" w="med" len="med"/>
-                      <a:tailEnd type="none" w="med" len="med"/>
-                    </a:lnB>
-                  </a:tcPr>
-                </a:tc>
-                <a:tc>
-                  <a:txBody>
-                    <a:bodyPr/>
-                    <a:lstStyle/>
-                    <a:p>
-                      <a:pPr marL="0" indent="0" latinLnBrk="0" algn="l">
-                        <a:lnSpc>
-                          <a:spcPct val="100000"/>
-                        </a:lnSpc>
-                        <a:buNone/>
-                        <a:defRPr/>
-                      </a:pPr>
-                      <a:r>
-                        <a:rPr kumimoji="1" lang="en-US" altLang="ko-KR" sz="1100" dirty="0">
-                          <a:solidFill>
-                            <a:srgbClr val="1F2937"/>
-                          </a:solidFill>
-                          <a:latin typeface="Calibri" panose="020F0502020204030204" pitchFamily="34" charset="0"/>
-                          <a:ea typeface="-윤고딕340" pitchFamily="18" charset="-127"/>
-                          <a:cs typeface="Calibri" panose="020F0502020204030204" pitchFamily="34" charset="0"/>
-                        </a:rPr>
-                        <a:t>204 atoms, common volume (edge ≈ 1.6 nm)</a:t>
-                      </a:r>
-                    </a:p>
-                  </a:txBody>
-                  <a:tcPr marL="54864" marR="54864" marT="27432" marB="27432" anchor="ctr">
-                    <a:lnL w="12700" cap="flat" cmpd="sng" algn="ctr">
-                      <a:solidFill>
-                        <a:srgbClr val="C9D3E3"/>
-                      </a:solidFill>
-                      <a:prstDash val="solid"/>
-                      <a:round/>
-                      <a:headEnd type="none" w="med" len="med"/>
-                      <a:tailEnd type="none" w="med" len="med"/>
-                    </a:lnL>
-                    <a:lnR w="12700" cap="flat" cmpd="sng" algn="ctr">
-                      <a:solidFill>
-                        <a:srgbClr val="C9D3E3"/>
-                      </a:solidFill>
-                      <a:prstDash val="solid"/>
-                      <a:round/>
-                      <a:headEnd type="none" w="med" len="med"/>
-                      <a:tailEnd type="none" w="med" len="med"/>
-                    </a:lnR>
-                    <a:lnT w="12700" cap="flat" cmpd="sng" algn="ctr">
-                      <a:solidFill>
-                        <a:srgbClr val="C9D3E3"/>
-                      </a:solidFill>
-                      <a:prstDash val="solid"/>
-                      <a:round/>
-                      <a:headEnd type="none" w="med" len="med"/>
-                      <a:tailEnd type="none" w="med" len="med"/>
-                    </a:lnT>
-                    <a:lnB w="12700" cap="flat" cmpd="sng" algn="ctr">
-                      <a:solidFill>
-                        <a:srgbClr val="C9D3E3"/>
-                      </a:solidFill>
-                      <a:prstDash val="solid"/>
-                      <a:round/>
-                      <a:headEnd type="none" w="med" len="med"/>
-                      <a:tailEnd type="none" w="med" len="med"/>
-                    </a:lnB>
-                  </a:tcPr>
-                </a:tc>
-              </a:tr>
-              <a:tr h="548640">
-                <a:tc>
-                  <a:txBody>
-                    <a:bodyPr/>
-                    <a:lstStyle/>
-                    <a:p>
-                      <a:pPr marL="0" indent="0" latinLnBrk="0" algn="l">
-                        <a:lnSpc>
-                          <a:spcPct val="100000"/>
-                        </a:lnSpc>
-                        <a:buNone/>
-                        <a:defRPr/>
-                      </a:pPr>
-                      <a:r>
-                        <a:rPr kumimoji="1" lang="en-US" altLang="ko-KR" sz="1100" dirty="0">
-                          <a:solidFill>
-                            <a:srgbClr val="1F2937"/>
-                          </a:solidFill>
-                          <a:latin typeface="Calibri" panose="020F0502020204030204" pitchFamily="34" charset="0"/>
-                          <a:ea typeface="-윤고딕340" pitchFamily="18" charset="-127"/>
-                          <a:cs typeface="Calibri" panose="020F0502020204030204" pitchFamily="34" charset="0"/>
-                        </a:rPr>
-                        <a:t>Sampling</a:t>
-                      </a:r>
-                    </a:p>
-                  </a:txBody>
-                  <a:tcPr marL="54864" marR="54864" marT="27432" marB="27432" anchor="ctr">
-                    <a:lnL w="12700" cap="flat" cmpd="sng" algn="ctr">
-                      <a:solidFill>
-                        <a:srgbClr val="C9D3E3"/>
-                      </a:solidFill>
-                      <a:prstDash val="solid"/>
-                      <a:round/>
-                      <a:headEnd type="none" w="med" len="med"/>
-                      <a:tailEnd type="none" w="med" len="med"/>
-                    </a:lnL>
-                    <a:lnR w="12700" cap="flat" cmpd="sng" algn="ctr">
-                      <a:solidFill>
-                        <a:srgbClr val="C9D3E3"/>
-                      </a:solidFill>
-                      <a:prstDash val="solid"/>
-                      <a:round/>
-                      <a:headEnd type="none" w="med" len="med"/>
-                      <a:tailEnd type="none" w="med" len="med"/>
-                    </a:lnR>
-                    <a:lnT w="12700" cap="flat" cmpd="sng" algn="ctr">
-                      <a:solidFill>
-                        <a:srgbClr val="C9D3E3"/>
-                      </a:solidFill>
-                      <a:prstDash val="solid"/>
-                      <a:round/>
-                      <a:headEnd type="none" w="med" len="med"/>
-                      <a:tailEnd type="none" w="med" len="med"/>
-                    </a:lnT>
-                    <a:lnB w="12700" cap="flat" cmpd="sng" algn="ctr">
-                      <a:solidFill>
-                        <a:srgbClr val="C9D3E3"/>
-                      </a:solidFill>
-                      <a:prstDash val="solid"/>
-                      <a:round/>
-                      <a:headEnd type="none" w="med" len="med"/>
-                      <a:tailEnd type="none" w="med" len="med"/>
-                    </a:lnB>
-                  </a:tcPr>
-                </a:tc>
-                <a:tc>
-                  <a:txBody>
-                    <a:bodyPr/>
-                    <a:lstStyle/>
-                    <a:p>
-                      <a:pPr marL="0" indent="0" latinLnBrk="0" algn="l">
-                        <a:lnSpc>
-                          <a:spcPct val="100000"/>
-                        </a:lnSpc>
-                        <a:buNone/>
-                        <a:defRPr/>
-                      </a:pPr>
-                      <a:r>
-                        <a:rPr kumimoji="1" lang="en-US" altLang="ko-KR" sz="1100" dirty="0">
-                          <a:solidFill>
-                            <a:srgbClr val="1F2937"/>
-                          </a:solidFill>
-                          <a:latin typeface="Calibri" panose="020F0502020204030204" pitchFamily="34" charset="0"/>
-                          <a:ea typeface="-윤고딕340" pitchFamily="18" charset="-127"/>
-                          <a:cs typeface="Calibri" panose="020F0502020204030204" pitchFamily="34" charset="0"/>
-                        </a:rPr>
-                        <a:t>10 start configurations × 2 precursors × 2 seeds = 40 runs</a:t>
-                      </a:r>
-                    </a:p>
-                  </a:txBody>
-                  <a:tcPr marL="54864" marR="54864" marT="27432" marB="27432" anchor="ctr">
-                    <a:lnL w="12700" cap="flat" cmpd="sng" algn="ctr">
-                      <a:solidFill>
-                        <a:srgbClr val="C9D3E3"/>
-                      </a:solidFill>
-                      <a:prstDash val="solid"/>
-                      <a:round/>
-                      <a:headEnd type="none" w="med" len="med"/>
-                      <a:tailEnd type="none" w="med" len="med"/>
-                    </a:lnL>
-                    <a:lnR w="12700" cap="flat" cmpd="sng" algn="ctr">
-                      <a:solidFill>
-                        <a:srgbClr val="C9D3E3"/>
-                      </a:solidFill>
-                      <a:prstDash val="solid"/>
-                      <a:round/>
-                      <a:headEnd type="none" w="med" len="med"/>
-                      <a:tailEnd type="none" w="med" len="med"/>
-                    </a:lnR>
-                    <a:lnT w="12700" cap="flat" cmpd="sng" algn="ctr">
-                      <a:solidFill>
-                        <a:srgbClr val="C9D3E3"/>
-                      </a:solidFill>
-                      <a:prstDash val="solid"/>
-                      <a:round/>
-                      <a:headEnd type="none" w="med" len="med"/>
-                      <a:tailEnd type="none" w="med" len="med"/>
-                    </a:lnT>
-                    <a:lnB w="12700" cap="flat" cmpd="sng" algn="ctr">
-                      <a:solidFill>
-                        <a:srgbClr val="C9D3E3"/>
-                      </a:solidFill>
-                      <a:prstDash val="solid"/>
-                      <a:round/>
-                      <a:headEnd type="none" w="med" len="med"/>
-                      <a:tailEnd type="none" w="med" len="med"/>
-                    </a:lnB>
-                  </a:tcPr>
-                </a:tc>
-              </a:tr>
-              <a:tr h="731520">
-                <a:tc>
-                  <a:txBody>
-                    <a:bodyPr/>
-                    <a:lstStyle/>
-                    <a:p>
-                      <a:pPr marL="0" indent="0" latinLnBrk="0" algn="l">
-                        <a:lnSpc>
-                          <a:spcPct val="100000"/>
-                        </a:lnSpc>
-                        <a:buNone/>
-                        <a:defRPr/>
-                      </a:pPr>
-                      <a:r>
-                        <a:rPr kumimoji="1" lang="en-US" altLang="ko-KR" sz="1100" dirty="0">
-                          <a:solidFill>
-                            <a:srgbClr val="1F2937"/>
-                          </a:solidFill>
-                          <a:latin typeface="Calibri" panose="020F0502020204030204" pitchFamily="34" charset="0"/>
-                          <a:ea typeface="-윤고딕340" pitchFamily="18" charset="-127"/>
-                          <a:cs typeface="Calibri" panose="020F0502020204030204" pitchFamily="34" charset="0"/>
-                        </a:rPr>
-                        <a:t>Diffusive-regime checks</a:t>
-                      </a:r>
-                    </a:p>
-                  </a:txBody>
-                  <a:tcPr marL="54864" marR="54864" marT="27432" marB="27432" anchor="ctr">
-                    <a:lnL w="12700" cap="flat" cmpd="sng" algn="ctr">
-                      <a:solidFill>
-                        <a:srgbClr val="C9D3E3"/>
-                      </a:solidFill>
-                      <a:prstDash val="solid"/>
-                      <a:round/>
-                      <a:headEnd type="none" w="med" len="med"/>
-                      <a:tailEnd type="none" w="med" len="med"/>
-                    </a:lnL>
-                    <a:lnR w="12700" cap="flat" cmpd="sng" algn="ctr">
-                      <a:solidFill>
-                        <a:srgbClr val="C9D3E3"/>
-                      </a:solidFill>
-                      <a:prstDash val="solid"/>
-                      <a:round/>
-                      <a:headEnd type="none" w="med" len="med"/>
-                      <a:tailEnd type="none" w="med" len="med"/>
-                    </a:lnR>
-                    <a:lnT w="12700" cap="flat" cmpd="sng" algn="ctr">
-                      <a:solidFill>
-                        <a:srgbClr val="C9D3E3"/>
-                      </a:solidFill>
-                      <a:prstDash val="solid"/>
-                      <a:round/>
-                      <a:headEnd type="none" w="med" len="med"/>
-                      <a:tailEnd type="none" w="med" len="med"/>
-                    </a:lnT>
-                    <a:lnB w="12700" cap="flat" cmpd="sng" algn="ctr">
-                      <a:solidFill>
-                        <a:srgbClr val="C9D3E3"/>
-                      </a:solidFill>
-                      <a:prstDash val="solid"/>
-                      <a:round/>
-                      <a:headEnd type="none" w="med" len="med"/>
-                      <a:tailEnd type="none" w="med" len="med"/>
-                    </a:lnB>
-                  </a:tcPr>
-                </a:tc>
-                <a:tc>
-                  <a:txBody>
-                    <a:bodyPr/>
-                    <a:lstStyle/>
-                    <a:p>
-                      <a:pPr marL="0" indent="0" latinLnBrk="0" algn="l">
-                        <a:lnSpc>
-                          <a:spcPct val="100000"/>
-                        </a:lnSpc>
-                        <a:buNone/>
-                        <a:defRPr/>
-                      </a:pPr>
-                      <a:r>
-                        <a:rPr kumimoji="1" lang="en-US" altLang="ko-KR" sz="1100" dirty="0">
-                          <a:solidFill>
-                            <a:srgbClr val="1F2937"/>
-                          </a:solidFill>
-                          <a:latin typeface="Calibri" panose="020F0502020204030204" pitchFamily="34" charset="0"/>
-                          <a:ea typeface="-윤고딕340" pitchFamily="18" charset="-127"/>
-                          <a:cs typeface="Calibri" panose="020F0502020204030204" pitchFamily="34" charset="0"/>
-                        </a:rPr>
-                        <a:t>sub-window MSD slope ratio 0.8–1.2 · D spread ≤ 10 % · ≥ 50 Li hops · framework intact</a:t>
-                      </a:r>
-                    </a:p>
-                  </a:txBody>
-                  <a:tcPr marL="54864" marR="54864" marT="27432" marB="27432" anchor="ctr">
-                    <a:lnL w="12700" cap="flat" cmpd="sng" algn="ctr">
-                      <a:solidFill>
-                        <a:srgbClr val="C9D3E3"/>
-                      </a:solidFill>
-                      <a:prstDash val="solid"/>
-                      <a:round/>
-                      <a:headEnd type="none" w="med" len="med"/>
-                      <a:tailEnd type="none" w="med" len="med"/>
-                    </a:lnL>
-                    <a:lnR w="12700" cap="flat" cmpd="sng" algn="ctr">
-                      <a:solidFill>
-                        <a:srgbClr val="C9D3E3"/>
-                      </a:solidFill>
-                      <a:prstDash val="solid"/>
-                      <a:round/>
-                      <a:headEnd type="none" w="med" len="med"/>
-                      <a:tailEnd type="none" w="med" len="med"/>
-                    </a:lnR>
-                    <a:lnT w="12700" cap="flat" cmpd="sng" algn="ctr">
-                      <a:solidFill>
-                        <a:srgbClr val="C9D3E3"/>
-                      </a:solidFill>
-                      <a:prstDash val="solid"/>
-                      <a:round/>
-                      <a:headEnd type="none" w="med" len="med"/>
-                      <a:tailEnd type="none" w="med" len="med"/>
-                    </a:lnT>
-                    <a:lnB w="12700" cap="flat" cmpd="sng" algn="ctr">
-                      <a:solidFill>
-                        <a:srgbClr val="C9D3E3"/>
-                      </a:solidFill>
-                      <a:prstDash val="solid"/>
-                      <a:round/>
-                      <a:headEnd type="none" w="med" len="med"/>
-                      <a:tailEnd type="none" w="med" len="med"/>
-                    </a:lnB>
-                  </a:tcPr>
-                </a:tc>
-              </a:tr>
-            </a:tbl>
-          </a:graphicData>
-        </a:graphic>
-      </p:graphicFrame>
-      <p:sp>
-        <p:nvSpPr>
-          <p:cNvPr id="276" name="References"/>
-          <p:cNvSpPr txBox="1"/>
-          <p:nvPr/>
-        </p:nvSpPr>
-        <p:spPr>
-          <a:xfrm>
-            <a:off x="502920" y="5897880"/>
-            <a:ext cx="8138160" cy="384048"/>
-          </a:xfrm>
-          <a:prstGeom prst="rect">
-            <a:avLst/>
-          </a:prstGeom>
-          <a:noFill/>
-        </p:spPr>
-        <p:txBody>
-          <a:bodyPr wrap="square" lIns="45720" tIns="27432" rIns="45720" bIns="27432" rtlCol="0" anchor="t">
-            <a:noAutofit/>
-          </a:bodyPr>
-          <a:lstStyle/>
-          <a:p>
-            <a:pPr marL="0" indent="0" latinLnBrk="0">
-              <a:lnSpc>
-                <a:spcPct val="100000"/>
-              </a:lnSpc>
-              <a:buNone/>
-              <a:defRPr/>
-            </a:pPr>
-            <a:r>
-              <a:rPr kumimoji="1" lang="en-US" altLang="ko-KR" sz="1000" i="1" dirty="0">
-                <a:solidFill>
-                  <a:srgbClr val="6B7280"/>
+              <a:t>after the pilot</a:t>
+            </a:r>
+            <a:r>
+              <a:rPr kumimoji="1" lang="en-US" altLang="ko-KR" sz="1200" dirty="0">
+                <a:solidFill>
+                  <a:srgbClr val="0070C0"/>
                 </a:solidFill>
                 <a:latin typeface="Calibri" panose="020F0502020204030204" pitchFamily="34" charset="0"/>
                 <a:ea typeface="-윤고딕340" pitchFamily="18" charset="-127"/>
                 <a:cs typeface="Calibri" panose="020F0502020204030204" pitchFamily="34" charset="0"/>
               </a:rPr>
-              <a:t>Kahle, Energy Environ. Sci. 13, 928 (2020) · He, npj Comput. Mater. 4, 18 (2018) · Wood et al. (UMA), arXiv:2506.23971 (2026)</a:t>
+              <a:t> — the pilot tests the protocol on two Al precursors (next slides).</a:t>
             </a:r>
           </a:p>
         </p:txBody>
@@ -13693,7 +12974,7 @@
       </p:sp>
       <p:sp>
         <p:nvSpPr>
-          <p:cNvPr id="277" name="Rectangle 4"/>
+          <p:cNvPr id="286" name="Rectangle 4"/>
           <p:cNvSpPr txBox="1"/>
           <p:nvPr/>
         </p:nvSpPr>
@@ -13737,21 +13018,21 @@
                 <a:ea typeface="-윤고딕340" pitchFamily="18" charset="-127"/>
                 <a:cs typeface="Calibri" panose="020F0502020204030204" pitchFamily="34" charset="0"/>
               </a:rPr>
-              <a:t>Li transport: temperature choice, status and limits</a:t>
+              <a:t>Stage 2 pilot — Li transport by MLIP molecular dynamics: setup</a:t>
             </a:r>
           </a:p>
         </p:txBody>
       </p:sp>
       <p:sp>
         <p:nvSpPr>
-          <p:cNvPr id="278" name="Status bullets"/>
+          <p:cNvPr id="287" name="Setup bullets"/>
           <p:cNvSpPr txBox="1"/>
           <p:nvPr/>
         </p:nvSpPr>
         <p:spPr>
           <a:xfrm>
             <a:off x="502920" y="1371600"/>
-            <a:ext cx="4343400" cy="2834640"/>
+            <a:ext cx="4206240" cy="2651760"/>
           </a:xfrm>
           <a:prstGeom prst="rect">
             <a:avLst/>
@@ -13766,10 +13047,10 @@
           <a:p>
             <a:pPr marL="182880" indent="-182880" latinLnBrk="0">
               <a:lnSpc>
-                <a:spcPct val="108000"/>
+                <a:spcPct val="110000"/>
               </a:lnSpc>
               <a:spcAft>
-                <a:spcPts val="500"/>
+                <a:spcPts val="600"/>
               </a:spcAft>
               <a:buClr>
                 <a:srgbClr val="1F2937"/>
@@ -13780,7 +13061,7 @@
               <a:defRPr/>
             </a:pPr>
             <a:r>
-              <a:rPr kumimoji="1" lang="en-US" altLang="ko-KR" sz="1200" b="1" dirty="0">
+              <a:rPr kumimoji="1" lang="en-US" altLang="ko-KR" sz="1250" b="1" dirty="0">
                 <a:solidFill>
                   <a:srgbClr val="1F2937"/>
                 </a:solidFill>
@@ -13788,10 +13069,10 @@
                 <a:ea typeface="-윤고딕340" pitchFamily="18" charset="-127"/>
                 <a:cs typeface="Calibri" panose="020F0502020204030204" pitchFamily="34" charset="0"/>
               </a:rPr>
-              <a:t>600 K pilot</a:t>
-            </a:r>
-            <a:r>
-              <a:rPr kumimoji="1" lang="en-US" altLang="ko-KR" sz="1200" dirty="0">
+              <a:t>Pilot question</a:t>
+            </a:r>
+            <a:r>
+              <a:rPr kumimoji="1" lang="en-US" altLang="ko-KR" sz="1250" dirty="0">
                 <a:solidFill>
                   <a:srgbClr val="1F2937"/>
                 </a:solidFill>
@@ -13799,16 +13080,16 @@
                 <a:ea typeface="-윤고딕340" pitchFamily="18" charset="-127"/>
                 <a:cs typeface="Calibri" panose="020F0502020204030204" pitchFamily="34" charset="0"/>
               </a:rPr>
-              <a:t> (40 runs, 200 ps): Li hopped (~4,000 hops per run) but the MSD never became linear over 2–100 ps → no diffusivity reported (UMA, this cell and volume).</a:t>
+              <a:t>: does the precursor anion (Al₂O₃ vs Al₂S₃) change Li diffusivity in Al-doped Li₆PS₅Cl — and can the protocol resolve it?</a:t>
             </a:r>
           </a:p>
           <a:p>
             <a:pPr marL="182880" indent="-182880" latinLnBrk="0">
               <a:lnSpc>
-                <a:spcPct val="108000"/>
+                <a:spcPct val="110000"/>
               </a:lnSpc>
               <a:spcAft>
-                <a:spcPts val="500"/>
+                <a:spcPts val="600"/>
               </a:spcAft>
               <a:buClr>
                 <a:srgbClr val="1F2937"/>
@@ -13819,7 +13100,7 @@
               <a:defRPr/>
             </a:pPr>
             <a:r>
-              <a:rPr kumimoji="1" lang="en-US" altLang="ko-KR" sz="1200" b="1" dirty="0">
+              <a:rPr kumimoji="1" lang="en-US" altLang="ko-KR" sz="1250" b="1" dirty="0">
                 <a:solidFill>
                   <a:srgbClr val="1F2937"/>
                 </a:solidFill>
@@ -13827,10 +13108,10 @@
                 <a:ea typeface="-윤고딕340" pitchFamily="18" charset="-127"/>
                 <a:cs typeface="Calibri" panose="020F0502020204030204" pitchFamily="34" charset="0"/>
               </a:rPr>
-              <a:t>Temperature</a:t>
-            </a:r>
-            <a:r>
-              <a:rPr kumimoji="1" lang="en-US" altLang="ko-KR" sz="1200" dirty="0">
+              <a:t>Reported quantity</a:t>
+            </a:r>
+            <a:r>
+              <a:rPr kumimoji="1" lang="en-US" altLang="ko-KR" sz="1250" dirty="0">
                 <a:solidFill>
                   <a:srgbClr val="1F2937"/>
                 </a:solidFill>
@@ -13838,13 +13119,13 @@
                 <a:ea typeface="-윤고딕340" pitchFamily="18" charset="-127"/>
                 <a:cs typeface="Calibri" panose="020F0502020204030204" pitchFamily="34" charset="0"/>
               </a:rPr>
-              <a:t> then chosen by a predefined pilot: 800 K failed and 1000 K passed the diffusive-regime checks.</a:t>
+              <a:t>: ratio of Li tracer diffusivities from MSD slopes — relative, not an absolute conductivity.</a:t>
             </a:r>
           </a:p>
           <a:p>
             <a:pPr marL="182880" indent="-182880" latinLnBrk="0">
               <a:lnSpc>
-                <a:spcPct val="108000"/>
+                <a:spcPct val="110000"/>
               </a:lnSpc>
               <a:buClr>
                 <a:srgbClr val="1F2937"/>
@@ -13855,7 +13136,7 @@
               <a:defRPr/>
             </a:pPr>
             <a:r>
-              <a:rPr kumimoji="1" lang="en-US" altLang="ko-KR" sz="1200" b="1" dirty="0">
+              <a:rPr kumimoji="1" lang="en-US" altLang="ko-KR" sz="1250" b="1" dirty="0">
                 <a:solidFill>
                   <a:srgbClr val="1F2937"/>
                 </a:solidFill>
@@ -13863,10 +13144,10 @@
                 <a:ea typeface="-윤고딕340" pitchFamily="18" charset="-127"/>
                 <a:cs typeface="Calibri" panose="020F0502020204030204" pitchFamily="34" charset="0"/>
               </a:rPr>
-              <a:t>Limits</a:t>
-            </a:r>
-            <a:r>
-              <a:rPr kumimoji="1" lang="en-US" altLang="ko-KR" sz="1200" dirty="0">
+              <a:t>Analysis plan fixed before the runs</a:t>
+            </a:r>
+            <a:r>
+              <a:rPr kumimoji="1" lang="en-US" altLang="ko-KR" sz="1250" dirty="0">
                 <a:solidFill>
                   <a:srgbClr val="1F2937"/>
                 </a:solidFill>
@@ -13874,54 +13155,161 @@
                 <a:ea typeface="-윤고딕340" pitchFamily="18" charset="-127"/>
                 <a:cs typeface="Calibri" panose="020F0502020204030204" pitchFamily="34" charset="0"/>
               </a:rPr>
-              <a:t>: the ~1.6-nm cell is below the ~2-nm bulk minimum suggested for MLIP transport, and rankings at high T need not hold at room temperature → relative, condition-specific result.</a:t>
+              <a:t>: diffusive-regime checks, then an equivalence test (margin ±ln 1.5) on the log-ratio.</a:t>
             </a:r>
           </a:p>
         </p:txBody>
       </p:sp>
       <p:sp>
         <p:nvSpPr>
-          <p:cNvPr id="279" name="Status panel"/>
+          <p:cNvPr id="288" name="Recipe A"/>
           <p:cNvSpPr/>
           <p:nvPr/>
         </p:nvSpPr>
         <p:spPr>
           <a:xfrm>
-            <a:off x="502920" y="4297680"/>
-            <a:ext cx="4343400" cy="1463040"/>
+            <a:off x="548640" y="4114800"/>
+            <a:ext cx="1920240" cy="868680"/>
           </a:xfrm>
           <a:prstGeom prst="roundRect">
             <a:avLst>
-              <a:gd name="adj" fmla="val 4000"/>
+              <a:gd name="adj" fmla="val 6000"/>
             </a:avLst>
           </a:prstGeom>
           <a:solidFill>
-            <a:srgbClr val="F5F7FA"/>
+            <a:srgbClr val="EEF3FA"/>
           </a:solidFill>
           <a:ln>
             <a:noFill/>
           </a:ln>
         </p:spPr>
         <p:txBody>
-          <a:bodyPr wrap="square" lIns="91440" tIns="64008" rIns="91440" bIns="64008" rtlCol="0" anchor="t">
+          <a:bodyPr wrap="square" lIns="91440" tIns="64008" rIns="91440" bIns="64008" rtlCol="0" anchor="ctr">
             <a:noAutofit/>
           </a:bodyPr>
           <a:lstStyle/>
           <a:p>
-            <a:endParaRPr lang="en-US" dirty="0"/>
+            <a:pPr marL="0" indent="0" latinLnBrk="0" algn="ctr">
+              <a:lnSpc>
+                <a:spcPct val="100000"/>
+              </a:lnSpc>
+              <a:buNone/>
+              <a:defRPr/>
+            </a:pPr>
+            <a:r>
+              <a:rPr kumimoji="1" lang="en-US" altLang="ko-KR" sz="1200" b="1" dirty="0">
+                <a:solidFill>
+                  <a:srgbClr val="1F497D"/>
+                </a:solidFill>
+                <a:latin typeface="Calibri" panose="020F0502020204030204" pitchFamily="34" charset="0"/>
+                <a:ea typeface="-윤고딕340" pitchFamily="18" charset="-127"/>
+                <a:cs typeface="Calibri" panose="020F0502020204030204" pitchFamily="34" charset="0"/>
+              </a:rPr>
+              <a:t>Al₂O₃-derived</a:t>
+            </a:r>
+          </a:p>
+          <a:p>
+            <a:pPr marL="0" indent="0" latinLnBrk="0" algn="ctr">
+              <a:lnSpc>
+                <a:spcPct val="100000"/>
+              </a:lnSpc>
+              <a:buNone/>
+              <a:defRPr/>
+            </a:pPr>
+            <a:r>
+              <a:rPr kumimoji="1" lang="en-US" altLang="ko-KR" sz="1050" dirty="0">
+                <a:solidFill>
+                  <a:srgbClr val="1F2937"/>
+                </a:solidFill>
+                <a:latin typeface="Calibri" panose="020F0502020204030204" pitchFamily="34" charset="0"/>
+                <a:ea typeface="-윤고딕340" pitchFamily="18" charset="-127"/>
+                <a:cs typeface="Calibri" panose="020F0502020204030204" pitchFamily="34" charset="0"/>
+              </a:rPr>
+              <a:t>2 Al + 3 O + 4 Li vacancies</a:t>
+            </a:r>
           </a:p>
         </p:txBody>
       </p:sp>
       <p:sp>
         <p:nvSpPr>
-          <p:cNvPr id="280" name="Status title"/>
+          <p:cNvPr id="289" name="Recipe B"/>
+          <p:cNvSpPr/>
+          <p:nvPr/>
+        </p:nvSpPr>
+        <p:spPr>
+          <a:xfrm>
+            <a:off x="2697480" y="4114800"/>
+            <a:ext cx="1920240" cy="868680"/>
+          </a:xfrm>
+          <a:prstGeom prst="roundRect">
+            <a:avLst>
+              <a:gd name="adj" fmla="val 6000"/>
+            </a:avLst>
+          </a:prstGeom>
+          <a:solidFill>
+            <a:srgbClr val="F3F4F6"/>
+          </a:solidFill>
+          <a:ln>
+            <a:noFill/>
+          </a:ln>
+        </p:spPr>
+        <p:txBody>
+          <a:bodyPr wrap="square" lIns="91440" tIns="64008" rIns="91440" bIns="64008" rtlCol="0" anchor="ctr">
+            <a:noAutofit/>
+          </a:bodyPr>
+          <a:lstStyle/>
+          <a:p>
+            <a:pPr marL="0" indent="0" latinLnBrk="0" algn="ctr">
+              <a:lnSpc>
+                <a:spcPct val="100000"/>
+              </a:lnSpc>
+              <a:buNone/>
+              <a:defRPr/>
+            </a:pPr>
+            <a:r>
+              <a:rPr kumimoji="1" lang="en-US" altLang="ko-KR" sz="1200" b="1" dirty="0">
+                <a:solidFill>
+                  <a:srgbClr val="374151"/>
+                </a:solidFill>
+                <a:latin typeface="Calibri" panose="020F0502020204030204" pitchFamily="34" charset="0"/>
+                <a:ea typeface="-윤고딕340" pitchFamily="18" charset="-127"/>
+                <a:cs typeface="Calibri" panose="020F0502020204030204" pitchFamily="34" charset="0"/>
+              </a:rPr>
+              <a:t>Al₂S₃-derived</a:t>
+            </a:r>
+          </a:p>
+          <a:p>
+            <a:pPr marL="0" indent="0" latinLnBrk="0" algn="ctr">
+              <a:lnSpc>
+                <a:spcPct val="100000"/>
+              </a:lnSpc>
+              <a:buNone/>
+              <a:defRPr/>
+            </a:pPr>
+            <a:r>
+              <a:rPr kumimoji="1" lang="en-US" altLang="ko-KR" sz="1050" dirty="0">
+                <a:solidFill>
+                  <a:srgbClr val="1F2937"/>
+                </a:solidFill>
+                <a:latin typeface="Calibri" panose="020F0502020204030204" pitchFamily="34" charset="0"/>
+                <a:ea typeface="-윤고딕340" pitchFamily="18" charset="-127"/>
+                <a:cs typeface="Calibri" panose="020F0502020204030204" pitchFamily="34" charset="0"/>
+              </a:rPr>
+              <a:t>2 Al + 4 Li vacancies (S unchanged)</a:t>
+            </a:r>
+          </a:p>
+        </p:txBody>
+      </p:sp>
+      <p:sp>
+        <p:nvSpPr>
+          <p:cNvPr id="290" name="Recipe note"/>
           <p:cNvSpPr txBox="1"/>
           <p:nvPr/>
         </p:nvSpPr>
         <p:spPr>
           <a:xfrm>
-            <a:off x="640080" y="4352544"/>
-            <a:ext cx="4023360" cy="274320"/>
+            <a:off x="548640" y="5047488"/>
+            <a:ext cx="4069080" cy="685800"/>
           </a:xfrm>
           <a:prstGeom prst="rect">
             <a:avLst/>
@@ -13934,346 +13322,7 @@
           </a:bodyPr>
           <a:lstStyle/>
           <a:p>
-            <a:pPr marL="0" indent="0" latinLnBrk="0">
-              <a:lnSpc>
-                <a:spcPct val="100000"/>
-              </a:lnSpc>
-              <a:buNone/>
-              <a:defRPr/>
-            </a:pPr>
-            <a:r>
-              <a:rPr kumimoji="1" lang="en-US" altLang="ko-KR" sz="1200" b="1" dirty="0">
-                <a:solidFill>
-                  <a:srgbClr val="1F497D"/>
-                </a:solidFill>
-                <a:latin typeface="Calibri" panose="020F0502020204030204" pitchFamily="34" charset="0"/>
-                <a:ea typeface="-윤고딕340" pitchFamily="18" charset="-127"/>
-                <a:cs typeface="Calibri" panose="020F0502020204030204" pitchFamily="34" charset="0"/>
-              </a:rPr>
-              <a:t>Status (Oct 12)</a:t>
-            </a:r>
-          </a:p>
-        </p:txBody>
-      </p:sp>
-      <p:sp>
-        <p:nvSpPr>
-          <p:cNvPr id="281" name="Bar1 label"/>
-          <p:cNvSpPr txBox="1"/>
-          <p:nvPr/>
-        </p:nvSpPr>
-        <p:spPr>
-          <a:xfrm>
-            <a:off x="640080" y="4663440"/>
-            <a:ext cx="822960" cy="237744"/>
-          </a:xfrm>
-          <a:prstGeom prst="rect">
-            <a:avLst/>
-          </a:prstGeom>
-          <a:noFill/>
-        </p:spPr>
-        <p:txBody>
-          <a:bodyPr wrap="square" lIns="45720" tIns="27432" rIns="45720" bIns="27432" rtlCol="0" anchor="t">
-            <a:noAutofit/>
-          </a:bodyPr>
-          <a:lstStyle/>
-          <a:p>
-            <a:pPr marL="0" indent="0" latinLnBrk="0">
-              <a:lnSpc>
-                <a:spcPct val="100000"/>
-              </a:lnSpc>
-              <a:buNone/>
-              <a:defRPr/>
-            </a:pPr>
-            <a:r>
-              <a:rPr kumimoji="1" lang="en-US" altLang="ko-KR" sz="1050" dirty="0">
-                <a:solidFill>
-                  <a:srgbClr val="1F2937"/>
-                </a:solidFill>
-                <a:latin typeface="Calibri" panose="020F0502020204030204" pitchFamily="34" charset="0"/>
-                <a:ea typeface="-윤고딕340" pitchFamily="18" charset="-127"/>
-                <a:cs typeface="Calibri" panose="020F0502020204030204" pitchFamily="34" charset="0"/>
-              </a:rPr>
-              <a:t>Runs</a:t>
-            </a:r>
-          </a:p>
-        </p:txBody>
-      </p:sp>
-      <p:sp>
-        <p:nvSpPr>
-          <p:cNvPr id="282" name="Bar1 bg"/>
-          <p:cNvSpPr/>
-          <p:nvPr/>
-        </p:nvSpPr>
-        <p:spPr>
-          <a:xfrm>
-            <a:off x="1463040" y="4690872"/>
-            <a:ext cx="2377440" cy="182880"/>
-          </a:xfrm>
-          <a:prstGeom prst="rect">
-            <a:avLst/>
-          </a:prstGeom>
-          <a:solidFill>
-            <a:srgbClr val="E5E7EB"/>
-          </a:solidFill>
-          <a:ln>
-            <a:noFill/>
-          </a:ln>
-        </p:spPr>
-        <p:txBody>
-          <a:bodyPr wrap="square" lIns="91440" tIns="64008" rIns="91440" bIns="64008" rtlCol="0" anchor="t">
-            <a:noAutofit/>
-          </a:bodyPr>
-          <a:lstStyle/>
-          <a:p>
-            <a:endParaRPr lang="en-US" dirty="0"/>
-          </a:p>
-        </p:txBody>
-      </p:sp>
-      <p:sp>
-        <p:nvSpPr>
-          <p:cNvPr id="283" name="Bar1 fg"/>
-          <p:cNvSpPr/>
-          <p:nvPr/>
-        </p:nvSpPr>
-        <p:spPr>
-          <a:xfrm>
-            <a:off x="1463040" y="4690872"/>
-            <a:ext cx="713232" cy="182880"/>
-          </a:xfrm>
-          <a:prstGeom prst="rect">
-            <a:avLst/>
-          </a:prstGeom>
-          <a:solidFill>
-            <a:srgbClr val="0070C0"/>
-          </a:solidFill>
-          <a:ln>
-            <a:noFill/>
-          </a:ln>
-        </p:spPr>
-        <p:txBody>
-          <a:bodyPr wrap="square" lIns="91440" tIns="64008" rIns="91440" bIns="64008" rtlCol="0" anchor="t">
-            <a:noAutofit/>
-          </a:bodyPr>
-          <a:lstStyle/>
-          <a:p>
-            <a:endParaRPr lang="en-US" dirty="0"/>
-          </a:p>
-        </p:txBody>
-      </p:sp>
-      <p:sp>
-        <p:nvSpPr>
-          <p:cNvPr id="284" name="Bar1 value"/>
-          <p:cNvSpPr txBox="1"/>
-          <p:nvPr/>
-        </p:nvSpPr>
-        <p:spPr>
-          <a:xfrm>
-            <a:off x="3886200" y="4645152"/>
-            <a:ext cx="960120" cy="256032"/>
-          </a:xfrm>
-          <a:prstGeom prst="rect">
-            <a:avLst/>
-          </a:prstGeom>
-          <a:noFill/>
-        </p:spPr>
-        <p:txBody>
-          <a:bodyPr wrap="square" lIns="45720" tIns="27432" rIns="45720" bIns="27432" rtlCol="0" anchor="t">
-            <a:noAutofit/>
-          </a:bodyPr>
-          <a:lstStyle/>
-          <a:p>
-            <a:pPr marL="0" indent="0" latinLnBrk="0">
-              <a:lnSpc>
-                <a:spcPct val="100000"/>
-              </a:lnSpc>
-              <a:buNone/>
-              <a:defRPr/>
-            </a:pPr>
-            <a:r>
-              <a:rPr kumimoji="1" lang="en-US" altLang="ko-KR" sz="1050" b="1" dirty="0">
-                <a:solidFill>
-                  <a:srgbClr val="1F2937"/>
-                </a:solidFill>
-                <a:latin typeface="Calibri" panose="020F0502020204030204" pitchFamily="34" charset="0"/>
-                <a:ea typeface="-윤고딕340" pitchFamily="18" charset="-127"/>
-                <a:cs typeface="Calibri" panose="020F0502020204030204" pitchFamily="34" charset="0"/>
-              </a:rPr>
-              <a:t>12 / 40</a:t>
-            </a:r>
-          </a:p>
-        </p:txBody>
-      </p:sp>
-      <p:sp>
-        <p:nvSpPr>
-          <p:cNvPr id="285" name="Bar2 label"/>
-          <p:cNvSpPr txBox="1"/>
-          <p:nvPr/>
-        </p:nvSpPr>
-        <p:spPr>
-          <a:xfrm>
-            <a:off x="640080" y="4983480"/>
-            <a:ext cx="822960" cy="237744"/>
-          </a:xfrm>
-          <a:prstGeom prst="rect">
-            <a:avLst/>
-          </a:prstGeom>
-          <a:noFill/>
-        </p:spPr>
-        <p:txBody>
-          <a:bodyPr wrap="square" lIns="45720" tIns="27432" rIns="45720" bIns="27432" rtlCol="0" anchor="t">
-            <a:noAutofit/>
-          </a:bodyPr>
-          <a:lstStyle/>
-          <a:p>
-            <a:pPr marL="0" indent="0" latinLnBrk="0">
-              <a:lnSpc>
-                <a:spcPct val="100000"/>
-              </a:lnSpc>
-              <a:buNone/>
-              <a:defRPr/>
-            </a:pPr>
-            <a:r>
-              <a:rPr kumimoji="1" lang="en-US" altLang="ko-KR" sz="1050" dirty="0">
-                <a:solidFill>
-                  <a:srgbClr val="1F2937"/>
-                </a:solidFill>
-                <a:latin typeface="Calibri" panose="020F0502020204030204" pitchFamily="34" charset="0"/>
-                <a:ea typeface="-윤고딕340" pitchFamily="18" charset="-127"/>
-                <a:cs typeface="Calibri" panose="020F0502020204030204" pitchFamily="34" charset="0"/>
-              </a:rPr>
-              <a:t>GPU-hours</a:t>
-            </a:r>
-          </a:p>
-        </p:txBody>
-      </p:sp>
-      <p:sp>
-        <p:nvSpPr>
-          <p:cNvPr id="286" name="Bar2 bg"/>
-          <p:cNvSpPr/>
-          <p:nvPr/>
-        </p:nvSpPr>
-        <p:spPr>
-          <a:xfrm>
-            <a:off x="1463040" y="5010912"/>
-            <a:ext cx="2377440" cy="182880"/>
-          </a:xfrm>
-          <a:prstGeom prst="rect">
-            <a:avLst/>
-          </a:prstGeom>
-          <a:solidFill>
-            <a:srgbClr val="E5E7EB"/>
-          </a:solidFill>
-          <a:ln>
-            <a:noFill/>
-          </a:ln>
-        </p:spPr>
-        <p:txBody>
-          <a:bodyPr wrap="square" lIns="91440" tIns="64008" rIns="91440" bIns="64008" rtlCol="0" anchor="t">
-            <a:noAutofit/>
-          </a:bodyPr>
-          <a:lstStyle/>
-          <a:p>
-            <a:endParaRPr lang="en-US" dirty="0"/>
-          </a:p>
-        </p:txBody>
-      </p:sp>
-      <p:sp>
-        <p:nvSpPr>
-          <p:cNvPr id="287" name="Bar2 fg"/>
-          <p:cNvSpPr/>
-          <p:nvPr/>
-        </p:nvSpPr>
-        <p:spPr>
-          <a:xfrm>
-            <a:off x="1463040" y="5010912"/>
-            <a:ext cx="520935" cy="182880"/>
-          </a:xfrm>
-          <a:prstGeom prst="rect">
-            <a:avLst/>
-          </a:prstGeom>
-          <a:solidFill>
-            <a:srgbClr val="0070C0"/>
-          </a:solidFill>
-          <a:ln>
-            <a:noFill/>
-          </a:ln>
-        </p:spPr>
-        <p:txBody>
-          <a:bodyPr wrap="square" lIns="91440" tIns="64008" rIns="91440" bIns="64008" rtlCol="0" anchor="t">
-            <a:noAutofit/>
-          </a:bodyPr>
-          <a:lstStyle/>
-          <a:p>
-            <a:endParaRPr lang="en-US" dirty="0"/>
-          </a:p>
-        </p:txBody>
-      </p:sp>
-      <p:sp>
-        <p:nvSpPr>
-          <p:cNvPr id="288" name="Bar2 value"/>
-          <p:cNvSpPr txBox="1"/>
-          <p:nvPr/>
-        </p:nvSpPr>
-        <p:spPr>
-          <a:xfrm>
-            <a:off x="3886200" y="4965192"/>
-            <a:ext cx="960120" cy="256032"/>
-          </a:xfrm>
-          <a:prstGeom prst="rect">
-            <a:avLst/>
-          </a:prstGeom>
-          <a:noFill/>
-        </p:spPr>
-        <p:txBody>
-          <a:bodyPr wrap="square" lIns="45720" tIns="27432" rIns="45720" bIns="27432" rtlCol="0" anchor="t">
-            <a:noAutofit/>
-          </a:bodyPr>
-          <a:lstStyle/>
-          <a:p>
-            <a:pPr marL="0" indent="0" latinLnBrk="0">
-              <a:lnSpc>
-                <a:spcPct val="100000"/>
-              </a:lnSpc>
-              <a:buNone/>
-              <a:defRPr/>
-            </a:pPr>
-            <a:r>
-              <a:rPr kumimoji="1" lang="en-US" altLang="ko-KR" sz="1050" b="1" dirty="0">
-                <a:solidFill>
-                  <a:srgbClr val="1F2937"/>
-                </a:solidFill>
-                <a:latin typeface="Calibri" panose="020F0502020204030204" pitchFamily="34" charset="0"/>
-                <a:ea typeface="-윤고딕340" pitchFamily="18" charset="-127"/>
-                <a:cs typeface="Calibri" panose="020F0502020204030204" pitchFamily="34" charset="0"/>
-              </a:rPr>
-              <a:t>101 / 461</a:t>
-            </a:r>
-          </a:p>
-        </p:txBody>
-      </p:sp>
-      <p:sp>
-        <p:nvSpPr>
-          <p:cNvPr id="289" name="Status text"/>
-          <p:cNvSpPr txBox="1"/>
-          <p:nvPr/>
-        </p:nvSpPr>
-        <p:spPr>
-          <a:xfrm>
-            <a:off x="640080" y="5285232"/>
-            <a:ext cx="4114800" cy="457200"/>
-          </a:xfrm>
-          <a:prstGeom prst="rect">
-            <a:avLst/>
-          </a:prstGeom>
-          <a:noFill/>
-        </p:spPr>
-        <p:txBody>
-          <a:bodyPr wrap="square" lIns="45720" tIns="27432" rIns="45720" bIns="27432" rtlCol="0" anchor="t">
-            <a:noAutofit/>
-          </a:bodyPr>
-          <a:lstStyle/>
-          <a:p>
-            <a:pPr marL="0" indent="0" latinLnBrk="0">
+            <a:pPr marL="0" indent="0" latinLnBrk="0" algn="ctr">
               <a:lnSpc>
                 <a:spcPct val="105000"/>
               </a:lnSpc>
@@ -14283,136 +13332,1112 @@
             <a:r>
               <a:rPr kumimoji="1" lang="en-US" altLang="ko-KR" sz="1050" dirty="0">
                 <a:solidFill>
-                  <a:srgbClr val="1F2937"/>
+                  <a:srgbClr val="6B7280"/>
                 </a:solidFill>
                 <a:latin typeface="Calibri" panose="020F0502020204030204" pitchFamily="34" charset="0"/>
                 <a:ea typeface="-윤고딕340" pitchFamily="18" charset="-127"/>
                 <a:cs typeface="Calibri" panose="020F0502020204030204" pitchFamily="34" charset="0"/>
               </a:rPr>
-              <a:t>Completion expected around Oct 21; the ratio is analysed once, after all 40 runs.</a:t>
+              <a:t>Same host configuration and cell volume — only the precursor anion differs</a:t>
+            </a:r>
+          </a:p>
+          <a:p>
+            <a:pPr marL="0" indent="0" latinLnBrk="0" algn="ctr">
+              <a:lnSpc>
+                <a:spcPct val="110000"/>
+              </a:lnSpc>
+              <a:buNone/>
+              <a:defRPr/>
+            </a:pPr>
+            <a:r>
+              <a:rPr kumimoji="1" lang="en-US" altLang="ko-KR" sz="1300" b="1" dirty="0">
+                <a:solidFill>
+                  <a:srgbClr val="0070C0"/>
+                </a:solidFill>
+                <a:latin typeface="Calibri" panose="020F0502020204030204" pitchFamily="34" charset="0"/>
+                <a:ea typeface="-윤고딕340" pitchFamily="18" charset="-127"/>
+                <a:cs typeface="Calibri" panose="020F0502020204030204" pitchFamily="34" charset="0"/>
+              </a:rPr>
+              <a:t>→ D(Al₂O₃) / D(Al₂S₃)</a:t>
             </a:r>
           </a:p>
         </p:txBody>
       </p:sp>
-      <p:pic>
-        <p:nvPicPr>
-          <p:cNvPr id="290" name="Jung 2026 Fig 5b" descr="Li diffusivity vs 1000/T, Jung 2026 Fig. 5b"/>
-          <p:cNvPicPr>
-            <a:picLocks noChangeAspect="1"/>
-          </p:cNvPicPr>
+      <p:graphicFrame>
+        <p:nvGraphicFramePr>
+          <p:cNvPr id="291" name="Settings table"/>
+          <p:cNvGraphicFramePr>
+            <a:graphicFrameLocks noGrp="1"/>
+          </p:cNvGraphicFramePr>
           <p:nvPr/>
-        </p:nvPicPr>
-        <p:blipFill>
-          <a:blip r:embed="rId2"/>
-          <a:stretch>
-            <a:fillRect/>
-          </a:stretch>
-        </p:blipFill>
-        <p:spPr>
-          <a:xfrm>
-            <a:off x="4983480" y="1371600"/>
-            <a:ext cx="3611880" cy="3207754"/>
-          </a:xfrm>
-          <a:prstGeom prst="rect">
-            <a:avLst/>
-          </a:prstGeom>
-        </p:spPr>
-      </p:pic>
+        </p:nvGraphicFramePr>
+        <p:xfrm>
+          <a:off x="4846320" y="1371600"/>
+          <a:ext cx="3794760" cy="3657600"/>
+        </p:xfrm>
+        <a:graphic>
+          <a:graphicData uri="http://schemas.openxmlformats.org/drawingml/2006/table">
+            <a:tbl>
+              <a:tblPr firstRow="1" bandRow="1">
+                <a:tableStyleId>{3B4B98B0-60AC-42C2-AFA5-B58CD77FA1E5}</a:tableStyleId>
+              </a:tblPr>
+              <a:tblGrid>
+                <a:gridCol w="1280160"/>
+                <a:gridCol w="2514600"/>
+              </a:tblGrid>
+              <a:tr h="310896">
+                <a:tc>
+                  <a:txBody>
+                    <a:bodyPr/>
+                    <a:lstStyle/>
+                    <a:p>
+                      <a:pPr marL="0" indent="0" latinLnBrk="0" algn="ctr">
+                        <a:lnSpc>
+                          <a:spcPct val="100000"/>
+                        </a:lnSpc>
+                        <a:buNone/>
+                        <a:defRPr/>
+                      </a:pPr>
+                      <a:r>
+                        <a:rPr kumimoji="1" lang="en-US" altLang="ko-KR" sz="1200" b="1" dirty="0">
+                          <a:solidFill>
+                            <a:srgbClr val="1F2937"/>
+                          </a:solidFill>
+                          <a:latin typeface="Calibri" panose="020F0502020204030204" pitchFamily="34" charset="0"/>
+                          <a:ea typeface="-윤고딕340" pitchFamily="18" charset="-127"/>
+                          <a:cs typeface="Calibri" panose="020F0502020204030204" pitchFamily="34" charset="0"/>
+                        </a:rPr>
+                        <a:t>Setting</a:t>
+                      </a:r>
+                    </a:p>
+                  </a:txBody>
+                  <a:tcPr marL="54864" marR="54864" marT="27432" marB="27432" anchor="ctr">
+                    <a:lnL w="12700" cap="flat" cmpd="sng" algn="ctr">
+                      <a:solidFill>
+                        <a:srgbClr val="C9D3E3"/>
+                      </a:solidFill>
+                      <a:prstDash val="solid"/>
+                      <a:round/>
+                      <a:headEnd type="none" w="med" len="med"/>
+                      <a:tailEnd type="none" w="med" len="med"/>
+                    </a:lnL>
+                    <a:lnR w="12700" cap="flat" cmpd="sng" algn="ctr">
+                      <a:solidFill>
+                        <a:srgbClr val="C9D3E3"/>
+                      </a:solidFill>
+                      <a:prstDash val="solid"/>
+                      <a:round/>
+                      <a:headEnd type="none" w="med" len="med"/>
+                      <a:tailEnd type="none" w="med" len="med"/>
+                    </a:lnR>
+                    <a:lnT w="12700" cap="flat" cmpd="sng" algn="ctr">
+                      <a:solidFill>
+                        <a:srgbClr val="C9D3E3"/>
+                      </a:solidFill>
+                      <a:prstDash val="solid"/>
+                      <a:round/>
+                      <a:headEnd type="none" w="med" len="med"/>
+                      <a:tailEnd type="none" w="med" len="med"/>
+                    </a:lnT>
+                    <a:lnB w="12700" cap="flat" cmpd="sng" algn="ctr">
+                      <a:solidFill>
+                        <a:srgbClr val="C9D3E3"/>
+                      </a:solidFill>
+                      <a:prstDash val="solid"/>
+                      <a:round/>
+                      <a:headEnd type="none" w="med" len="med"/>
+                      <a:tailEnd type="none" w="med" len="med"/>
+                    </a:lnB>
+                  </a:tcPr>
+                </a:tc>
+                <a:tc>
+                  <a:txBody>
+                    <a:bodyPr/>
+                    <a:lstStyle/>
+                    <a:p>
+                      <a:pPr marL="0" indent="0" latinLnBrk="0" algn="ctr">
+                        <a:lnSpc>
+                          <a:spcPct val="100000"/>
+                        </a:lnSpc>
+                        <a:buNone/>
+                        <a:defRPr/>
+                      </a:pPr>
+                      <a:r>
+                        <a:rPr kumimoji="1" lang="en-US" altLang="ko-KR" sz="1200" b="1" dirty="0">
+                          <a:solidFill>
+                            <a:srgbClr val="1F2937"/>
+                          </a:solidFill>
+                          <a:latin typeface="Calibri" panose="020F0502020204030204" pitchFamily="34" charset="0"/>
+                          <a:ea typeface="-윤고딕340" pitchFamily="18" charset="-127"/>
+                          <a:cs typeface="Calibri" panose="020F0502020204030204" pitchFamily="34" charset="0"/>
+                        </a:rPr>
+                        <a:t>Value</a:t>
+                      </a:r>
+                    </a:p>
+                  </a:txBody>
+                  <a:tcPr marL="54864" marR="54864" marT="27432" marB="27432" anchor="ctr">
+                    <a:lnL w="12700" cap="flat" cmpd="sng" algn="ctr">
+                      <a:solidFill>
+                        <a:srgbClr val="C9D3E3"/>
+                      </a:solidFill>
+                      <a:prstDash val="solid"/>
+                      <a:round/>
+                      <a:headEnd type="none" w="med" len="med"/>
+                      <a:tailEnd type="none" w="med" len="med"/>
+                    </a:lnL>
+                    <a:lnR w="12700" cap="flat" cmpd="sng" algn="ctr">
+                      <a:solidFill>
+                        <a:srgbClr val="C9D3E3"/>
+                      </a:solidFill>
+                      <a:prstDash val="solid"/>
+                      <a:round/>
+                      <a:headEnd type="none" w="med" len="med"/>
+                      <a:tailEnd type="none" w="med" len="med"/>
+                    </a:lnR>
+                    <a:lnT w="12700" cap="flat" cmpd="sng" algn="ctr">
+                      <a:solidFill>
+                        <a:srgbClr val="C9D3E3"/>
+                      </a:solidFill>
+                      <a:prstDash val="solid"/>
+                      <a:round/>
+                      <a:headEnd type="none" w="med" len="med"/>
+                      <a:tailEnd type="none" w="med" len="med"/>
+                    </a:lnT>
+                    <a:lnB w="12700" cap="flat" cmpd="sng" algn="ctr">
+                      <a:solidFill>
+                        <a:srgbClr val="C9D3E3"/>
+                      </a:solidFill>
+                      <a:prstDash val="solid"/>
+                      <a:round/>
+                      <a:headEnd type="none" w="med" len="med"/>
+                      <a:tailEnd type="none" w="med" len="med"/>
+                    </a:lnB>
+                  </a:tcPr>
+                </a:tc>
+              </a:tr>
+              <a:tr h="384048">
+                <a:tc>
+                  <a:txBody>
+                    <a:bodyPr/>
+                    <a:lstStyle/>
+                    <a:p>
+                      <a:pPr marL="0" indent="0" latinLnBrk="0" algn="l">
+                        <a:lnSpc>
+                          <a:spcPct val="100000"/>
+                        </a:lnSpc>
+                        <a:buNone/>
+                        <a:defRPr/>
+                      </a:pPr>
+                      <a:r>
+                        <a:rPr kumimoji="1" lang="en-US" altLang="ko-KR" sz="1100" dirty="0">
+                          <a:solidFill>
+                            <a:srgbClr val="1F2937"/>
+                          </a:solidFill>
+                          <a:latin typeface="Calibri" panose="020F0502020204030204" pitchFamily="34" charset="0"/>
+                          <a:ea typeface="-윤고딕340" pitchFamily="18" charset="-127"/>
+                          <a:cs typeface="Calibri" panose="020F0502020204030204" pitchFamily="34" charset="0"/>
+                        </a:rPr>
+                        <a:t>Potential</a:t>
+                      </a:r>
+                    </a:p>
+                  </a:txBody>
+                  <a:tcPr marL="54864" marR="54864" marT="27432" marB="27432" anchor="ctr">
+                    <a:lnL w="12700" cap="flat" cmpd="sng" algn="ctr">
+                      <a:solidFill>
+                        <a:srgbClr val="C9D3E3"/>
+                      </a:solidFill>
+                      <a:prstDash val="solid"/>
+                      <a:round/>
+                      <a:headEnd type="none" w="med" len="med"/>
+                      <a:tailEnd type="none" w="med" len="med"/>
+                    </a:lnL>
+                    <a:lnR w="12700" cap="flat" cmpd="sng" algn="ctr">
+                      <a:solidFill>
+                        <a:srgbClr val="C9D3E3"/>
+                      </a:solidFill>
+                      <a:prstDash val="solid"/>
+                      <a:round/>
+                      <a:headEnd type="none" w="med" len="med"/>
+                      <a:tailEnd type="none" w="med" len="med"/>
+                    </a:lnR>
+                    <a:lnT w="12700" cap="flat" cmpd="sng" algn="ctr">
+                      <a:solidFill>
+                        <a:srgbClr val="C9D3E3"/>
+                      </a:solidFill>
+                      <a:prstDash val="solid"/>
+                      <a:round/>
+                      <a:headEnd type="none" w="med" len="med"/>
+                      <a:tailEnd type="none" w="med" len="med"/>
+                    </a:lnT>
+                    <a:lnB w="12700" cap="flat" cmpd="sng" algn="ctr">
+                      <a:solidFill>
+                        <a:srgbClr val="C9D3E3"/>
+                      </a:solidFill>
+                      <a:prstDash val="solid"/>
+                      <a:round/>
+                      <a:headEnd type="none" w="med" len="med"/>
+                      <a:tailEnd type="none" w="med" len="med"/>
+                    </a:lnB>
+                  </a:tcPr>
+                </a:tc>
+                <a:tc>
+                  <a:txBody>
+                    <a:bodyPr/>
+                    <a:lstStyle/>
+                    <a:p>
+                      <a:pPr marL="0" indent="0" latinLnBrk="0" algn="l">
+                        <a:lnSpc>
+                          <a:spcPct val="100000"/>
+                        </a:lnSpc>
+                        <a:buNone/>
+                        <a:defRPr/>
+                      </a:pPr>
+                      <a:r>
+                        <a:rPr kumimoji="1" lang="en-US" altLang="ko-KR" sz="1100" dirty="0">
+                          <a:solidFill>
+                            <a:srgbClr val="1F2937"/>
+                          </a:solidFill>
+                          <a:latin typeface="Calibri" panose="020F0502020204030204" pitchFamily="34" charset="0"/>
+                          <a:ea typeface="-윤고딕340" pitchFamily="18" charset="-127"/>
+                          <a:cs typeface="Calibri" panose="020F0502020204030204" pitchFamily="34" charset="0"/>
+                        </a:rPr>
+                        <a:t>UMA (universal MLIP)</a:t>
+                      </a:r>
+                    </a:p>
+                  </a:txBody>
+                  <a:tcPr marL="54864" marR="54864" marT="27432" marB="27432" anchor="ctr">
+                    <a:lnL w="12700" cap="flat" cmpd="sng" algn="ctr">
+                      <a:solidFill>
+                        <a:srgbClr val="C9D3E3"/>
+                      </a:solidFill>
+                      <a:prstDash val="solid"/>
+                      <a:round/>
+                      <a:headEnd type="none" w="med" len="med"/>
+                      <a:tailEnd type="none" w="med" len="med"/>
+                    </a:lnL>
+                    <a:lnR w="12700" cap="flat" cmpd="sng" algn="ctr">
+                      <a:solidFill>
+                        <a:srgbClr val="C9D3E3"/>
+                      </a:solidFill>
+                      <a:prstDash val="solid"/>
+                      <a:round/>
+                      <a:headEnd type="none" w="med" len="med"/>
+                      <a:tailEnd type="none" w="med" len="med"/>
+                    </a:lnR>
+                    <a:lnT w="12700" cap="flat" cmpd="sng" algn="ctr">
+                      <a:solidFill>
+                        <a:srgbClr val="C9D3E3"/>
+                      </a:solidFill>
+                      <a:prstDash val="solid"/>
+                      <a:round/>
+                      <a:headEnd type="none" w="med" len="med"/>
+                      <a:tailEnd type="none" w="med" len="med"/>
+                    </a:lnT>
+                    <a:lnB w="12700" cap="flat" cmpd="sng" algn="ctr">
+                      <a:solidFill>
+                        <a:srgbClr val="C9D3E3"/>
+                      </a:solidFill>
+                      <a:prstDash val="solid"/>
+                      <a:round/>
+                      <a:headEnd type="none" w="med" len="med"/>
+                      <a:tailEnd type="none" w="med" len="med"/>
+                    </a:lnB>
+                  </a:tcPr>
+                </a:tc>
+              </a:tr>
+              <a:tr h="384048">
+                <a:tc>
+                  <a:txBody>
+                    <a:bodyPr/>
+                    <a:lstStyle/>
+                    <a:p>
+                      <a:pPr marL="0" indent="0" latinLnBrk="0" algn="l">
+                        <a:lnSpc>
+                          <a:spcPct val="100000"/>
+                        </a:lnSpc>
+                        <a:buNone/>
+                        <a:defRPr/>
+                      </a:pPr>
+                      <a:r>
+                        <a:rPr kumimoji="1" lang="en-US" altLang="ko-KR" sz="1100" dirty="0">
+                          <a:solidFill>
+                            <a:srgbClr val="1F2937"/>
+                          </a:solidFill>
+                          <a:latin typeface="Calibri" panose="020F0502020204030204" pitchFamily="34" charset="0"/>
+                          <a:ea typeface="-윤고딕340" pitchFamily="18" charset="-127"/>
+                          <a:cs typeface="Calibri" panose="020F0502020204030204" pitchFamily="34" charset="0"/>
+                        </a:rPr>
+                        <a:t>Ensemble</a:t>
+                      </a:r>
+                    </a:p>
+                  </a:txBody>
+                  <a:tcPr marL="54864" marR="54864" marT="27432" marB="27432" anchor="ctr">
+                    <a:lnL w="12700" cap="flat" cmpd="sng" algn="ctr">
+                      <a:solidFill>
+                        <a:srgbClr val="C9D3E3"/>
+                      </a:solidFill>
+                      <a:prstDash val="solid"/>
+                      <a:round/>
+                      <a:headEnd type="none" w="med" len="med"/>
+                      <a:tailEnd type="none" w="med" len="med"/>
+                    </a:lnL>
+                    <a:lnR w="12700" cap="flat" cmpd="sng" algn="ctr">
+                      <a:solidFill>
+                        <a:srgbClr val="C9D3E3"/>
+                      </a:solidFill>
+                      <a:prstDash val="solid"/>
+                      <a:round/>
+                      <a:headEnd type="none" w="med" len="med"/>
+                      <a:tailEnd type="none" w="med" len="med"/>
+                    </a:lnR>
+                    <a:lnT w="12700" cap="flat" cmpd="sng" algn="ctr">
+                      <a:solidFill>
+                        <a:srgbClr val="C9D3E3"/>
+                      </a:solidFill>
+                      <a:prstDash val="solid"/>
+                      <a:round/>
+                      <a:headEnd type="none" w="med" len="med"/>
+                      <a:tailEnd type="none" w="med" len="med"/>
+                    </a:lnT>
+                    <a:lnB w="12700" cap="flat" cmpd="sng" algn="ctr">
+                      <a:solidFill>
+                        <a:srgbClr val="C9D3E3"/>
+                      </a:solidFill>
+                      <a:prstDash val="solid"/>
+                      <a:round/>
+                      <a:headEnd type="none" w="med" len="med"/>
+                      <a:tailEnd type="none" w="med" len="med"/>
+                    </a:lnB>
+                  </a:tcPr>
+                </a:tc>
+                <a:tc>
+                  <a:txBody>
+                    <a:bodyPr/>
+                    <a:lstStyle/>
+                    <a:p>
+                      <a:pPr marL="0" indent="0" latinLnBrk="0" algn="l">
+                        <a:lnSpc>
+                          <a:spcPct val="100000"/>
+                        </a:lnSpc>
+                        <a:buNone/>
+                        <a:defRPr/>
+                      </a:pPr>
+                      <a:r>
+                        <a:rPr kumimoji="1" lang="en-US" altLang="ko-KR" sz="1100" dirty="0">
+                          <a:solidFill>
+                            <a:srgbClr val="1F2937"/>
+                          </a:solidFill>
+                          <a:latin typeface="Calibri" panose="020F0502020204030204" pitchFamily="34" charset="0"/>
+                          <a:ea typeface="-윤고딕340" pitchFamily="18" charset="-127"/>
+                          <a:cs typeface="Calibri" panose="020F0502020204030204" pitchFamily="34" charset="0"/>
+                        </a:rPr>
+                        <a:t>NVT, Langevin thermostat</a:t>
+                      </a:r>
+                    </a:p>
+                  </a:txBody>
+                  <a:tcPr marL="54864" marR="54864" marT="27432" marB="27432" anchor="ctr">
+                    <a:lnL w="12700" cap="flat" cmpd="sng" algn="ctr">
+                      <a:solidFill>
+                        <a:srgbClr val="C9D3E3"/>
+                      </a:solidFill>
+                      <a:prstDash val="solid"/>
+                      <a:round/>
+                      <a:headEnd type="none" w="med" len="med"/>
+                      <a:tailEnd type="none" w="med" len="med"/>
+                    </a:lnL>
+                    <a:lnR w="12700" cap="flat" cmpd="sng" algn="ctr">
+                      <a:solidFill>
+                        <a:srgbClr val="C9D3E3"/>
+                      </a:solidFill>
+                      <a:prstDash val="solid"/>
+                      <a:round/>
+                      <a:headEnd type="none" w="med" len="med"/>
+                      <a:tailEnd type="none" w="med" len="med"/>
+                    </a:lnR>
+                    <a:lnT w="12700" cap="flat" cmpd="sng" algn="ctr">
+                      <a:solidFill>
+                        <a:srgbClr val="C9D3E3"/>
+                      </a:solidFill>
+                      <a:prstDash val="solid"/>
+                      <a:round/>
+                      <a:headEnd type="none" w="med" len="med"/>
+                      <a:tailEnd type="none" w="med" len="med"/>
+                    </a:lnT>
+                    <a:lnB w="12700" cap="flat" cmpd="sng" algn="ctr">
+                      <a:solidFill>
+                        <a:srgbClr val="C9D3E3"/>
+                      </a:solidFill>
+                      <a:prstDash val="solid"/>
+                      <a:round/>
+                      <a:headEnd type="none" w="med" len="med"/>
+                      <a:tailEnd type="none" w="med" len="med"/>
+                    </a:lnB>
+                  </a:tcPr>
+                </a:tc>
+              </a:tr>
+              <a:tr h="384048">
+                <a:tc>
+                  <a:txBody>
+                    <a:bodyPr/>
+                    <a:lstStyle/>
+                    <a:p>
+                      <a:pPr marL="0" indent="0" latinLnBrk="0" algn="l">
+                        <a:lnSpc>
+                          <a:spcPct val="100000"/>
+                        </a:lnSpc>
+                        <a:buNone/>
+                        <a:defRPr/>
+                      </a:pPr>
+                      <a:r>
+                        <a:rPr kumimoji="1" lang="en-US" altLang="ko-KR" sz="1100" dirty="0">
+                          <a:solidFill>
+                            <a:srgbClr val="1F2937"/>
+                          </a:solidFill>
+                          <a:latin typeface="Calibri" panose="020F0502020204030204" pitchFamily="34" charset="0"/>
+                          <a:ea typeface="-윤고딕340" pitchFamily="18" charset="-127"/>
+                          <a:cs typeface="Calibri" panose="020F0502020204030204" pitchFamily="34" charset="0"/>
+                        </a:rPr>
+                        <a:t>Temperature</a:t>
+                      </a:r>
+                    </a:p>
+                  </a:txBody>
+                  <a:tcPr marL="54864" marR="54864" marT="27432" marB="27432" anchor="ctr">
+                    <a:lnL w="12700" cap="flat" cmpd="sng" algn="ctr">
+                      <a:solidFill>
+                        <a:srgbClr val="C9D3E3"/>
+                      </a:solidFill>
+                      <a:prstDash val="solid"/>
+                      <a:round/>
+                      <a:headEnd type="none" w="med" len="med"/>
+                      <a:tailEnd type="none" w="med" len="med"/>
+                    </a:lnL>
+                    <a:lnR w="12700" cap="flat" cmpd="sng" algn="ctr">
+                      <a:solidFill>
+                        <a:srgbClr val="C9D3E3"/>
+                      </a:solidFill>
+                      <a:prstDash val="solid"/>
+                      <a:round/>
+                      <a:headEnd type="none" w="med" len="med"/>
+                      <a:tailEnd type="none" w="med" len="med"/>
+                    </a:lnR>
+                    <a:lnT w="12700" cap="flat" cmpd="sng" algn="ctr">
+                      <a:solidFill>
+                        <a:srgbClr val="C9D3E3"/>
+                      </a:solidFill>
+                      <a:prstDash val="solid"/>
+                      <a:round/>
+                      <a:headEnd type="none" w="med" len="med"/>
+                      <a:tailEnd type="none" w="med" len="med"/>
+                    </a:lnT>
+                    <a:lnB w="12700" cap="flat" cmpd="sng" algn="ctr">
+                      <a:solidFill>
+                        <a:srgbClr val="C9D3E3"/>
+                      </a:solidFill>
+                      <a:prstDash val="solid"/>
+                      <a:round/>
+                      <a:headEnd type="none" w="med" len="med"/>
+                      <a:tailEnd type="none" w="med" len="med"/>
+                    </a:lnB>
+                  </a:tcPr>
+                </a:tc>
+                <a:tc>
+                  <a:txBody>
+                    <a:bodyPr/>
+                    <a:lstStyle/>
+                    <a:p>
+                      <a:pPr marL="0" indent="0" latinLnBrk="0" algn="l">
+                        <a:lnSpc>
+                          <a:spcPct val="100000"/>
+                        </a:lnSpc>
+                        <a:buNone/>
+                        <a:defRPr/>
+                      </a:pPr>
+                      <a:r>
+                        <a:rPr kumimoji="1" lang="en-US" altLang="ko-KR" sz="1100" dirty="0">
+                          <a:solidFill>
+                            <a:srgbClr val="1F2937"/>
+                          </a:solidFill>
+                          <a:latin typeface="Calibri" panose="020F0502020204030204" pitchFamily="34" charset="0"/>
+                          <a:ea typeface="-윤고딕340" pitchFamily="18" charset="-127"/>
+                          <a:cs typeface="Calibri" panose="020F0502020204030204" pitchFamily="34" charset="0"/>
+                        </a:rPr>
+                        <a:t>1000 K (selected in a pilot)</a:t>
+                      </a:r>
+                    </a:p>
+                  </a:txBody>
+                  <a:tcPr marL="54864" marR="54864" marT="27432" marB="27432" anchor="ctr">
+                    <a:lnL w="12700" cap="flat" cmpd="sng" algn="ctr">
+                      <a:solidFill>
+                        <a:srgbClr val="C9D3E3"/>
+                      </a:solidFill>
+                      <a:prstDash val="solid"/>
+                      <a:round/>
+                      <a:headEnd type="none" w="med" len="med"/>
+                      <a:tailEnd type="none" w="med" len="med"/>
+                    </a:lnL>
+                    <a:lnR w="12700" cap="flat" cmpd="sng" algn="ctr">
+                      <a:solidFill>
+                        <a:srgbClr val="C9D3E3"/>
+                      </a:solidFill>
+                      <a:prstDash val="solid"/>
+                      <a:round/>
+                      <a:headEnd type="none" w="med" len="med"/>
+                      <a:tailEnd type="none" w="med" len="med"/>
+                    </a:lnR>
+                    <a:lnT w="12700" cap="flat" cmpd="sng" algn="ctr">
+                      <a:solidFill>
+                        <a:srgbClr val="C9D3E3"/>
+                      </a:solidFill>
+                      <a:prstDash val="solid"/>
+                      <a:round/>
+                      <a:headEnd type="none" w="med" len="med"/>
+                      <a:tailEnd type="none" w="med" len="med"/>
+                    </a:lnT>
+                    <a:lnB w="12700" cap="flat" cmpd="sng" algn="ctr">
+                      <a:solidFill>
+                        <a:srgbClr val="C9D3E3"/>
+                      </a:solidFill>
+                      <a:prstDash val="solid"/>
+                      <a:round/>
+                      <a:headEnd type="none" w="med" len="med"/>
+                      <a:tailEnd type="none" w="med" len="med"/>
+                    </a:lnB>
+                  </a:tcPr>
+                </a:tc>
+              </a:tr>
+              <a:tr h="457200">
+                <a:tc>
+                  <a:txBody>
+                    <a:bodyPr/>
+                    <a:lstStyle/>
+                    <a:p>
+                      <a:pPr marL="0" indent="0" latinLnBrk="0" algn="l">
+                        <a:lnSpc>
+                          <a:spcPct val="100000"/>
+                        </a:lnSpc>
+                        <a:buNone/>
+                        <a:defRPr/>
+                      </a:pPr>
+                      <a:r>
+                        <a:rPr kumimoji="1" lang="en-US" altLang="ko-KR" sz="1100" dirty="0">
+                          <a:solidFill>
+                            <a:srgbClr val="1F2937"/>
+                          </a:solidFill>
+                          <a:latin typeface="Calibri" panose="020F0502020204030204" pitchFamily="34" charset="0"/>
+                          <a:ea typeface="-윤고딕340" pitchFamily="18" charset="-127"/>
+                          <a:cs typeface="Calibri" panose="020F0502020204030204" pitchFamily="34" charset="0"/>
+                        </a:rPr>
+                        <a:t>Run length</a:t>
+                      </a:r>
+                    </a:p>
+                  </a:txBody>
+                  <a:tcPr marL="54864" marR="54864" marT="27432" marB="27432" anchor="ctr">
+                    <a:lnL w="12700" cap="flat" cmpd="sng" algn="ctr">
+                      <a:solidFill>
+                        <a:srgbClr val="C9D3E3"/>
+                      </a:solidFill>
+                      <a:prstDash val="solid"/>
+                      <a:round/>
+                      <a:headEnd type="none" w="med" len="med"/>
+                      <a:tailEnd type="none" w="med" len="med"/>
+                    </a:lnL>
+                    <a:lnR w="12700" cap="flat" cmpd="sng" algn="ctr">
+                      <a:solidFill>
+                        <a:srgbClr val="C9D3E3"/>
+                      </a:solidFill>
+                      <a:prstDash val="solid"/>
+                      <a:round/>
+                      <a:headEnd type="none" w="med" len="med"/>
+                      <a:tailEnd type="none" w="med" len="med"/>
+                    </a:lnR>
+                    <a:lnT w="12700" cap="flat" cmpd="sng" algn="ctr">
+                      <a:solidFill>
+                        <a:srgbClr val="C9D3E3"/>
+                      </a:solidFill>
+                      <a:prstDash val="solid"/>
+                      <a:round/>
+                      <a:headEnd type="none" w="med" len="med"/>
+                      <a:tailEnd type="none" w="med" len="med"/>
+                    </a:lnT>
+                    <a:lnB w="12700" cap="flat" cmpd="sng" algn="ctr">
+                      <a:solidFill>
+                        <a:srgbClr val="C9D3E3"/>
+                      </a:solidFill>
+                      <a:prstDash val="solid"/>
+                      <a:round/>
+                      <a:headEnd type="none" w="med" len="med"/>
+                      <a:tailEnd type="none" w="med" len="med"/>
+                    </a:lnB>
+                  </a:tcPr>
+                </a:tc>
+                <a:tc>
+                  <a:txBody>
+                    <a:bodyPr/>
+                    <a:lstStyle/>
+                    <a:p>
+                      <a:pPr marL="0" indent="0" latinLnBrk="0" algn="l">
+                        <a:lnSpc>
+                          <a:spcPct val="100000"/>
+                        </a:lnSpc>
+                        <a:buNone/>
+                        <a:defRPr/>
+                      </a:pPr>
+                      <a:r>
+                        <a:rPr kumimoji="1" lang="en-US" altLang="ko-KR" sz="1100" dirty="0">
+                          <a:solidFill>
+                            <a:srgbClr val="1F2937"/>
+                          </a:solidFill>
+                          <a:latin typeface="Calibri" panose="020F0502020204030204" pitchFamily="34" charset="0"/>
+                          <a:ea typeface="-윤고딕340" pitchFamily="18" charset="-127"/>
+                          <a:cs typeface="Calibri" panose="020F0502020204030204" pitchFamily="34" charset="0"/>
+                        </a:rPr>
+                        <a:t>400 ps production; MSD fit 2–50 ps</a:t>
+                      </a:r>
+                    </a:p>
+                  </a:txBody>
+                  <a:tcPr marL="54864" marR="54864" marT="27432" marB="27432" anchor="ctr">
+                    <a:lnL w="12700" cap="flat" cmpd="sng" algn="ctr">
+                      <a:solidFill>
+                        <a:srgbClr val="C9D3E3"/>
+                      </a:solidFill>
+                      <a:prstDash val="solid"/>
+                      <a:round/>
+                      <a:headEnd type="none" w="med" len="med"/>
+                      <a:tailEnd type="none" w="med" len="med"/>
+                    </a:lnL>
+                    <a:lnR w="12700" cap="flat" cmpd="sng" algn="ctr">
+                      <a:solidFill>
+                        <a:srgbClr val="C9D3E3"/>
+                      </a:solidFill>
+                      <a:prstDash val="solid"/>
+                      <a:round/>
+                      <a:headEnd type="none" w="med" len="med"/>
+                      <a:tailEnd type="none" w="med" len="med"/>
+                    </a:lnR>
+                    <a:lnT w="12700" cap="flat" cmpd="sng" algn="ctr">
+                      <a:solidFill>
+                        <a:srgbClr val="C9D3E3"/>
+                      </a:solidFill>
+                      <a:prstDash val="solid"/>
+                      <a:round/>
+                      <a:headEnd type="none" w="med" len="med"/>
+                      <a:tailEnd type="none" w="med" len="med"/>
+                    </a:lnT>
+                    <a:lnB w="12700" cap="flat" cmpd="sng" algn="ctr">
+                      <a:solidFill>
+                        <a:srgbClr val="C9D3E3"/>
+                      </a:solidFill>
+                      <a:prstDash val="solid"/>
+                      <a:round/>
+                      <a:headEnd type="none" w="med" len="med"/>
+                      <a:tailEnd type="none" w="med" len="med"/>
+                    </a:lnB>
+                  </a:tcPr>
+                </a:tc>
+              </a:tr>
+              <a:tr h="457200">
+                <a:tc>
+                  <a:txBody>
+                    <a:bodyPr/>
+                    <a:lstStyle/>
+                    <a:p>
+                      <a:pPr marL="0" indent="0" latinLnBrk="0" algn="l">
+                        <a:lnSpc>
+                          <a:spcPct val="100000"/>
+                        </a:lnSpc>
+                        <a:buNone/>
+                        <a:defRPr/>
+                      </a:pPr>
+                      <a:r>
+                        <a:rPr kumimoji="1" lang="en-US" altLang="ko-KR" sz="1100" dirty="0">
+                          <a:solidFill>
+                            <a:srgbClr val="1F2937"/>
+                          </a:solidFill>
+                          <a:latin typeface="Calibri" panose="020F0502020204030204" pitchFamily="34" charset="0"/>
+                          <a:ea typeface="-윤고딕340" pitchFamily="18" charset="-127"/>
+                          <a:cs typeface="Calibri" panose="020F0502020204030204" pitchFamily="34" charset="0"/>
+                        </a:rPr>
+                        <a:t>Cell</a:t>
+                      </a:r>
+                    </a:p>
+                  </a:txBody>
+                  <a:tcPr marL="54864" marR="54864" marT="27432" marB="27432" anchor="ctr">
+                    <a:lnL w="12700" cap="flat" cmpd="sng" algn="ctr">
+                      <a:solidFill>
+                        <a:srgbClr val="C9D3E3"/>
+                      </a:solidFill>
+                      <a:prstDash val="solid"/>
+                      <a:round/>
+                      <a:headEnd type="none" w="med" len="med"/>
+                      <a:tailEnd type="none" w="med" len="med"/>
+                    </a:lnL>
+                    <a:lnR w="12700" cap="flat" cmpd="sng" algn="ctr">
+                      <a:solidFill>
+                        <a:srgbClr val="C9D3E3"/>
+                      </a:solidFill>
+                      <a:prstDash val="solid"/>
+                      <a:round/>
+                      <a:headEnd type="none" w="med" len="med"/>
+                      <a:tailEnd type="none" w="med" len="med"/>
+                    </a:lnR>
+                    <a:lnT w="12700" cap="flat" cmpd="sng" algn="ctr">
+                      <a:solidFill>
+                        <a:srgbClr val="C9D3E3"/>
+                      </a:solidFill>
+                      <a:prstDash val="solid"/>
+                      <a:round/>
+                      <a:headEnd type="none" w="med" len="med"/>
+                      <a:tailEnd type="none" w="med" len="med"/>
+                    </a:lnT>
+                    <a:lnB w="12700" cap="flat" cmpd="sng" algn="ctr">
+                      <a:solidFill>
+                        <a:srgbClr val="C9D3E3"/>
+                      </a:solidFill>
+                      <a:prstDash val="solid"/>
+                      <a:round/>
+                      <a:headEnd type="none" w="med" len="med"/>
+                      <a:tailEnd type="none" w="med" len="med"/>
+                    </a:lnB>
+                  </a:tcPr>
+                </a:tc>
+                <a:tc>
+                  <a:txBody>
+                    <a:bodyPr/>
+                    <a:lstStyle/>
+                    <a:p>
+                      <a:pPr marL="0" indent="0" latinLnBrk="0" algn="l">
+                        <a:lnSpc>
+                          <a:spcPct val="100000"/>
+                        </a:lnSpc>
+                        <a:buNone/>
+                        <a:defRPr/>
+                      </a:pPr>
+                      <a:r>
+                        <a:rPr kumimoji="1" lang="en-US" altLang="ko-KR" sz="1100" dirty="0">
+                          <a:solidFill>
+                            <a:srgbClr val="1F2937"/>
+                          </a:solidFill>
+                          <a:latin typeface="Calibri" panose="020F0502020204030204" pitchFamily="34" charset="0"/>
+                          <a:ea typeface="-윤고딕340" pitchFamily="18" charset="-127"/>
+                          <a:cs typeface="Calibri" panose="020F0502020204030204" pitchFamily="34" charset="0"/>
+                        </a:rPr>
+                        <a:t>204 atoms, common volume (edge ≈ 1.6 nm)</a:t>
+                      </a:r>
+                    </a:p>
+                  </a:txBody>
+                  <a:tcPr marL="54864" marR="54864" marT="27432" marB="27432" anchor="ctr">
+                    <a:lnL w="12700" cap="flat" cmpd="sng" algn="ctr">
+                      <a:solidFill>
+                        <a:srgbClr val="C9D3E3"/>
+                      </a:solidFill>
+                      <a:prstDash val="solid"/>
+                      <a:round/>
+                      <a:headEnd type="none" w="med" len="med"/>
+                      <a:tailEnd type="none" w="med" len="med"/>
+                    </a:lnL>
+                    <a:lnR w="12700" cap="flat" cmpd="sng" algn="ctr">
+                      <a:solidFill>
+                        <a:srgbClr val="C9D3E3"/>
+                      </a:solidFill>
+                      <a:prstDash val="solid"/>
+                      <a:round/>
+                      <a:headEnd type="none" w="med" len="med"/>
+                      <a:tailEnd type="none" w="med" len="med"/>
+                    </a:lnR>
+                    <a:lnT w="12700" cap="flat" cmpd="sng" algn="ctr">
+                      <a:solidFill>
+                        <a:srgbClr val="C9D3E3"/>
+                      </a:solidFill>
+                      <a:prstDash val="solid"/>
+                      <a:round/>
+                      <a:headEnd type="none" w="med" len="med"/>
+                      <a:tailEnd type="none" w="med" len="med"/>
+                    </a:lnT>
+                    <a:lnB w="12700" cap="flat" cmpd="sng" algn="ctr">
+                      <a:solidFill>
+                        <a:srgbClr val="C9D3E3"/>
+                      </a:solidFill>
+                      <a:prstDash val="solid"/>
+                      <a:round/>
+                      <a:headEnd type="none" w="med" len="med"/>
+                      <a:tailEnd type="none" w="med" len="med"/>
+                    </a:lnB>
+                  </a:tcPr>
+                </a:tc>
+              </a:tr>
+              <a:tr h="548640">
+                <a:tc>
+                  <a:txBody>
+                    <a:bodyPr/>
+                    <a:lstStyle/>
+                    <a:p>
+                      <a:pPr marL="0" indent="0" latinLnBrk="0" algn="l">
+                        <a:lnSpc>
+                          <a:spcPct val="100000"/>
+                        </a:lnSpc>
+                        <a:buNone/>
+                        <a:defRPr/>
+                      </a:pPr>
+                      <a:r>
+                        <a:rPr kumimoji="1" lang="en-US" altLang="ko-KR" sz="1100" dirty="0">
+                          <a:solidFill>
+                            <a:srgbClr val="1F2937"/>
+                          </a:solidFill>
+                          <a:latin typeface="Calibri" panose="020F0502020204030204" pitchFamily="34" charset="0"/>
+                          <a:ea typeface="-윤고딕340" pitchFamily="18" charset="-127"/>
+                          <a:cs typeface="Calibri" panose="020F0502020204030204" pitchFamily="34" charset="0"/>
+                        </a:rPr>
+                        <a:t>Sampling</a:t>
+                      </a:r>
+                    </a:p>
+                  </a:txBody>
+                  <a:tcPr marL="54864" marR="54864" marT="27432" marB="27432" anchor="ctr">
+                    <a:lnL w="12700" cap="flat" cmpd="sng" algn="ctr">
+                      <a:solidFill>
+                        <a:srgbClr val="C9D3E3"/>
+                      </a:solidFill>
+                      <a:prstDash val="solid"/>
+                      <a:round/>
+                      <a:headEnd type="none" w="med" len="med"/>
+                      <a:tailEnd type="none" w="med" len="med"/>
+                    </a:lnL>
+                    <a:lnR w="12700" cap="flat" cmpd="sng" algn="ctr">
+                      <a:solidFill>
+                        <a:srgbClr val="C9D3E3"/>
+                      </a:solidFill>
+                      <a:prstDash val="solid"/>
+                      <a:round/>
+                      <a:headEnd type="none" w="med" len="med"/>
+                      <a:tailEnd type="none" w="med" len="med"/>
+                    </a:lnR>
+                    <a:lnT w="12700" cap="flat" cmpd="sng" algn="ctr">
+                      <a:solidFill>
+                        <a:srgbClr val="C9D3E3"/>
+                      </a:solidFill>
+                      <a:prstDash val="solid"/>
+                      <a:round/>
+                      <a:headEnd type="none" w="med" len="med"/>
+                      <a:tailEnd type="none" w="med" len="med"/>
+                    </a:lnT>
+                    <a:lnB w="12700" cap="flat" cmpd="sng" algn="ctr">
+                      <a:solidFill>
+                        <a:srgbClr val="C9D3E3"/>
+                      </a:solidFill>
+                      <a:prstDash val="solid"/>
+                      <a:round/>
+                      <a:headEnd type="none" w="med" len="med"/>
+                      <a:tailEnd type="none" w="med" len="med"/>
+                    </a:lnB>
+                  </a:tcPr>
+                </a:tc>
+                <a:tc>
+                  <a:txBody>
+                    <a:bodyPr/>
+                    <a:lstStyle/>
+                    <a:p>
+                      <a:pPr marL="0" indent="0" latinLnBrk="0" algn="l">
+                        <a:lnSpc>
+                          <a:spcPct val="100000"/>
+                        </a:lnSpc>
+                        <a:buNone/>
+                        <a:defRPr/>
+                      </a:pPr>
+                      <a:r>
+                        <a:rPr kumimoji="1" lang="en-US" altLang="ko-KR" sz="1100" dirty="0">
+                          <a:solidFill>
+                            <a:srgbClr val="1F2937"/>
+                          </a:solidFill>
+                          <a:latin typeface="Calibri" panose="020F0502020204030204" pitchFamily="34" charset="0"/>
+                          <a:ea typeface="-윤고딕340" pitchFamily="18" charset="-127"/>
+                          <a:cs typeface="Calibri" panose="020F0502020204030204" pitchFamily="34" charset="0"/>
+                        </a:rPr>
+                        <a:t>10 start configurations × 2 precursors × 2 seeds = 40 runs</a:t>
+                      </a:r>
+                    </a:p>
+                  </a:txBody>
+                  <a:tcPr marL="54864" marR="54864" marT="27432" marB="27432" anchor="ctr">
+                    <a:lnL w="12700" cap="flat" cmpd="sng" algn="ctr">
+                      <a:solidFill>
+                        <a:srgbClr val="C9D3E3"/>
+                      </a:solidFill>
+                      <a:prstDash val="solid"/>
+                      <a:round/>
+                      <a:headEnd type="none" w="med" len="med"/>
+                      <a:tailEnd type="none" w="med" len="med"/>
+                    </a:lnL>
+                    <a:lnR w="12700" cap="flat" cmpd="sng" algn="ctr">
+                      <a:solidFill>
+                        <a:srgbClr val="C9D3E3"/>
+                      </a:solidFill>
+                      <a:prstDash val="solid"/>
+                      <a:round/>
+                      <a:headEnd type="none" w="med" len="med"/>
+                      <a:tailEnd type="none" w="med" len="med"/>
+                    </a:lnR>
+                    <a:lnT w="12700" cap="flat" cmpd="sng" algn="ctr">
+                      <a:solidFill>
+                        <a:srgbClr val="C9D3E3"/>
+                      </a:solidFill>
+                      <a:prstDash val="solid"/>
+                      <a:round/>
+                      <a:headEnd type="none" w="med" len="med"/>
+                      <a:tailEnd type="none" w="med" len="med"/>
+                    </a:lnT>
+                    <a:lnB w="12700" cap="flat" cmpd="sng" algn="ctr">
+                      <a:solidFill>
+                        <a:srgbClr val="C9D3E3"/>
+                      </a:solidFill>
+                      <a:prstDash val="solid"/>
+                      <a:round/>
+                      <a:headEnd type="none" w="med" len="med"/>
+                      <a:tailEnd type="none" w="med" len="med"/>
+                    </a:lnB>
+                  </a:tcPr>
+                </a:tc>
+              </a:tr>
+              <a:tr h="731520">
+                <a:tc>
+                  <a:txBody>
+                    <a:bodyPr/>
+                    <a:lstStyle/>
+                    <a:p>
+                      <a:pPr marL="0" indent="0" latinLnBrk="0" algn="l">
+                        <a:lnSpc>
+                          <a:spcPct val="100000"/>
+                        </a:lnSpc>
+                        <a:buNone/>
+                        <a:defRPr/>
+                      </a:pPr>
+                      <a:r>
+                        <a:rPr kumimoji="1" lang="en-US" altLang="ko-KR" sz="1100" dirty="0">
+                          <a:solidFill>
+                            <a:srgbClr val="1F2937"/>
+                          </a:solidFill>
+                          <a:latin typeface="Calibri" panose="020F0502020204030204" pitchFamily="34" charset="0"/>
+                          <a:ea typeface="-윤고딕340" pitchFamily="18" charset="-127"/>
+                          <a:cs typeface="Calibri" panose="020F0502020204030204" pitchFamily="34" charset="0"/>
+                        </a:rPr>
+                        <a:t>Diffusive-regime checks</a:t>
+                      </a:r>
+                    </a:p>
+                  </a:txBody>
+                  <a:tcPr marL="54864" marR="54864" marT="27432" marB="27432" anchor="ctr">
+                    <a:lnL w="12700" cap="flat" cmpd="sng" algn="ctr">
+                      <a:solidFill>
+                        <a:srgbClr val="C9D3E3"/>
+                      </a:solidFill>
+                      <a:prstDash val="solid"/>
+                      <a:round/>
+                      <a:headEnd type="none" w="med" len="med"/>
+                      <a:tailEnd type="none" w="med" len="med"/>
+                    </a:lnL>
+                    <a:lnR w="12700" cap="flat" cmpd="sng" algn="ctr">
+                      <a:solidFill>
+                        <a:srgbClr val="C9D3E3"/>
+                      </a:solidFill>
+                      <a:prstDash val="solid"/>
+                      <a:round/>
+                      <a:headEnd type="none" w="med" len="med"/>
+                      <a:tailEnd type="none" w="med" len="med"/>
+                    </a:lnR>
+                    <a:lnT w="12700" cap="flat" cmpd="sng" algn="ctr">
+                      <a:solidFill>
+                        <a:srgbClr val="C9D3E3"/>
+                      </a:solidFill>
+                      <a:prstDash val="solid"/>
+                      <a:round/>
+                      <a:headEnd type="none" w="med" len="med"/>
+                      <a:tailEnd type="none" w="med" len="med"/>
+                    </a:lnT>
+                    <a:lnB w="12700" cap="flat" cmpd="sng" algn="ctr">
+                      <a:solidFill>
+                        <a:srgbClr val="C9D3E3"/>
+                      </a:solidFill>
+                      <a:prstDash val="solid"/>
+                      <a:round/>
+                      <a:headEnd type="none" w="med" len="med"/>
+                      <a:tailEnd type="none" w="med" len="med"/>
+                    </a:lnB>
+                  </a:tcPr>
+                </a:tc>
+                <a:tc>
+                  <a:txBody>
+                    <a:bodyPr/>
+                    <a:lstStyle/>
+                    <a:p>
+                      <a:pPr marL="0" indent="0" latinLnBrk="0" algn="l">
+                        <a:lnSpc>
+                          <a:spcPct val="100000"/>
+                        </a:lnSpc>
+                        <a:buNone/>
+                        <a:defRPr/>
+                      </a:pPr>
+                      <a:r>
+                        <a:rPr kumimoji="1" lang="en-US" altLang="ko-KR" sz="1100" dirty="0">
+                          <a:solidFill>
+                            <a:srgbClr val="1F2937"/>
+                          </a:solidFill>
+                          <a:latin typeface="Calibri" panose="020F0502020204030204" pitchFamily="34" charset="0"/>
+                          <a:ea typeface="-윤고딕340" pitchFamily="18" charset="-127"/>
+                          <a:cs typeface="Calibri" panose="020F0502020204030204" pitchFamily="34" charset="0"/>
+                        </a:rPr>
+                        <a:t>sub-window MSD slope ratio 0.8–1.2 · D spread ≤ 10 % · ≥ 50 Li hops · framework intact</a:t>
+                      </a:r>
+                    </a:p>
+                  </a:txBody>
+                  <a:tcPr marL="54864" marR="54864" marT="27432" marB="27432" anchor="ctr">
+                    <a:lnL w="12700" cap="flat" cmpd="sng" algn="ctr">
+                      <a:solidFill>
+                        <a:srgbClr val="C9D3E3"/>
+                      </a:solidFill>
+                      <a:prstDash val="solid"/>
+                      <a:round/>
+                      <a:headEnd type="none" w="med" len="med"/>
+                      <a:tailEnd type="none" w="med" len="med"/>
+                    </a:lnL>
+                    <a:lnR w="12700" cap="flat" cmpd="sng" algn="ctr">
+                      <a:solidFill>
+                        <a:srgbClr val="C9D3E3"/>
+                      </a:solidFill>
+                      <a:prstDash val="solid"/>
+                      <a:round/>
+                      <a:headEnd type="none" w="med" len="med"/>
+                      <a:tailEnd type="none" w="med" len="med"/>
+                    </a:lnR>
+                    <a:lnT w="12700" cap="flat" cmpd="sng" algn="ctr">
+                      <a:solidFill>
+                        <a:srgbClr val="C9D3E3"/>
+                      </a:solidFill>
+                      <a:prstDash val="solid"/>
+                      <a:round/>
+                      <a:headEnd type="none" w="med" len="med"/>
+                      <a:tailEnd type="none" w="med" len="med"/>
+                    </a:lnT>
+                    <a:lnB w="12700" cap="flat" cmpd="sng" algn="ctr">
+                      <a:solidFill>
+                        <a:srgbClr val="C9D3E3"/>
+                      </a:solidFill>
+                      <a:prstDash val="solid"/>
+                      <a:round/>
+                      <a:headEnd type="none" w="med" len="med"/>
+                      <a:tailEnd type="none" w="med" len="med"/>
+                    </a:lnB>
+                  </a:tcPr>
+                </a:tc>
+              </a:tr>
+            </a:tbl>
+          </a:graphicData>
+        </a:graphic>
+      </p:graphicFrame>
       <p:sp>
         <p:nvSpPr>
-          <p:cNvPr id="291" name="Caption right"/>
+          <p:cNvPr id="292" name="References"/>
           <p:cNvSpPr txBox="1"/>
           <p:nvPr/>
         </p:nvSpPr>
         <p:spPr>
           <a:xfrm>
-            <a:off x="4937760" y="4597642"/>
-            <a:ext cx="3703320" cy="502920"/>
-          </a:xfrm>
-          <a:prstGeom prst="rect">
-            <a:avLst/>
-          </a:prstGeom>
-          <a:noFill/>
-        </p:spPr>
-        <p:txBody>
-          <a:bodyPr wrap="square" lIns="45720" tIns="27432" rIns="45720" bIns="27432" rtlCol="0" anchor="t">
-            <a:noAutofit/>
-          </a:bodyPr>
-          <a:lstStyle/>
-          <a:p>
-            <a:pPr marL="0" indent="0" latinLnBrk="0" algn="ctr">
-              <a:lnSpc>
-                <a:spcPct val="100000"/>
-              </a:lnSpc>
-              <a:buNone/>
-              <a:defRPr/>
-            </a:pPr>
-            <a:r>
-              <a:rPr kumimoji="1" lang="en-US" altLang="ko-KR" sz="1050" dirty="0">
-                <a:solidFill>
-                  <a:srgbClr val="1F2937"/>
-                </a:solidFill>
-                <a:latin typeface="Calibri" panose="020F0502020204030204" pitchFamily="34" charset="0"/>
-                <a:ea typeface="-윤고딕340" pitchFamily="18" charset="-127"/>
-                <a:cs typeface="Calibri" panose="020F0502020204030204" pitchFamily="34" charset="0"/>
-              </a:rPr>
-              <a:t>&lt; Li diffusivity vs 1000/T in four LGPS-type compounds: the ordering changes between 700 and 1300 K &gt;</a:t>
-            </a:r>
-          </a:p>
-        </p:txBody>
-      </p:sp>
-      <p:sp>
-        <p:nvSpPr>
-          <p:cNvPr id="292" name="Credit right"/>
-          <p:cNvSpPr txBox="1"/>
-          <p:nvPr/>
-        </p:nvSpPr>
-        <p:spPr>
-          <a:xfrm>
-            <a:off x="4937760" y="5100562"/>
-            <a:ext cx="3703320" cy="256032"/>
-          </a:xfrm>
-          <a:prstGeom prst="rect">
-            <a:avLst/>
-          </a:prstGeom>
-          <a:noFill/>
-        </p:spPr>
-        <p:txBody>
-          <a:bodyPr wrap="square" lIns="45720" tIns="27432" rIns="45720" bIns="27432" rtlCol="0" anchor="t">
-            <a:noAutofit/>
-          </a:bodyPr>
-          <a:lstStyle/>
-          <a:p>
-            <a:pPr marL="0" indent="0" latinLnBrk="0" algn="ctr">
-              <a:lnSpc>
-                <a:spcPct val="100000"/>
-              </a:lnSpc>
-              <a:buNone/>
-              <a:defRPr/>
-            </a:pPr>
-            <a:r>
-              <a:rPr kumimoji="1" lang="en-US" altLang="ko-KR" sz="950" i="1" dirty="0">
-                <a:solidFill>
-                  <a:srgbClr val="6B7280"/>
-                </a:solidFill>
-                <a:latin typeface="Calibri" panose="020F0502020204030204" pitchFamily="34" charset="0"/>
-                <a:ea typeface="-윤고딕340" pitchFamily="18" charset="-127"/>
-                <a:cs typeface="Calibri" panose="020F0502020204030204" pitchFamily="34" charset="0"/>
-              </a:rPr>
-              <a:t>Reproduced from Jung et al., eTransportation 28, 100570 (2026), Fig. 5b</a:t>
-            </a:r>
-          </a:p>
-        </p:txBody>
-      </p:sp>
-      <p:sp>
-        <p:nvSpPr>
-          <p:cNvPr id="293" name="References"/>
-          <p:cNvSpPr txBox="1"/>
-          <p:nvPr/>
-        </p:nvSpPr>
-        <p:spPr>
-          <a:xfrm>
-            <a:off x="502920" y="5870448"/>
+            <a:off x="502920" y="5897880"/>
             <a:ext cx="8138160" cy="384048"/>
           </a:xfrm>
           <a:prstGeom prst="rect">
@@ -14442,7 +14467,7 @@
                 <a:ea typeface="-윤고딕340" pitchFamily="18" charset="-127"/>
                 <a:cs typeface="Calibri" panose="020F0502020204030204" pitchFamily="34" charset="0"/>
               </a:rPr>
-              <a:t>Phuthi et al., Chem. Mater. (2026), Perspective · Jung et al., eTransportation 28, 100570 (2026)</a:t>
+              <a:t>Kahle, Energy Environ. Sci. 13, 928 (2020) · He, npj Comput. Mater. 4, 18 (2018) · Wood et al. (UMA), arXiv:2506.23971 (2026)</a:t>
             </a:r>
           </a:p>
         </p:txBody>
@@ -14519,14 +14544,14 @@
                 <a:ea typeface="굴림" pitchFamily="50" charset="-127"/>
                 <a:cs typeface="Arial" panose="020B0604020202020204" pitchFamily="34" charset="0"/>
               </a:rPr>
-              <a:t>Plan</a:t>
+              <a:t>Progress</a:t>
             </a:r>
           </a:p>
         </p:txBody>
       </p:sp>
       <p:sp>
         <p:nvSpPr>
-          <p:cNvPr id="294" name="Rectangle 4"/>
+          <p:cNvPr id="293" name="Rectangle 4"/>
           <p:cNvSpPr txBox="1"/>
           <p:nvPr/>
         </p:nvSpPr>
@@ -14570,476 +14595,21 @@
                 <a:ea typeface="-윤고딕340" pitchFamily="18" charset="-127"/>
                 <a:cs typeface="Calibri" panose="020F0502020204030204" pitchFamily="34" charset="0"/>
               </a:rPr>
-              <a:t>Next steps and purpose</a:t>
+              <a:t>Stage 2 pilot — temperature choice, status and limits</a:t>
             </a:r>
           </a:p>
         </p:txBody>
       </p:sp>
       <p:sp>
         <p:nvSpPr>
-          <p:cNvPr id="295" name="Label Now → late Oct"/>
-          <p:cNvSpPr/>
-          <p:nvPr/>
-        </p:nvSpPr>
-        <p:spPr>
-          <a:xfrm>
-            <a:off x="502920" y="1417320"/>
-            <a:ext cx="1600200" cy="868680"/>
-          </a:xfrm>
-          <a:prstGeom prst="roundRect">
-            <a:avLst>
-              <a:gd name="adj" fmla="val 6000"/>
-            </a:avLst>
-          </a:prstGeom>
-          <a:solidFill>
-            <a:srgbClr val="0070C0"/>
-          </a:solidFill>
-          <a:ln>
-            <a:noFill/>
-          </a:ln>
-        </p:spPr>
-        <p:txBody>
-          <a:bodyPr wrap="square" lIns="91440" tIns="64008" rIns="91440" bIns="64008" rtlCol="0" anchor="ctr">
-            <a:noAutofit/>
-          </a:bodyPr>
-          <a:lstStyle/>
-          <a:p>
-            <a:pPr marL="0" indent="0" latinLnBrk="0" algn="ctr">
-              <a:lnSpc>
-                <a:spcPct val="100000"/>
-              </a:lnSpc>
-              <a:buNone/>
-              <a:defRPr/>
-            </a:pPr>
-            <a:r>
-              <a:rPr kumimoji="1" lang="en-US" altLang="ko-KR" sz="1250" b="1" dirty="0">
-                <a:solidFill>
-                  <a:srgbClr val="FFFFFF"/>
-                </a:solidFill>
-                <a:latin typeface="Calibri" panose="020F0502020204030204" pitchFamily="34" charset="0"/>
-                <a:ea typeface="-윤고딕340" pitchFamily="18" charset="-127"/>
-                <a:cs typeface="Calibri" panose="020F0502020204030204" pitchFamily="34" charset="0"/>
-              </a:rPr>
-              <a:t>Now → late Oct</a:t>
-            </a:r>
-          </a:p>
-        </p:txBody>
-      </p:sp>
-      <p:sp>
-        <p:nvSpPr>
-          <p:cNvPr id="296" name="Content Now → late Oct"/>
-          <p:cNvSpPr/>
-          <p:nvPr/>
-        </p:nvSpPr>
-        <p:spPr>
-          <a:xfrm>
-            <a:off x="2194560" y="1417320"/>
-            <a:ext cx="6446520" cy="868680"/>
-          </a:xfrm>
-          <a:prstGeom prst="roundRect">
-            <a:avLst>
-              <a:gd name="adj" fmla="val 6000"/>
-            </a:avLst>
-          </a:prstGeom>
-          <a:solidFill>
-            <a:srgbClr val="F5F7FA"/>
-          </a:solidFill>
-          <a:ln>
-            <a:noFill/>
-          </a:ln>
-        </p:spPr>
-        <p:txBody>
-          <a:bodyPr wrap="square" lIns="137160" tIns="54864" rIns="137160" bIns="54864" rtlCol="0" anchor="ctr">
-            <a:noAutofit/>
-          </a:bodyPr>
-          <a:lstStyle/>
-          <a:p>
-            <a:pPr marL="0" indent="0" latinLnBrk="0">
-              <a:lnSpc>
-                <a:spcPct val="110000"/>
-              </a:lnSpc>
-              <a:buNone/>
-              <a:defRPr/>
-            </a:pPr>
-            <a:r>
-              <a:rPr kumimoji="1" lang="en-US" altLang="ko-KR" sz="1250" dirty="0">
-                <a:solidFill>
-                  <a:srgbClr val="1F2937"/>
-                </a:solidFill>
-                <a:latin typeface="Calibri" panose="020F0502020204030204" pitchFamily="34" charset="0"/>
-                <a:ea typeface="-윤고딕340" pitchFamily="18" charset="-127"/>
-                <a:cs typeface="Calibri" panose="020F0502020204030204" pitchFamily="34" charset="0"/>
-              </a:rPr>
-              <a:t>Finish the 40 MD runs and analyse once with the predefined criteria. The follow-up for each outcome (difference · equivalent · inconclusive · criteria not met) is written down before the analysis.</a:t>
-            </a:r>
-          </a:p>
-        </p:txBody>
-      </p:sp>
-      <p:sp>
-        <p:nvSpPr>
-          <p:cNvPr id="297" name="Label Next 1–2 months"/>
-          <p:cNvSpPr/>
-          <p:nvPr/>
-        </p:nvSpPr>
-        <p:spPr>
-          <a:xfrm>
-            <a:off x="502920" y="2395728"/>
-            <a:ext cx="1600200" cy="1097280"/>
-          </a:xfrm>
-          <a:prstGeom prst="roundRect">
-            <a:avLst>
-              <a:gd name="adj" fmla="val 6000"/>
-            </a:avLst>
-          </a:prstGeom>
-          <a:solidFill>
-            <a:srgbClr val="1F497D"/>
-          </a:solidFill>
-          <a:ln>
-            <a:noFill/>
-          </a:ln>
-        </p:spPr>
-        <p:txBody>
-          <a:bodyPr wrap="square" lIns="91440" tIns="64008" rIns="91440" bIns="64008" rtlCol="0" anchor="ctr">
-            <a:noAutofit/>
-          </a:bodyPr>
-          <a:lstStyle/>
-          <a:p>
-            <a:pPr marL="0" indent="0" latinLnBrk="0" algn="ctr">
-              <a:lnSpc>
-                <a:spcPct val="100000"/>
-              </a:lnSpc>
-              <a:buNone/>
-              <a:defRPr/>
-            </a:pPr>
-            <a:r>
-              <a:rPr kumimoji="1" lang="en-US" altLang="ko-KR" sz="1250" b="1" dirty="0">
-                <a:solidFill>
-                  <a:srgbClr val="FFFFFF"/>
-                </a:solidFill>
-                <a:latin typeface="Calibri" panose="020F0502020204030204" pitchFamily="34" charset="0"/>
-                <a:ea typeface="-윤고딕340" pitchFamily="18" charset="-127"/>
-                <a:cs typeface="Calibri" panose="020F0502020204030204" pitchFamily="34" charset="0"/>
-              </a:rPr>
-              <a:t>Next 1–2 months</a:t>
-            </a:r>
-          </a:p>
-        </p:txBody>
-      </p:sp>
-      <p:sp>
-        <p:nvSpPr>
-          <p:cNvPr id="298" name="Content Next 1–2 months"/>
-          <p:cNvSpPr/>
-          <p:nvPr/>
-        </p:nvSpPr>
-        <p:spPr>
-          <a:xfrm>
-            <a:off x="2194560" y="2395728"/>
-            <a:ext cx="6446520" cy="1097280"/>
-          </a:xfrm>
-          <a:prstGeom prst="roundRect">
-            <a:avLst>
-              <a:gd name="adj" fmla="val 6000"/>
-            </a:avLst>
-          </a:prstGeom>
-          <a:solidFill>
-            <a:srgbClr val="F5F7FA"/>
-          </a:solidFill>
-          <a:ln>
-            <a:noFill/>
-          </a:ln>
-        </p:spPr>
-        <p:txBody>
-          <a:bodyPr wrap="square" lIns="137160" tIns="54864" rIns="137160" bIns="54864" rtlCol="0" anchor="ctr">
-            <a:noAutofit/>
-          </a:bodyPr>
-          <a:lstStyle/>
-          <a:p>
-            <a:pPr marL="182880" indent="-182880" latinLnBrk="0">
-              <a:lnSpc>
-                <a:spcPct val="110000"/>
-              </a:lnSpc>
-              <a:buClr>
-                <a:srgbClr val="1F2937"/>
-              </a:buClr>
-              <a:buSzPct val="80000"/>
-              <a:buFont typeface="Arial" panose="020B0604020202020204" pitchFamily="34" charset="0"/>
-              <a:buChar char="•"/>
-              <a:defRPr/>
-            </a:pPr>
-            <a:r>
-              <a:rPr kumimoji="1" lang="en-US" altLang="ko-KR" sz="1250" dirty="0">
-                <a:solidFill>
-                  <a:srgbClr val="1F2937"/>
-                </a:solidFill>
-                <a:latin typeface="Calibri" panose="020F0502020204030204" pitchFamily="34" charset="0"/>
-                <a:ea typeface="-윤고딕340" pitchFamily="18" charset="-127"/>
-                <a:cs typeface="Calibri" panose="020F0502020204030204" pitchFamily="34" charset="0"/>
-              </a:rPr>
-              <a:t>Interfacial reaction products with ground-state reference phases</a:t>
-            </a:r>
-          </a:p>
-          <a:p>
-            <a:pPr marL="182880" indent="-182880" latinLnBrk="0">
-              <a:lnSpc>
-                <a:spcPct val="110000"/>
-              </a:lnSpc>
-              <a:buClr>
-                <a:srgbClr val="1F2937"/>
-              </a:buClr>
-              <a:buSzPct val="80000"/>
-              <a:buFont typeface="Arial" panose="020B0604020202020204" pitchFamily="34" charset="0"/>
-              <a:buChar char="•"/>
-              <a:defRPr/>
-            </a:pPr>
-            <a:r>
-              <a:rPr kumimoji="1" lang="en-US" altLang="ko-KR" sz="1250" dirty="0">
-                <a:solidFill>
-                  <a:srgbClr val="1F2937"/>
-                </a:solidFill>
-                <a:latin typeface="Calibri" panose="020F0502020204030204" pitchFamily="34" charset="0"/>
-                <a:ea typeface="-윤고딕340" pitchFamily="18" charset="-127"/>
-                <a:cs typeface="Calibri" panose="020F0502020204030204" pitchFamily="34" charset="0"/>
-              </a:rPr>
-              <a:t>Stability-window table with the corrected definition</a:t>
-            </a:r>
-          </a:p>
-          <a:p>
-            <a:pPr marL="182880" indent="-182880" latinLnBrk="0">
-              <a:lnSpc>
-                <a:spcPct val="110000"/>
-              </a:lnSpc>
-              <a:buClr>
-                <a:srgbClr val="1F2937"/>
-              </a:buClr>
-              <a:buSzPct val="80000"/>
-              <a:buFont typeface="Arial" panose="020B0604020202020204" pitchFamily="34" charset="0"/>
-              <a:buChar char="•"/>
-              <a:defRPr/>
-            </a:pPr>
-            <a:r>
-              <a:rPr kumimoji="1" lang="en-US" altLang="ko-KR" sz="1250" dirty="0">
-                <a:solidFill>
-                  <a:srgbClr val="1F2937"/>
-                </a:solidFill>
-                <a:latin typeface="Calibri" panose="020F0502020204030204" pitchFamily="34" charset="0"/>
-                <a:ea typeface="-윤고딕340" pitchFamily="18" charset="-127"/>
-                <a:cs typeface="Calibri" panose="020F0502020204030204" pitchFamily="34" charset="0"/>
-              </a:rPr>
-              <a:t>DFT elastic constants of the reference compositions</a:t>
-            </a:r>
-          </a:p>
-        </p:txBody>
-      </p:sp>
-      <p:sp>
-        <p:nvSpPr>
-          <p:cNvPr id="299" name="Label Then"/>
-          <p:cNvSpPr/>
-          <p:nvPr/>
-        </p:nvSpPr>
-        <p:spPr>
-          <a:xfrm>
-            <a:off x="502920" y="3602736"/>
-            <a:ext cx="1600200" cy="868680"/>
-          </a:xfrm>
-          <a:prstGeom prst="roundRect">
-            <a:avLst>
-              <a:gd name="adj" fmla="val 6000"/>
-            </a:avLst>
-          </a:prstGeom>
-          <a:solidFill>
-            <a:srgbClr val="A50021"/>
-          </a:solidFill>
-          <a:ln>
-            <a:noFill/>
-          </a:ln>
-        </p:spPr>
-        <p:txBody>
-          <a:bodyPr wrap="square" lIns="91440" tIns="64008" rIns="91440" bIns="64008" rtlCol="0" anchor="ctr">
-            <a:noAutofit/>
-          </a:bodyPr>
-          <a:lstStyle/>
-          <a:p>
-            <a:pPr marL="0" indent="0" latinLnBrk="0" algn="ctr">
-              <a:lnSpc>
-                <a:spcPct val="100000"/>
-              </a:lnSpc>
-              <a:buNone/>
-              <a:defRPr/>
-            </a:pPr>
-            <a:r>
-              <a:rPr kumimoji="1" lang="en-US" altLang="ko-KR" sz="1250" b="1" dirty="0">
-                <a:solidFill>
-                  <a:srgbClr val="FFFFFF"/>
-                </a:solidFill>
-                <a:latin typeface="Calibri" panose="020F0502020204030204" pitchFamily="34" charset="0"/>
-                <a:ea typeface="-윤고딕340" pitchFamily="18" charset="-127"/>
-                <a:cs typeface="Calibri" panose="020F0502020204030204" pitchFamily="34" charset="0"/>
-              </a:rPr>
-              <a:t>Then</a:t>
-            </a:r>
-          </a:p>
-        </p:txBody>
-      </p:sp>
-      <p:sp>
-        <p:nvSpPr>
-          <p:cNvPr id="300" name="Content Then"/>
-          <p:cNvSpPr/>
-          <p:nvPr/>
-        </p:nvSpPr>
-        <p:spPr>
-          <a:xfrm>
-            <a:off x="2194560" y="3602736"/>
-            <a:ext cx="6446520" cy="868680"/>
-          </a:xfrm>
-          <a:prstGeom prst="roundRect">
-            <a:avLst>
-              <a:gd name="adj" fmla="val 6000"/>
-            </a:avLst>
-          </a:prstGeom>
-          <a:solidFill>
-            <a:srgbClr val="F5F7FA"/>
-          </a:solidFill>
-          <a:ln>
-            <a:noFill/>
-          </a:ln>
-        </p:spPr>
-        <p:txBody>
-          <a:bodyPr wrap="square" lIns="137160" tIns="54864" rIns="137160" bIns="54864" rtlCol="0" anchor="ctr">
-            <a:noAutofit/>
-          </a:bodyPr>
-          <a:lstStyle/>
-          <a:p>
-            <a:pPr marL="0" indent="0" latinLnBrk="0">
-              <a:lnSpc>
-                <a:spcPct val="110000"/>
-              </a:lnSpc>
-              <a:buNone/>
-              <a:defRPr/>
-            </a:pPr>
-            <a:r>
-              <a:rPr kumimoji="1" lang="en-US" altLang="ko-KR" sz="1250" dirty="0">
-                <a:solidFill>
-                  <a:srgbClr val="1F2937"/>
-                </a:solidFill>
-                <a:latin typeface="Calibri" panose="020F0502020204030204" pitchFamily="34" charset="0"/>
-                <a:ea typeface="-윤고딕340" pitchFamily="18" charset="-127"/>
-                <a:cs typeface="Calibri" panose="020F0502020204030204" pitchFamily="34" charset="0"/>
-              </a:rPr>
-              <a:t>Selection rule fixed before combining descriptors → shortlist → DFT validation → synthesis and testing with the experimental team.</a:t>
-            </a:r>
-          </a:p>
-        </p:txBody>
-      </p:sp>
-      <p:sp>
-        <p:nvSpPr>
-          <p:cNvPr id="301" name="Label Method upgrades"/>
-          <p:cNvSpPr/>
-          <p:nvPr/>
-        </p:nvSpPr>
-        <p:spPr>
-          <a:xfrm>
-            <a:off x="502920" y="4581144"/>
-            <a:ext cx="1600200" cy="868680"/>
-          </a:xfrm>
-          <a:prstGeom prst="roundRect">
-            <a:avLst>
-              <a:gd name="adj" fmla="val 6000"/>
-            </a:avLst>
-          </a:prstGeom>
-          <a:solidFill>
-            <a:srgbClr val="6B7280"/>
-          </a:solidFill>
-          <a:ln>
-            <a:noFill/>
-          </a:ln>
-        </p:spPr>
-        <p:txBody>
-          <a:bodyPr wrap="square" lIns="91440" tIns="64008" rIns="91440" bIns="64008" rtlCol="0" anchor="ctr">
-            <a:noAutofit/>
-          </a:bodyPr>
-          <a:lstStyle/>
-          <a:p>
-            <a:pPr marL="0" indent="0" latinLnBrk="0" algn="ctr">
-              <a:lnSpc>
-                <a:spcPct val="100000"/>
-              </a:lnSpc>
-              <a:buNone/>
-              <a:defRPr/>
-            </a:pPr>
-            <a:r>
-              <a:rPr kumimoji="1" lang="en-US" altLang="ko-KR" sz="1250" b="1" dirty="0">
-                <a:solidFill>
-                  <a:srgbClr val="FFFFFF"/>
-                </a:solidFill>
-                <a:latin typeface="Calibri" panose="020F0502020204030204" pitchFamily="34" charset="0"/>
-                <a:ea typeface="-윤고딕340" pitchFamily="18" charset="-127"/>
-                <a:cs typeface="Calibri" panose="020F0502020204030204" pitchFamily="34" charset="0"/>
-              </a:rPr>
-              <a:t>Method upgrades</a:t>
-            </a:r>
-          </a:p>
-        </p:txBody>
-      </p:sp>
-      <p:sp>
-        <p:nvSpPr>
-          <p:cNvPr id="302" name="Content Method upgrades"/>
-          <p:cNvSpPr/>
-          <p:nvPr/>
-        </p:nvSpPr>
-        <p:spPr>
-          <a:xfrm>
-            <a:off x="2194560" y="4581144"/>
-            <a:ext cx="6446520" cy="868680"/>
-          </a:xfrm>
-          <a:prstGeom prst="roundRect">
-            <a:avLst>
-              <a:gd name="adj" fmla="val 6000"/>
-            </a:avLst>
-          </a:prstGeom>
-          <a:solidFill>
-            <a:srgbClr val="F5F7FA"/>
-          </a:solidFill>
-          <a:ln>
-            <a:noFill/>
-          </a:ln>
-        </p:spPr>
-        <p:txBody>
-          <a:bodyPr wrap="square" lIns="137160" tIns="54864" rIns="137160" bIns="54864" rtlCol="0" anchor="ctr">
-            <a:noAutofit/>
-          </a:bodyPr>
-          <a:lstStyle/>
-          <a:p>
-            <a:pPr marL="0" indent="0" latinLnBrk="0">
-              <a:lnSpc>
-                <a:spcPct val="110000"/>
-              </a:lnSpc>
-              <a:buNone/>
-              <a:defRPr/>
-            </a:pPr>
-            <a:r>
-              <a:rPr kumimoji="1" lang="en-US" altLang="ko-KR" sz="1250" dirty="0">
-                <a:solidFill>
-                  <a:srgbClr val="1F2937"/>
-                </a:solidFill>
-                <a:latin typeface="Calibri" panose="020F0502020204030204" pitchFamily="34" charset="0"/>
-                <a:ea typeface="-윤고딕340" pitchFamily="18" charset="-127"/>
-                <a:cs typeface="Calibri" panose="020F0502020204030204" pitchFamily="34" charset="0"/>
-              </a:rPr>
-              <a:t>Larger cells (≥ 2 nm) and longer runs (≥ 0.3 ns) · fine-tuned MLIP · ensemble uncertainty · dopant concentration from charge-neutral defect thermodynamics</a:t>
-            </a:r>
-          </a:p>
-        </p:txBody>
-      </p:sp>
-      <p:sp>
-        <p:nvSpPr>
-          <p:cNvPr id="303" name="Goal"/>
+          <p:cNvPr id="294" name="Status bullets"/>
           <p:cNvSpPr txBox="1"/>
           <p:nvPr/>
         </p:nvSpPr>
         <p:spPr>
           <a:xfrm>
-            <a:off x="502920" y="5559552"/>
-            <a:ext cx="8138160" cy="329184"/>
+            <a:off x="502920" y="1371600"/>
+            <a:ext cx="4343400" cy="2834640"/>
           </a:xfrm>
           <a:prstGeom prst="rect">
             <a:avLst/>
@@ -15052,59 +14622,164 @@
           </a:bodyPr>
           <a:lstStyle/>
           <a:p>
-            <a:pPr marL="0" indent="0" latinLnBrk="0">
+            <a:pPr marL="182880" indent="-182880" latinLnBrk="0">
               <a:lnSpc>
-                <a:spcPct val="100000"/>
+                <a:spcPct val="108000"/>
               </a:lnSpc>
-              <a:buNone/>
+              <a:spcAft>
+                <a:spcPts val="500"/>
+              </a:spcAft>
+              <a:buClr>
+                <a:srgbClr val="1F2937"/>
+              </a:buClr>
+              <a:buSzPct val="80000"/>
+              <a:buFont typeface="Arial" panose="020B0604020202020204" pitchFamily="34" charset="0"/>
+              <a:buChar char="•"/>
               <a:defRPr/>
             </a:pPr>
             <a:r>
-              <a:rPr kumimoji="1" lang="en-US" altLang="ko-KR" sz="1250" dirty="0">
-                <a:solidFill>
-                  <a:srgbClr val="0070C0"/>
+              <a:rPr kumimoji="1" lang="en-US" altLang="ko-KR" sz="1200" b="1" dirty="0">
+                <a:solidFill>
+                  <a:srgbClr val="1F2937"/>
                 </a:solidFill>
                 <a:latin typeface="Calibri" panose="020F0502020204030204" pitchFamily="34" charset="0"/>
                 <a:ea typeface="-윤고딕340" pitchFamily="18" charset="-127"/>
                 <a:cs typeface="Calibri" panose="020F0502020204030204" pitchFamily="34" charset="0"/>
               </a:rPr>
-              <a:t>Goal: a screen that </a:t>
-            </a:r>
-            <a:r>
-              <a:rPr kumimoji="1" lang="en-US" altLang="ko-KR" sz="1250" b="1" dirty="0">
-                <a:solidFill>
-                  <a:srgbClr val="0070C0"/>
+              <a:t>600 K pilot</a:t>
+            </a:r>
+            <a:r>
+              <a:rPr kumimoji="1" lang="en-US" altLang="ko-KR" sz="1200" dirty="0">
+                <a:solidFill>
+                  <a:srgbClr val="1F2937"/>
                 </a:solidFill>
                 <a:latin typeface="Calibri" panose="020F0502020204030204" pitchFamily="34" charset="0"/>
                 <a:ea typeface="-윤고딕340" pitchFamily="18" charset="-127"/>
                 <a:cs typeface="Calibri" panose="020F0502020204030204" pitchFamily="34" charset="0"/>
               </a:rPr>
-              <a:t>selects</a:t>
-            </a:r>
-            <a:r>
-              <a:rPr kumimoji="1" lang="en-US" altLang="ko-KR" sz="1250" dirty="0">
-                <a:solidFill>
-                  <a:srgbClr val="0070C0"/>
+              <a:t> (40 runs, 200 ps): Li hopped (~4,000 hops per run) but the MSD never became linear over 2–100 ps → no diffusivity reported (UMA, this cell and volume).</a:t>
+            </a:r>
+          </a:p>
+          <a:p>
+            <a:pPr marL="182880" indent="-182880" latinLnBrk="0">
+              <a:lnSpc>
+                <a:spcPct val="108000"/>
+              </a:lnSpc>
+              <a:spcAft>
+                <a:spcPts val="500"/>
+              </a:spcAft>
+              <a:buClr>
+                <a:srgbClr val="1F2937"/>
+              </a:buClr>
+              <a:buSzPct val="80000"/>
+              <a:buFont typeface="Arial" panose="020B0604020202020204" pitchFamily="34" charset="0"/>
+              <a:buChar char="•"/>
+              <a:defRPr/>
+            </a:pPr>
+            <a:r>
+              <a:rPr kumimoji="1" lang="en-US" altLang="ko-KR" sz="1200" b="1" dirty="0">
+                <a:solidFill>
+                  <a:srgbClr val="1F2937"/>
                 </a:solidFill>
                 <a:latin typeface="Calibri" panose="020F0502020204030204" pitchFamily="34" charset="0"/>
                 <a:ea typeface="-윤고딕340" pitchFamily="18" charset="-127"/>
                 <a:cs typeface="Calibri" panose="020F0502020204030204" pitchFamily="34" charset="0"/>
               </a:rPr>
-              <a:t> the precursor, with the selection rule stated in advance.</a:t>
+              <a:t>Temperature</a:t>
+            </a:r>
+            <a:r>
+              <a:rPr kumimoji="1" lang="en-US" altLang="ko-KR" sz="1200" dirty="0">
+                <a:solidFill>
+                  <a:srgbClr val="1F2937"/>
+                </a:solidFill>
+                <a:latin typeface="Calibri" panose="020F0502020204030204" pitchFamily="34" charset="0"/>
+                <a:ea typeface="-윤고딕340" pitchFamily="18" charset="-127"/>
+                <a:cs typeface="Calibri" panose="020F0502020204030204" pitchFamily="34" charset="0"/>
+              </a:rPr>
+              <a:t> then chosen by a predefined pilot: 800 K failed and 1000 K passed the diffusive-regime checks.</a:t>
+            </a:r>
+          </a:p>
+          <a:p>
+            <a:pPr marL="182880" indent="-182880" latinLnBrk="0">
+              <a:lnSpc>
+                <a:spcPct val="108000"/>
+              </a:lnSpc>
+              <a:buClr>
+                <a:srgbClr val="1F2937"/>
+              </a:buClr>
+              <a:buSzPct val="80000"/>
+              <a:buFont typeface="Arial" panose="020B0604020202020204" pitchFamily="34" charset="0"/>
+              <a:buChar char="•"/>
+              <a:defRPr/>
+            </a:pPr>
+            <a:r>
+              <a:rPr kumimoji="1" lang="en-US" altLang="ko-KR" sz="1200" b="1" dirty="0">
+                <a:solidFill>
+                  <a:srgbClr val="1F2937"/>
+                </a:solidFill>
+                <a:latin typeface="Calibri" panose="020F0502020204030204" pitchFamily="34" charset="0"/>
+                <a:ea typeface="-윤고딕340" pitchFamily="18" charset="-127"/>
+                <a:cs typeface="Calibri" panose="020F0502020204030204" pitchFamily="34" charset="0"/>
+              </a:rPr>
+              <a:t>Limits</a:t>
+            </a:r>
+            <a:r>
+              <a:rPr kumimoji="1" lang="en-US" altLang="ko-KR" sz="1200" dirty="0">
+                <a:solidFill>
+                  <a:srgbClr val="1F2937"/>
+                </a:solidFill>
+                <a:latin typeface="Calibri" panose="020F0502020204030204" pitchFamily="34" charset="0"/>
+                <a:ea typeface="-윤고딕340" pitchFamily="18" charset="-127"/>
+                <a:cs typeface="Calibri" panose="020F0502020204030204" pitchFamily="34" charset="0"/>
+              </a:rPr>
+              <a:t>: the ~1.6-nm cell is below the ~2-nm bulk minimum suggested for MLIP transport, and rankings at high T need not hold at room temperature → relative, condition-specific result.</a:t>
             </a:r>
           </a:p>
         </p:txBody>
       </p:sp>
       <p:sp>
         <p:nvSpPr>
-          <p:cNvPr id="304" name="References"/>
+          <p:cNvPr id="295" name="Status panel"/>
+          <p:cNvSpPr/>
+          <p:nvPr/>
+        </p:nvSpPr>
+        <p:spPr>
+          <a:xfrm>
+            <a:off x="502920" y="4297680"/>
+            <a:ext cx="4343400" cy="1463040"/>
+          </a:xfrm>
+          <a:prstGeom prst="roundRect">
+            <a:avLst>
+              <a:gd name="adj" fmla="val 4000"/>
+            </a:avLst>
+          </a:prstGeom>
+          <a:solidFill>
+            <a:srgbClr val="F5F7FA"/>
+          </a:solidFill>
+          <a:ln>
+            <a:noFill/>
+          </a:ln>
+        </p:spPr>
+        <p:txBody>
+          <a:bodyPr wrap="square" lIns="91440" tIns="64008" rIns="91440" bIns="64008" rtlCol="0" anchor="t">
+            <a:noAutofit/>
+          </a:bodyPr>
+          <a:lstStyle/>
+          <a:p>
+            <a:endParaRPr lang="en-US" dirty="0"/>
+          </a:p>
+        </p:txBody>
+      </p:sp>
+      <p:sp>
+        <p:nvSpPr>
+          <p:cNvPr id="296" name="Status title"/>
           <p:cNvSpPr txBox="1"/>
           <p:nvPr/>
         </p:nvSpPr>
         <p:spPr>
           <a:xfrm>
-            <a:off x="502920" y="5961888"/>
-            <a:ext cx="8138160" cy="329184"/>
+            <a:off x="640080" y="4352544"/>
+            <a:ext cx="4023360" cy="274320"/>
           </a:xfrm>
           <a:prstGeom prst="rect">
             <a:avLst/>
@@ -15125,7 +14800,456 @@
               <a:defRPr/>
             </a:pPr>
             <a:r>
-              <a:rPr kumimoji="1" lang="en-US" altLang="ko-KR" sz="900" i="1" dirty="0">
+              <a:rPr kumimoji="1" lang="en-US" altLang="ko-KR" sz="1200" b="1" dirty="0">
+                <a:solidFill>
+                  <a:srgbClr val="1F497D"/>
+                </a:solidFill>
+                <a:latin typeface="Calibri" panose="020F0502020204030204" pitchFamily="34" charset="0"/>
+                <a:ea typeface="-윤고딕340" pitchFamily="18" charset="-127"/>
+                <a:cs typeface="Calibri" panose="020F0502020204030204" pitchFamily="34" charset="0"/>
+              </a:rPr>
+              <a:t>Status (Oct 12)</a:t>
+            </a:r>
+          </a:p>
+        </p:txBody>
+      </p:sp>
+      <p:sp>
+        <p:nvSpPr>
+          <p:cNvPr id="297" name="Bar1 label"/>
+          <p:cNvSpPr txBox="1"/>
+          <p:nvPr/>
+        </p:nvSpPr>
+        <p:spPr>
+          <a:xfrm>
+            <a:off x="640080" y="4663440"/>
+            <a:ext cx="822960" cy="237744"/>
+          </a:xfrm>
+          <a:prstGeom prst="rect">
+            <a:avLst/>
+          </a:prstGeom>
+          <a:noFill/>
+        </p:spPr>
+        <p:txBody>
+          <a:bodyPr wrap="square" lIns="45720" tIns="27432" rIns="45720" bIns="27432" rtlCol="0" anchor="t">
+            <a:noAutofit/>
+          </a:bodyPr>
+          <a:lstStyle/>
+          <a:p>
+            <a:pPr marL="0" indent="0" latinLnBrk="0">
+              <a:lnSpc>
+                <a:spcPct val="100000"/>
+              </a:lnSpc>
+              <a:buNone/>
+              <a:defRPr/>
+            </a:pPr>
+            <a:r>
+              <a:rPr kumimoji="1" lang="en-US" altLang="ko-KR" sz="1050" dirty="0">
+                <a:solidFill>
+                  <a:srgbClr val="1F2937"/>
+                </a:solidFill>
+                <a:latin typeface="Calibri" panose="020F0502020204030204" pitchFamily="34" charset="0"/>
+                <a:ea typeface="-윤고딕340" pitchFamily="18" charset="-127"/>
+                <a:cs typeface="Calibri" panose="020F0502020204030204" pitchFamily="34" charset="0"/>
+              </a:rPr>
+              <a:t>Runs</a:t>
+            </a:r>
+          </a:p>
+        </p:txBody>
+      </p:sp>
+      <p:sp>
+        <p:nvSpPr>
+          <p:cNvPr id="298" name="Bar1 bg"/>
+          <p:cNvSpPr/>
+          <p:nvPr/>
+        </p:nvSpPr>
+        <p:spPr>
+          <a:xfrm>
+            <a:off x="1463040" y="4690872"/>
+            <a:ext cx="2377440" cy="182880"/>
+          </a:xfrm>
+          <a:prstGeom prst="rect">
+            <a:avLst/>
+          </a:prstGeom>
+          <a:solidFill>
+            <a:srgbClr val="E5E7EB"/>
+          </a:solidFill>
+          <a:ln>
+            <a:noFill/>
+          </a:ln>
+        </p:spPr>
+        <p:txBody>
+          <a:bodyPr wrap="square" lIns="91440" tIns="64008" rIns="91440" bIns="64008" rtlCol="0" anchor="t">
+            <a:noAutofit/>
+          </a:bodyPr>
+          <a:lstStyle/>
+          <a:p>
+            <a:endParaRPr lang="en-US" dirty="0"/>
+          </a:p>
+        </p:txBody>
+      </p:sp>
+      <p:sp>
+        <p:nvSpPr>
+          <p:cNvPr id="299" name="Bar1 fg"/>
+          <p:cNvSpPr/>
+          <p:nvPr/>
+        </p:nvSpPr>
+        <p:spPr>
+          <a:xfrm>
+            <a:off x="1463040" y="4690872"/>
+            <a:ext cx="713232" cy="182880"/>
+          </a:xfrm>
+          <a:prstGeom prst="rect">
+            <a:avLst/>
+          </a:prstGeom>
+          <a:solidFill>
+            <a:srgbClr val="0070C0"/>
+          </a:solidFill>
+          <a:ln>
+            <a:noFill/>
+          </a:ln>
+        </p:spPr>
+        <p:txBody>
+          <a:bodyPr wrap="square" lIns="91440" tIns="64008" rIns="91440" bIns="64008" rtlCol="0" anchor="t">
+            <a:noAutofit/>
+          </a:bodyPr>
+          <a:lstStyle/>
+          <a:p>
+            <a:endParaRPr lang="en-US" dirty="0"/>
+          </a:p>
+        </p:txBody>
+      </p:sp>
+      <p:sp>
+        <p:nvSpPr>
+          <p:cNvPr id="300" name="Bar1 value"/>
+          <p:cNvSpPr txBox="1"/>
+          <p:nvPr/>
+        </p:nvSpPr>
+        <p:spPr>
+          <a:xfrm>
+            <a:off x="3886200" y="4645152"/>
+            <a:ext cx="960120" cy="256032"/>
+          </a:xfrm>
+          <a:prstGeom prst="rect">
+            <a:avLst/>
+          </a:prstGeom>
+          <a:noFill/>
+        </p:spPr>
+        <p:txBody>
+          <a:bodyPr wrap="square" lIns="45720" tIns="27432" rIns="45720" bIns="27432" rtlCol="0" anchor="t">
+            <a:noAutofit/>
+          </a:bodyPr>
+          <a:lstStyle/>
+          <a:p>
+            <a:pPr marL="0" indent="0" latinLnBrk="0">
+              <a:lnSpc>
+                <a:spcPct val="100000"/>
+              </a:lnSpc>
+              <a:buNone/>
+              <a:defRPr/>
+            </a:pPr>
+            <a:r>
+              <a:rPr kumimoji="1" lang="en-US" altLang="ko-KR" sz="1050" b="1" dirty="0">
+                <a:solidFill>
+                  <a:srgbClr val="1F2937"/>
+                </a:solidFill>
+                <a:latin typeface="Calibri" panose="020F0502020204030204" pitchFamily="34" charset="0"/>
+                <a:ea typeface="-윤고딕340" pitchFamily="18" charset="-127"/>
+                <a:cs typeface="Calibri" panose="020F0502020204030204" pitchFamily="34" charset="0"/>
+              </a:rPr>
+              <a:t>12 / 40</a:t>
+            </a:r>
+          </a:p>
+        </p:txBody>
+      </p:sp>
+      <p:sp>
+        <p:nvSpPr>
+          <p:cNvPr id="301" name="Bar2 label"/>
+          <p:cNvSpPr txBox="1"/>
+          <p:nvPr/>
+        </p:nvSpPr>
+        <p:spPr>
+          <a:xfrm>
+            <a:off x="640080" y="4983480"/>
+            <a:ext cx="822960" cy="237744"/>
+          </a:xfrm>
+          <a:prstGeom prst="rect">
+            <a:avLst/>
+          </a:prstGeom>
+          <a:noFill/>
+        </p:spPr>
+        <p:txBody>
+          <a:bodyPr wrap="square" lIns="45720" tIns="27432" rIns="45720" bIns="27432" rtlCol="0" anchor="t">
+            <a:noAutofit/>
+          </a:bodyPr>
+          <a:lstStyle/>
+          <a:p>
+            <a:pPr marL="0" indent="0" latinLnBrk="0">
+              <a:lnSpc>
+                <a:spcPct val="100000"/>
+              </a:lnSpc>
+              <a:buNone/>
+              <a:defRPr/>
+            </a:pPr>
+            <a:r>
+              <a:rPr kumimoji="1" lang="en-US" altLang="ko-KR" sz="1050" dirty="0">
+                <a:solidFill>
+                  <a:srgbClr val="1F2937"/>
+                </a:solidFill>
+                <a:latin typeface="Calibri" panose="020F0502020204030204" pitchFamily="34" charset="0"/>
+                <a:ea typeface="-윤고딕340" pitchFamily="18" charset="-127"/>
+                <a:cs typeface="Calibri" panose="020F0502020204030204" pitchFamily="34" charset="0"/>
+              </a:rPr>
+              <a:t>GPU-hours</a:t>
+            </a:r>
+          </a:p>
+        </p:txBody>
+      </p:sp>
+      <p:sp>
+        <p:nvSpPr>
+          <p:cNvPr id="302" name="Bar2 bg"/>
+          <p:cNvSpPr/>
+          <p:nvPr/>
+        </p:nvSpPr>
+        <p:spPr>
+          <a:xfrm>
+            <a:off x="1463040" y="5010912"/>
+            <a:ext cx="2377440" cy="182880"/>
+          </a:xfrm>
+          <a:prstGeom prst="rect">
+            <a:avLst/>
+          </a:prstGeom>
+          <a:solidFill>
+            <a:srgbClr val="E5E7EB"/>
+          </a:solidFill>
+          <a:ln>
+            <a:noFill/>
+          </a:ln>
+        </p:spPr>
+        <p:txBody>
+          <a:bodyPr wrap="square" lIns="91440" tIns="64008" rIns="91440" bIns="64008" rtlCol="0" anchor="t">
+            <a:noAutofit/>
+          </a:bodyPr>
+          <a:lstStyle/>
+          <a:p>
+            <a:endParaRPr lang="en-US" dirty="0"/>
+          </a:p>
+        </p:txBody>
+      </p:sp>
+      <p:sp>
+        <p:nvSpPr>
+          <p:cNvPr id="303" name="Bar2 fg"/>
+          <p:cNvSpPr/>
+          <p:nvPr/>
+        </p:nvSpPr>
+        <p:spPr>
+          <a:xfrm>
+            <a:off x="1463040" y="5010912"/>
+            <a:ext cx="520935" cy="182880"/>
+          </a:xfrm>
+          <a:prstGeom prst="rect">
+            <a:avLst/>
+          </a:prstGeom>
+          <a:solidFill>
+            <a:srgbClr val="0070C0"/>
+          </a:solidFill>
+          <a:ln>
+            <a:noFill/>
+          </a:ln>
+        </p:spPr>
+        <p:txBody>
+          <a:bodyPr wrap="square" lIns="91440" tIns="64008" rIns="91440" bIns="64008" rtlCol="0" anchor="t">
+            <a:noAutofit/>
+          </a:bodyPr>
+          <a:lstStyle/>
+          <a:p>
+            <a:endParaRPr lang="en-US" dirty="0"/>
+          </a:p>
+        </p:txBody>
+      </p:sp>
+      <p:sp>
+        <p:nvSpPr>
+          <p:cNvPr id="304" name="Bar2 value"/>
+          <p:cNvSpPr txBox="1"/>
+          <p:nvPr/>
+        </p:nvSpPr>
+        <p:spPr>
+          <a:xfrm>
+            <a:off x="3886200" y="4965192"/>
+            <a:ext cx="960120" cy="256032"/>
+          </a:xfrm>
+          <a:prstGeom prst="rect">
+            <a:avLst/>
+          </a:prstGeom>
+          <a:noFill/>
+        </p:spPr>
+        <p:txBody>
+          <a:bodyPr wrap="square" lIns="45720" tIns="27432" rIns="45720" bIns="27432" rtlCol="0" anchor="t">
+            <a:noAutofit/>
+          </a:bodyPr>
+          <a:lstStyle/>
+          <a:p>
+            <a:pPr marL="0" indent="0" latinLnBrk="0">
+              <a:lnSpc>
+                <a:spcPct val="100000"/>
+              </a:lnSpc>
+              <a:buNone/>
+              <a:defRPr/>
+            </a:pPr>
+            <a:r>
+              <a:rPr kumimoji="1" lang="en-US" altLang="ko-KR" sz="1050" b="1" dirty="0">
+                <a:solidFill>
+                  <a:srgbClr val="1F2937"/>
+                </a:solidFill>
+                <a:latin typeface="Calibri" panose="020F0502020204030204" pitchFamily="34" charset="0"/>
+                <a:ea typeface="-윤고딕340" pitchFamily="18" charset="-127"/>
+                <a:cs typeface="Calibri" panose="020F0502020204030204" pitchFamily="34" charset="0"/>
+              </a:rPr>
+              <a:t>101 / 461</a:t>
+            </a:r>
+          </a:p>
+        </p:txBody>
+      </p:sp>
+      <p:sp>
+        <p:nvSpPr>
+          <p:cNvPr id="305" name="Status text"/>
+          <p:cNvSpPr txBox="1"/>
+          <p:nvPr/>
+        </p:nvSpPr>
+        <p:spPr>
+          <a:xfrm>
+            <a:off x="640080" y="5285232"/>
+            <a:ext cx="4114800" cy="457200"/>
+          </a:xfrm>
+          <a:prstGeom prst="rect">
+            <a:avLst/>
+          </a:prstGeom>
+          <a:noFill/>
+        </p:spPr>
+        <p:txBody>
+          <a:bodyPr wrap="square" lIns="45720" tIns="27432" rIns="45720" bIns="27432" rtlCol="0" anchor="t">
+            <a:noAutofit/>
+          </a:bodyPr>
+          <a:lstStyle/>
+          <a:p>
+            <a:pPr marL="0" indent="0" latinLnBrk="0">
+              <a:lnSpc>
+                <a:spcPct val="105000"/>
+              </a:lnSpc>
+              <a:buNone/>
+              <a:defRPr/>
+            </a:pPr>
+            <a:r>
+              <a:rPr kumimoji="1" lang="en-US" altLang="ko-KR" sz="1050" dirty="0">
+                <a:solidFill>
+                  <a:srgbClr val="1F2937"/>
+                </a:solidFill>
+                <a:latin typeface="Calibri" panose="020F0502020204030204" pitchFamily="34" charset="0"/>
+                <a:ea typeface="-윤고딕340" pitchFamily="18" charset="-127"/>
+                <a:cs typeface="Calibri" panose="020F0502020204030204" pitchFamily="34" charset="0"/>
+              </a:rPr>
+              <a:t>Completion expected around Oct 21; the ratio is analysed once, after all 40 runs.</a:t>
+            </a:r>
+          </a:p>
+        </p:txBody>
+      </p:sp>
+      <p:pic>
+        <p:nvPicPr>
+          <p:cNvPr id="306" name="Jung 2026 Fig 5b" descr="Li diffusivity vs 1000/T, Jung 2026 Fig. 5b"/>
+          <p:cNvPicPr>
+            <a:picLocks noChangeAspect="1"/>
+          </p:cNvPicPr>
+          <p:nvPr/>
+        </p:nvPicPr>
+        <p:blipFill>
+          <a:blip r:embed="rId2"/>
+          <a:stretch>
+            <a:fillRect/>
+          </a:stretch>
+        </p:blipFill>
+        <p:spPr>
+          <a:xfrm>
+            <a:off x="4983480" y="1371600"/>
+            <a:ext cx="3611880" cy="3207754"/>
+          </a:xfrm>
+          <a:prstGeom prst="rect">
+            <a:avLst/>
+          </a:prstGeom>
+        </p:spPr>
+      </p:pic>
+      <p:sp>
+        <p:nvSpPr>
+          <p:cNvPr id="307" name="Caption right"/>
+          <p:cNvSpPr txBox="1"/>
+          <p:nvPr/>
+        </p:nvSpPr>
+        <p:spPr>
+          <a:xfrm>
+            <a:off x="4937760" y="4597642"/>
+            <a:ext cx="3703320" cy="502920"/>
+          </a:xfrm>
+          <a:prstGeom prst="rect">
+            <a:avLst/>
+          </a:prstGeom>
+          <a:noFill/>
+        </p:spPr>
+        <p:txBody>
+          <a:bodyPr wrap="square" lIns="45720" tIns="27432" rIns="45720" bIns="27432" rtlCol="0" anchor="t">
+            <a:noAutofit/>
+          </a:bodyPr>
+          <a:lstStyle/>
+          <a:p>
+            <a:pPr marL="0" indent="0" latinLnBrk="0" algn="ctr">
+              <a:lnSpc>
+                <a:spcPct val="100000"/>
+              </a:lnSpc>
+              <a:buNone/>
+              <a:defRPr/>
+            </a:pPr>
+            <a:r>
+              <a:rPr kumimoji="1" lang="en-US" altLang="ko-KR" sz="1050" dirty="0">
+                <a:solidFill>
+                  <a:srgbClr val="1F2937"/>
+                </a:solidFill>
+                <a:latin typeface="Calibri" panose="020F0502020204030204" pitchFamily="34" charset="0"/>
+                <a:ea typeface="-윤고딕340" pitchFamily="18" charset="-127"/>
+                <a:cs typeface="Calibri" panose="020F0502020204030204" pitchFamily="34" charset="0"/>
+              </a:rPr>
+              <a:t>&lt; Li diffusivity vs 1000/T in four LGPS-type compounds: the ordering changes between 700 and 1300 K &gt;</a:t>
+            </a:r>
+          </a:p>
+        </p:txBody>
+      </p:sp>
+      <p:sp>
+        <p:nvSpPr>
+          <p:cNvPr id="308" name="Credit right"/>
+          <p:cNvSpPr txBox="1"/>
+          <p:nvPr/>
+        </p:nvSpPr>
+        <p:spPr>
+          <a:xfrm>
+            <a:off x="4937760" y="5100562"/>
+            <a:ext cx="3703320" cy="256032"/>
+          </a:xfrm>
+          <a:prstGeom prst="rect">
+            <a:avLst/>
+          </a:prstGeom>
+          <a:noFill/>
+        </p:spPr>
+        <p:txBody>
+          <a:bodyPr wrap="square" lIns="45720" tIns="27432" rIns="45720" bIns="27432" rtlCol="0" anchor="t">
+            <a:noAutofit/>
+          </a:bodyPr>
+          <a:lstStyle/>
+          <a:p>
+            <a:pPr marL="0" indent="0" latinLnBrk="0" algn="ctr">
+              <a:lnSpc>
+                <a:spcPct val="100000"/>
+              </a:lnSpc>
+              <a:buNone/>
+              <a:defRPr/>
+            </a:pPr>
+            <a:r>
+              <a:rPr kumimoji="1" lang="en-US" altLang="ko-KR" sz="950" i="1" dirty="0">
                 <a:solidFill>
                   <a:srgbClr val="6B7280"/>
                 </a:solidFill>
@@ -15133,7 +15257,50 @@
                 <a:ea typeface="-윤고딕340" pitchFamily="18" charset="-127"/>
                 <a:cs typeface="Calibri" panose="020F0502020204030204" pitchFamily="34" charset="0"/>
               </a:rPr>
-              <a:t>Phuthi, Chem. Mater. (2026) · Muy, Chem. Mater. 37, 2395 (2025) · Alghamdi, J. Phys. Energy 8, 025013 (2026) · Grasselli, Digital Discovery 4, 2654 (2025)</a:t>
+              <a:t>Reproduced from Jung et al., eTransportation 28, 100570 (2026), Fig. 5b</a:t>
+            </a:r>
+          </a:p>
+        </p:txBody>
+      </p:sp>
+      <p:sp>
+        <p:nvSpPr>
+          <p:cNvPr id="309" name="References"/>
+          <p:cNvSpPr txBox="1"/>
+          <p:nvPr/>
+        </p:nvSpPr>
+        <p:spPr>
+          <a:xfrm>
+            <a:off x="502920" y="5870448"/>
+            <a:ext cx="8138160" cy="384048"/>
+          </a:xfrm>
+          <a:prstGeom prst="rect">
+            <a:avLst/>
+          </a:prstGeom>
+          <a:noFill/>
+        </p:spPr>
+        <p:txBody>
+          <a:bodyPr wrap="square" lIns="45720" tIns="27432" rIns="45720" bIns="27432" rtlCol="0" anchor="t">
+            <a:noAutofit/>
+          </a:bodyPr>
+          <a:lstStyle/>
+          <a:p>
+            <a:pPr marL="0" indent="0" latinLnBrk="0">
+              <a:lnSpc>
+                <a:spcPct val="100000"/>
+              </a:lnSpc>
+              <a:buNone/>
+              <a:defRPr/>
+            </a:pPr>
+            <a:r>
+              <a:rPr kumimoji="1" lang="en-US" altLang="ko-KR" sz="1000" i="1" dirty="0">
+                <a:solidFill>
+                  <a:srgbClr val="6B7280"/>
+                </a:solidFill>
+                <a:latin typeface="Calibri" panose="020F0502020204030204" pitchFamily="34" charset="0"/>
+                <a:ea typeface="-윤고딕340" pitchFamily="18" charset="-127"/>
+                <a:cs typeface="Calibri" panose="020F0502020204030204" pitchFamily="34" charset="0"/>
+              </a:rPr>
+              <a:t>Phuthi et al., Chem. Mater. (2026), Perspective · Jung et al., eTransportation 28, 100570 (2026)</a:t>
             </a:r>
           </a:p>
         </p:txBody>
@@ -15210,376 +15377,21 @@
                 <a:ea typeface="굴림" pitchFamily="50" charset="-127"/>
                 <a:cs typeface="Arial" panose="020B0604020202020204" pitchFamily="34" charset="0"/>
               </a:rPr>
-              <a:t>Summary</a:t>
+              <a:t>Plan</a:t>
             </a:r>
           </a:p>
         </p:txBody>
       </p:sp>
       <p:sp>
         <p:nvSpPr>
-          <p:cNvPr id="305" name="Summary Done"/>
-          <p:cNvSpPr/>
-          <p:nvPr/>
-        </p:nvSpPr>
-        <p:spPr>
-          <a:xfrm>
-            <a:off x="502920" y="1051560"/>
-            <a:ext cx="2651760" cy="3977640"/>
-          </a:xfrm>
-          <a:prstGeom prst="roundRect">
-            <a:avLst>
-              <a:gd name="adj" fmla="val 6000"/>
-            </a:avLst>
-          </a:prstGeom>
-          <a:solidFill>
-            <a:srgbClr val="E8F3EA"/>
-          </a:solidFill>
-          <a:ln>
-            <a:noFill/>
-          </a:ln>
-        </p:spPr>
-        <p:txBody>
-          <a:bodyPr wrap="square" lIns="146304" tIns="128016" rIns="146304" bIns="91440" rtlCol="0" anchor="t">
-            <a:noAutofit/>
-          </a:bodyPr>
-          <a:lstStyle/>
-          <a:p>
-            <a:pPr marL="0" indent="0" latinLnBrk="0">
-              <a:lnSpc>
-                <a:spcPct val="100000"/>
-              </a:lnSpc>
-              <a:spcAft>
-                <a:spcPts val="900"/>
-              </a:spcAft>
-              <a:buNone/>
-              <a:defRPr/>
-            </a:pPr>
-            <a:r>
-              <a:rPr kumimoji="1" lang="en-US" altLang="ko-KR" sz="1800" b="1" dirty="0">
-                <a:solidFill>
-                  <a:srgbClr val="1B5E20"/>
-                </a:solidFill>
-                <a:latin typeface="Calibri" panose="020F0502020204030204" pitchFamily="34" charset="0"/>
-                <a:ea typeface="-윤고딕340" pitchFamily="18" charset="-127"/>
-                <a:cs typeface="Calibri" panose="020F0502020204030204" pitchFamily="34" charset="0"/>
-              </a:rPr>
-              <a:t>Done</a:t>
-            </a:r>
-          </a:p>
-          <a:p>
-            <a:pPr marL="182880" indent="-182880" latinLnBrk="0">
-              <a:lnSpc>
-                <a:spcPct val="115000"/>
-              </a:lnSpc>
-              <a:spcAft>
-                <a:spcPts val="700"/>
-              </a:spcAft>
-              <a:buClr>
-                <a:srgbClr val="1F2937"/>
-              </a:buClr>
-              <a:buSzPct val="80000"/>
-              <a:buFont typeface="Arial" panose="020B0604020202020204" pitchFamily="34" charset="0"/>
-              <a:buChar char="•"/>
-              <a:defRPr/>
-            </a:pPr>
-            <a:r>
-              <a:rPr kumimoji="1" lang="en-US" altLang="ko-KR" sz="1400" dirty="0">
-                <a:solidFill>
-                  <a:srgbClr val="1F2937"/>
-                </a:solidFill>
-                <a:latin typeface="Calibri" panose="020F0502020204030204" pitchFamily="34" charset="0"/>
-                <a:ea typeface="-윤고딕340" pitchFamily="18" charset="-127"/>
-                <a:cs typeface="Calibri" panose="020F0502020204030204" pitchFamily="34" charset="0"/>
-              </a:rPr>
-              <a:t>91 precursors enumerated; 89 relaxed with an MLIP (3,615 configurations)</a:t>
-            </a:r>
-          </a:p>
-          <a:p>
-            <a:pPr marL="182880" indent="-182880" latinLnBrk="0">
-              <a:lnSpc>
-                <a:spcPct val="115000"/>
-              </a:lnSpc>
-              <a:spcAft>
-                <a:spcPts val="700"/>
-              </a:spcAft>
-              <a:buClr>
-                <a:srgbClr val="1F2937"/>
-              </a:buClr>
-              <a:buSzPct val="80000"/>
-              <a:buFont typeface="Arial" panose="020B0604020202020204" pitchFamily="34" charset="0"/>
-              <a:buChar char="•"/>
-              <a:defRPr/>
-            </a:pPr>
-            <a:r>
-              <a:rPr kumimoji="1" lang="en-US" altLang="ko-KR" sz="1400" dirty="0">
-                <a:solidFill>
-                  <a:srgbClr val="1F2937"/>
-                </a:solidFill>
-                <a:latin typeface="Calibri" panose="020F0502020204030204" pitchFamily="34" charset="0"/>
-                <a:ea typeface="-윤고딕340" pitchFamily="18" charset="-127"/>
-                <a:cs typeface="Calibri" panose="020F0502020204030204" pitchFamily="34" charset="0"/>
-              </a:rPr>
-              <a:t>DFT equation of state of the reference compositions</a:t>
-            </a:r>
-          </a:p>
-          <a:p>
-            <a:pPr marL="182880" indent="-182880" latinLnBrk="0">
-              <a:lnSpc>
-                <a:spcPct val="115000"/>
-              </a:lnSpc>
-              <a:spcAft>
-                <a:spcPts val="700"/>
-              </a:spcAft>
-              <a:buClr>
-                <a:srgbClr val="1F2937"/>
-              </a:buClr>
-              <a:buSzPct val="80000"/>
-              <a:buFont typeface="Arial" panose="020B0604020202020204" pitchFamily="34" charset="0"/>
-              <a:buChar char="•"/>
-              <a:defRPr/>
-            </a:pPr>
-            <a:r>
-              <a:rPr kumimoji="1" lang="en-US" altLang="ko-KR" sz="1400" dirty="0">
-                <a:solidFill>
-                  <a:srgbClr val="1F2937"/>
-                </a:solidFill>
-                <a:latin typeface="Calibri" panose="020F0502020204030204" pitchFamily="34" charset="0"/>
-                <a:ea typeface="-윤고딕340" pitchFamily="18" charset="-127"/>
-                <a:cs typeface="Calibri" panose="020F0502020204030204" pitchFamily="34" charset="0"/>
-              </a:rPr>
-              <a:t>Stability windows recomputed with one consistent definition</a:t>
-            </a:r>
-          </a:p>
-        </p:txBody>
-      </p:sp>
-      <p:sp>
-        <p:nvSpPr>
-          <p:cNvPr id="306" name="Summary Running"/>
-          <p:cNvSpPr/>
-          <p:nvPr/>
-        </p:nvSpPr>
-        <p:spPr>
-          <a:xfrm>
-            <a:off x="3310128" y="1051560"/>
-            <a:ext cx="2651760" cy="3977640"/>
-          </a:xfrm>
-          <a:prstGeom prst="roundRect">
-            <a:avLst>
-              <a:gd name="adj" fmla="val 6000"/>
-            </a:avLst>
-          </a:prstGeom>
-          <a:solidFill>
-            <a:srgbClr val="E3EEF9"/>
-          </a:solidFill>
-          <a:ln>
-            <a:noFill/>
-          </a:ln>
-        </p:spPr>
-        <p:txBody>
-          <a:bodyPr wrap="square" lIns="146304" tIns="128016" rIns="146304" bIns="91440" rtlCol="0" anchor="t">
-            <a:noAutofit/>
-          </a:bodyPr>
-          <a:lstStyle/>
-          <a:p>
-            <a:pPr marL="0" indent="0" latinLnBrk="0">
-              <a:lnSpc>
-                <a:spcPct val="100000"/>
-              </a:lnSpc>
-              <a:spcAft>
-                <a:spcPts val="900"/>
-              </a:spcAft>
-              <a:buNone/>
-              <a:defRPr/>
-            </a:pPr>
-            <a:r>
-              <a:rPr kumimoji="1" lang="en-US" altLang="ko-KR" sz="1800" b="1" dirty="0">
-                <a:solidFill>
-                  <a:srgbClr val="0B5394"/>
-                </a:solidFill>
-                <a:latin typeface="Calibri" panose="020F0502020204030204" pitchFamily="34" charset="0"/>
-                <a:ea typeface="-윤고딕340" pitchFamily="18" charset="-127"/>
-                <a:cs typeface="Calibri" panose="020F0502020204030204" pitchFamily="34" charset="0"/>
-              </a:rPr>
-              <a:t>Running</a:t>
-            </a:r>
-          </a:p>
-          <a:p>
-            <a:pPr marL="182880" indent="-182880" latinLnBrk="0">
-              <a:lnSpc>
-                <a:spcPct val="115000"/>
-              </a:lnSpc>
-              <a:spcAft>
-                <a:spcPts val="700"/>
-              </a:spcAft>
-              <a:buClr>
-                <a:srgbClr val="1F2937"/>
-              </a:buClr>
-              <a:buSzPct val="80000"/>
-              <a:buFont typeface="Arial" panose="020B0604020202020204" pitchFamily="34" charset="0"/>
-              <a:buChar char="•"/>
-              <a:defRPr/>
-            </a:pPr>
-            <a:r>
-              <a:rPr kumimoji="1" lang="en-US" altLang="ko-KR" sz="1400" dirty="0">
-                <a:solidFill>
-                  <a:srgbClr val="1F2937"/>
-                </a:solidFill>
-                <a:latin typeface="Calibri" panose="020F0502020204030204" pitchFamily="34" charset="0"/>
-                <a:ea typeface="-윤고딕340" pitchFamily="18" charset="-127"/>
-                <a:cs typeface="Calibri" panose="020F0502020204030204" pitchFamily="34" charset="0"/>
-              </a:rPr>
-              <a:t>MLIP-MD Li diffusivity ratio, Al₂O₃ vs Al₂S₃ (40 runs; ~Oct 21)</a:t>
-            </a:r>
-          </a:p>
-          <a:p>
-            <a:pPr marL="182880" indent="-182880" latinLnBrk="0">
-              <a:lnSpc>
-                <a:spcPct val="115000"/>
-              </a:lnSpc>
-              <a:spcAft>
-                <a:spcPts val="700"/>
-              </a:spcAft>
-              <a:buClr>
-                <a:srgbClr val="1F2937"/>
-              </a:buClr>
-              <a:buSzPct val="80000"/>
-              <a:buFont typeface="Arial" panose="020B0604020202020204" pitchFamily="34" charset="0"/>
-              <a:buChar char="•"/>
-              <a:defRPr/>
-            </a:pPr>
-            <a:r>
-              <a:rPr kumimoji="1" lang="en-US" altLang="ko-KR" sz="1400" dirty="0">
-                <a:solidFill>
-                  <a:srgbClr val="1F2937"/>
-                </a:solidFill>
-                <a:latin typeface="Calibri" panose="020F0502020204030204" pitchFamily="34" charset="0"/>
-                <a:ea typeface="-윤고딕340" pitchFamily="18" charset="-127"/>
-                <a:cs typeface="Calibri" panose="020F0502020204030204" pitchFamily="34" charset="0"/>
-              </a:rPr>
-              <a:t>DFT elastic constants</a:t>
-            </a:r>
-          </a:p>
-        </p:txBody>
-      </p:sp>
-      <p:sp>
-        <p:nvSpPr>
-          <p:cNvPr id="307" name="Summary Next"/>
-          <p:cNvSpPr/>
-          <p:nvPr/>
-        </p:nvSpPr>
-        <p:spPr>
-          <a:xfrm>
-            <a:off x="6117336" y="1051560"/>
-            <a:ext cx="2651760" cy="3977640"/>
-          </a:xfrm>
-          <a:prstGeom prst="roundRect">
-            <a:avLst>
-              <a:gd name="adj" fmla="val 6000"/>
-            </a:avLst>
-          </a:prstGeom>
-          <a:solidFill>
-            <a:srgbClr val="F3F4F6"/>
-          </a:solidFill>
-          <a:ln>
-            <a:noFill/>
-          </a:ln>
-        </p:spPr>
-        <p:txBody>
-          <a:bodyPr wrap="square" lIns="146304" tIns="128016" rIns="146304" bIns="91440" rtlCol="0" anchor="t">
-            <a:noAutofit/>
-          </a:bodyPr>
-          <a:lstStyle/>
-          <a:p>
-            <a:pPr marL="0" indent="0" latinLnBrk="0">
-              <a:lnSpc>
-                <a:spcPct val="100000"/>
-              </a:lnSpc>
-              <a:spcAft>
-                <a:spcPts val="900"/>
-              </a:spcAft>
-              <a:buNone/>
-              <a:defRPr/>
-            </a:pPr>
-            <a:r>
-              <a:rPr kumimoji="1" lang="en-US" altLang="ko-KR" sz="1800" b="1" dirty="0">
-                <a:solidFill>
-                  <a:srgbClr val="374151"/>
-                </a:solidFill>
-                <a:latin typeface="Calibri" panose="020F0502020204030204" pitchFamily="34" charset="0"/>
-                <a:ea typeface="-윤고딕340" pitchFamily="18" charset="-127"/>
-                <a:cs typeface="Calibri" panose="020F0502020204030204" pitchFamily="34" charset="0"/>
-              </a:rPr>
-              <a:t>Next</a:t>
-            </a:r>
-          </a:p>
-          <a:p>
-            <a:pPr marL="182880" indent="-182880" latinLnBrk="0">
-              <a:lnSpc>
-                <a:spcPct val="115000"/>
-              </a:lnSpc>
-              <a:spcAft>
-                <a:spcPts val="700"/>
-              </a:spcAft>
-              <a:buClr>
-                <a:srgbClr val="1F2937"/>
-              </a:buClr>
-              <a:buSzPct val="80000"/>
-              <a:buFont typeface="Arial" panose="020B0604020202020204" pitchFamily="34" charset="0"/>
-              <a:buChar char="•"/>
-              <a:defRPr/>
-            </a:pPr>
-            <a:r>
-              <a:rPr kumimoji="1" lang="en-US" altLang="ko-KR" sz="1400" dirty="0">
-                <a:solidFill>
-                  <a:srgbClr val="1F2937"/>
-                </a:solidFill>
-                <a:latin typeface="Calibri" panose="020F0502020204030204" pitchFamily="34" charset="0"/>
-                <a:ea typeface="-윤고딕340" pitchFamily="18" charset="-127"/>
-                <a:cs typeface="Calibri" panose="020F0502020204030204" pitchFamily="34" charset="0"/>
-              </a:rPr>
-              <a:t>Interfacial reaction products with ground-state phases</a:t>
-            </a:r>
-          </a:p>
-          <a:p>
-            <a:pPr marL="182880" indent="-182880" latinLnBrk="0">
-              <a:lnSpc>
-                <a:spcPct val="115000"/>
-              </a:lnSpc>
-              <a:spcAft>
-                <a:spcPts val="700"/>
-              </a:spcAft>
-              <a:buClr>
-                <a:srgbClr val="1F2937"/>
-              </a:buClr>
-              <a:buSzPct val="80000"/>
-              <a:buFont typeface="Arial" panose="020B0604020202020204" pitchFamily="34" charset="0"/>
-              <a:buChar char="•"/>
-              <a:defRPr/>
-            </a:pPr>
-            <a:r>
-              <a:rPr kumimoji="1" lang="en-US" altLang="ko-KR" sz="1400" dirty="0">
-                <a:solidFill>
-                  <a:srgbClr val="1F2937"/>
-                </a:solidFill>
-                <a:latin typeface="Calibri" panose="020F0502020204030204" pitchFamily="34" charset="0"/>
-                <a:ea typeface="-윤고딕340" pitchFamily="18" charset="-127"/>
-                <a:cs typeface="Calibri" panose="020F0502020204030204" pitchFamily="34" charset="0"/>
-              </a:rPr>
-              <a:t>Selection rule fixed in advance → shortlist → DFT → experiment</a:t>
-            </a:r>
-          </a:p>
-        </p:txBody>
-      </p:sp>
-      <p:sp>
-        <p:nvSpPr>
-          <p:cNvPr id="308" name="Bottom line"/>
+          <p:cNvPr id="310" name="Rectangle 4"/>
           <p:cNvSpPr txBox="1"/>
           <p:nvPr/>
         </p:nvSpPr>
         <p:spPr>
           <a:xfrm>
-            <a:off x="502920" y="5257800"/>
-            <a:ext cx="8138160" cy="502920"/>
+            <a:off x="557784" y="896112"/>
+            <a:ext cx="8083296" cy="438912"/>
           </a:xfrm>
           <a:prstGeom prst="rect">
             <a:avLst/>
@@ -15592,6 +15404,512 @@
           </a:bodyPr>
           <a:lstStyle/>
           <a:p>
+            <a:pPr marL="265113" indent="-265113" latinLnBrk="0">
+              <a:lnSpc>
+                <a:spcPct val="100000"/>
+              </a:lnSpc>
+              <a:buClr>
+                <a:srgbClr val="A50021"/>
+              </a:buClr>
+              <a:buSzPct val="75000"/>
+              <a:buFont typeface="Wingdings" pitchFamily="2" charset="2"/>
+              <a:buChar char="n"/>
+              <a:defRPr/>
+            </a:pPr>
+            <a:r>
+              <a:rPr kumimoji="1" lang="en-US" altLang="ko-KR" dirty="0">
+                <a:solidFill>
+                  <a:schemeClr val="bg1">
+                    <a:lumMod val="75000"/>
+                    <a:lumOff val="25000"/>
+                  </a:schemeClr>
+                </a:solidFill>
+                <a:latin typeface="Calibri" panose="020F0502020204030204" pitchFamily="34" charset="0"/>
+                <a:ea typeface="-윤고딕340" pitchFamily="18" charset="-127"/>
+                <a:cs typeface="Calibri" panose="020F0502020204030204" pitchFamily="34" charset="0"/>
+              </a:rPr>
+              <a:t>Next steps and purpose</a:t>
+            </a:r>
+          </a:p>
+        </p:txBody>
+      </p:sp>
+      <p:sp>
+        <p:nvSpPr>
+          <p:cNvPr id="311" name="Label Now → late Oct"/>
+          <p:cNvSpPr/>
+          <p:nvPr/>
+        </p:nvSpPr>
+        <p:spPr>
+          <a:xfrm>
+            <a:off x="502920" y="1417320"/>
+            <a:ext cx="1600200" cy="868680"/>
+          </a:xfrm>
+          <a:prstGeom prst="roundRect">
+            <a:avLst>
+              <a:gd name="adj" fmla="val 6000"/>
+            </a:avLst>
+          </a:prstGeom>
+          <a:solidFill>
+            <a:srgbClr val="0070C0"/>
+          </a:solidFill>
+          <a:ln>
+            <a:noFill/>
+          </a:ln>
+        </p:spPr>
+        <p:txBody>
+          <a:bodyPr wrap="square" lIns="91440" tIns="64008" rIns="91440" bIns="64008" rtlCol="0" anchor="ctr">
+            <a:noAutofit/>
+          </a:bodyPr>
+          <a:lstStyle/>
+          <a:p>
+            <a:pPr marL="0" indent="0" latinLnBrk="0" algn="ctr">
+              <a:lnSpc>
+                <a:spcPct val="100000"/>
+              </a:lnSpc>
+              <a:buNone/>
+              <a:defRPr/>
+            </a:pPr>
+            <a:r>
+              <a:rPr kumimoji="1" lang="en-US" altLang="ko-KR" sz="1250" b="1" dirty="0">
+                <a:solidFill>
+                  <a:srgbClr val="FFFFFF"/>
+                </a:solidFill>
+                <a:latin typeface="Calibri" panose="020F0502020204030204" pitchFamily="34" charset="0"/>
+                <a:ea typeface="-윤고딕340" pitchFamily="18" charset="-127"/>
+                <a:cs typeface="Calibri" panose="020F0502020204030204" pitchFamily="34" charset="0"/>
+              </a:rPr>
+              <a:t>Now → late Oct</a:t>
+            </a:r>
+          </a:p>
+        </p:txBody>
+      </p:sp>
+      <p:sp>
+        <p:nvSpPr>
+          <p:cNvPr id="312" name="Content Now → late Oct"/>
+          <p:cNvSpPr/>
+          <p:nvPr/>
+        </p:nvSpPr>
+        <p:spPr>
+          <a:xfrm>
+            <a:off x="2194560" y="1417320"/>
+            <a:ext cx="6446520" cy="868680"/>
+          </a:xfrm>
+          <a:prstGeom prst="roundRect">
+            <a:avLst>
+              <a:gd name="adj" fmla="val 6000"/>
+            </a:avLst>
+          </a:prstGeom>
+          <a:solidFill>
+            <a:srgbClr val="F5F7FA"/>
+          </a:solidFill>
+          <a:ln>
+            <a:noFill/>
+          </a:ln>
+        </p:spPr>
+        <p:txBody>
+          <a:bodyPr wrap="square" lIns="137160" tIns="54864" rIns="137160" bIns="54864" rtlCol="0" anchor="ctr">
+            <a:noAutofit/>
+          </a:bodyPr>
+          <a:lstStyle/>
+          <a:p>
+            <a:pPr marL="0" indent="0" latinLnBrk="0">
+              <a:lnSpc>
+                <a:spcPct val="110000"/>
+              </a:lnSpc>
+              <a:buNone/>
+              <a:defRPr/>
+            </a:pPr>
+            <a:r>
+              <a:rPr kumimoji="1" lang="en-US" altLang="ko-KR" sz="1250" dirty="0">
+                <a:solidFill>
+                  <a:srgbClr val="1F2937"/>
+                </a:solidFill>
+                <a:latin typeface="Calibri" panose="020F0502020204030204" pitchFamily="34" charset="0"/>
+                <a:ea typeface="-윤고딕340" pitchFamily="18" charset="-127"/>
+                <a:cs typeface="Calibri" panose="020F0502020204030204" pitchFamily="34" charset="0"/>
+              </a:rPr>
+              <a:t>Finish the 40 MD runs and analyse once with the predefined criteria. The follow-up for each outcome (difference · equivalent · inconclusive · criteria not met) is written down before the analysis.</a:t>
+            </a:r>
+          </a:p>
+        </p:txBody>
+      </p:sp>
+      <p:sp>
+        <p:nvSpPr>
+          <p:cNvPr id="313" name="Label Next 1–2 months"/>
+          <p:cNvSpPr/>
+          <p:nvPr/>
+        </p:nvSpPr>
+        <p:spPr>
+          <a:xfrm>
+            <a:off x="502920" y="2395728"/>
+            <a:ext cx="1600200" cy="1298448"/>
+          </a:xfrm>
+          <a:prstGeom prst="roundRect">
+            <a:avLst>
+              <a:gd name="adj" fmla="val 6000"/>
+            </a:avLst>
+          </a:prstGeom>
+          <a:solidFill>
+            <a:srgbClr val="1F497D"/>
+          </a:solidFill>
+          <a:ln>
+            <a:noFill/>
+          </a:ln>
+        </p:spPr>
+        <p:txBody>
+          <a:bodyPr wrap="square" lIns="91440" tIns="64008" rIns="91440" bIns="64008" rtlCol="0" anchor="ctr">
+            <a:noAutofit/>
+          </a:bodyPr>
+          <a:lstStyle/>
+          <a:p>
+            <a:pPr marL="0" indent="0" latinLnBrk="0" algn="ctr">
+              <a:lnSpc>
+                <a:spcPct val="100000"/>
+              </a:lnSpc>
+              <a:buNone/>
+              <a:defRPr/>
+            </a:pPr>
+            <a:r>
+              <a:rPr kumimoji="1" lang="en-US" altLang="ko-KR" sz="1250" b="1" dirty="0">
+                <a:solidFill>
+                  <a:srgbClr val="FFFFFF"/>
+                </a:solidFill>
+                <a:latin typeface="Calibri" panose="020F0502020204030204" pitchFamily="34" charset="0"/>
+                <a:ea typeface="-윤고딕340" pitchFamily="18" charset="-127"/>
+                <a:cs typeface="Calibri" panose="020F0502020204030204" pitchFamily="34" charset="0"/>
+              </a:rPr>
+              <a:t>Next 1–2 months</a:t>
+            </a:r>
+          </a:p>
+        </p:txBody>
+      </p:sp>
+      <p:sp>
+        <p:nvSpPr>
+          <p:cNvPr id="314" name="Content Next 1–2 months"/>
+          <p:cNvSpPr/>
+          <p:nvPr/>
+        </p:nvSpPr>
+        <p:spPr>
+          <a:xfrm>
+            <a:off x="2194560" y="2395728"/>
+            <a:ext cx="6446520" cy="1298448"/>
+          </a:xfrm>
+          <a:prstGeom prst="roundRect">
+            <a:avLst>
+              <a:gd name="adj" fmla="val 6000"/>
+            </a:avLst>
+          </a:prstGeom>
+          <a:solidFill>
+            <a:srgbClr val="F5F7FA"/>
+          </a:solidFill>
+          <a:ln>
+            <a:noFill/>
+          </a:ln>
+        </p:spPr>
+        <p:txBody>
+          <a:bodyPr wrap="square" lIns="137160" tIns="54864" rIns="137160" bIns="54864" rtlCol="0" anchor="ctr">
+            <a:noAutofit/>
+          </a:bodyPr>
+          <a:lstStyle/>
+          <a:p>
+            <a:pPr marL="182880" indent="-182880" latinLnBrk="0">
+              <a:lnSpc>
+                <a:spcPct val="105000"/>
+              </a:lnSpc>
+              <a:buClr>
+                <a:srgbClr val="1F2937"/>
+              </a:buClr>
+              <a:buSzPct val="80000"/>
+              <a:buFont typeface="Arial" panose="020B0604020202020204" pitchFamily="34" charset="0"/>
+              <a:buChar char="•"/>
+              <a:defRPr/>
+            </a:pPr>
+            <a:r>
+              <a:rPr kumimoji="1" lang="en-US" altLang="ko-KR" sz="1200" dirty="0">
+                <a:solidFill>
+                  <a:srgbClr val="1F2937"/>
+                </a:solidFill>
+                <a:latin typeface="Calibri" panose="020F0502020204030204" pitchFamily="34" charset="0"/>
+                <a:ea typeface="-윤고딕340" pitchFamily="18" charset="-127"/>
+                <a:cs typeface="Calibri" panose="020F0502020204030204" pitchFamily="34" charset="0"/>
+              </a:rPr>
+              <a:t>Execution scope over the 237-design roster and the ranking margin δ — fixed before any result</a:t>
+            </a:r>
+          </a:p>
+          <a:p>
+            <a:pPr marL="182880" indent="-182880" latinLnBrk="0">
+              <a:lnSpc>
+                <a:spcPct val="105000"/>
+              </a:lnSpc>
+              <a:buClr>
+                <a:srgbClr val="1F2937"/>
+              </a:buClr>
+              <a:buSzPct val="80000"/>
+              <a:buFont typeface="Arial" panose="020B0604020202020204" pitchFamily="34" charset="0"/>
+              <a:buChar char="•"/>
+              <a:defRPr/>
+            </a:pPr>
+            <a:r>
+              <a:rPr kumimoji="1" lang="en-US" altLang="ko-KR" sz="1200" dirty="0">
+                <a:solidFill>
+                  <a:srgbClr val="1F2937"/>
+                </a:solidFill>
+                <a:latin typeface="Calibri" panose="020F0502020204030204" pitchFamily="34" charset="0"/>
+                <a:ea typeface="-윤고딕340" pitchFamily="18" charset="-127"/>
+                <a:cs typeface="Calibri" panose="020F0502020204030204" pitchFamily="34" charset="0"/>
+              </a:rPr>
+              <a:t>Do Stage-1 descriptors predict the measured transport? (rank correlation with a confidence interval)</a:t>
+            </a:r>
+          </a:p>
+          <a:p>
+            <a:pPr marL="182880" indent="-182880" latinLnBrk="0">
+              <a:lnSpc>
+                <a:spcPct val="105000"/>
+              </a:lnSpc>
+              <a:buClr>
+                <a:srgbClr val="1F2937"/>
+              </a:buClr>
+              <a:buSzPct val="80000"/>
+              <a:buFont typeface="Arial" panose="020B0604020202020204" pitchFamily="34" charset="0"/>
+              <a:buChar char="•"/>
+              <a:defRPr/>
+            </a:pPr>
+            <a:r>
+              <a:rPr kumimoji="1" lang="en-US" altLang="ko-KR" sz="1200" dirty="0">
+                <a:solidFill>
+                  <a:srgbClr val="1F2937"/>
+                </a:solidFill>
+                <a:latin typeface="Calibri" panose="020F0502020204030204" pitchFamily="34" charset="0"/>
+                <a:ea typeface="-윤고딕340" pitchFamily="18" charset="-127"/>
+                <a:cs typeface="Calibri" panose="020F0502020204030204" pitchFamily="34" charset="0"/>
+              </a:rPr>
+              <a:t>Stability windows and interface products with ground-state phases (As₂S₃ added) · DFT elastic constants</a:t>
+            </a:r>
+          </a:p>
+        </p:txBody>
+      </p:sp>
+      <p:sp>
+        <p:nvSpPr>
+          <p:cNvPr id="315" name="Label Then"/>
+          <p:cNvSpPr/>
+          <p:nvPr/>
+        </p:nvSpPr>
+        <p:spPr>
+          <a:xfrm>
+            <a:off x="502920" y="3785616"/>
+            <a:ext cx="1600200" cy="731520"/>
+          </a:xfrm>
+          <a:prstGeom prst="roundRect">
+            <a:avLst>
+              <a:gd name="adj" fmla="val 6000"/>
+            </a:avLst>
+          </a:prstGeom>
+          <a:solidFill>
+            <a:srgbClr val="A50021"/>
+          </a:solidFill>
+          <a:ln>
+            <a:noFill/>
+          </a:ln>
+        </p:spPr>
+        <p:txBody>
+          <a:bodyPr wrap="square" lIns="91440" tIns="64008" rIns="91440" bIns="64008" rtlCol="0" anchor="ctr">
+            <a:noAutofit/>
+          </a:bodyPr>
+          <a:lstStyle/>
+          <a:p>
+            <a:pPr marL="0" indent="0" latinLnBrk="0" algn="ctr">
+              <a:lnSpc>
+                <a:spcPct val="100000"/>
+              </a:lnSpc>
+              <a:buNone/>
+              <a:defRPr/>
+            </a:pPr>
+            <a:r>
+              <a:rPr kumimoji="1" lang="en-US" altLang="ko-KR" sz="1250" b="1" dirty="0">
+                <a:solidFill>
+                  <a:srgbClr val="FFFFFF"/>
+                </a:solidFill>
+                <a:latin typeface="Calibri" panose="020F0502020204030204" pitchFamily="34" charset="0"/>
+                <a:ea typeface="-윤고딕340" pitchFamily="18" charset="-127"/>
+                <a:cs typeface="Calibri" panose="020F0502020204030204" pitchFamily="34" charset="0"/>
+              </a:rPr>
+              <a:t>Then</a:t>
+            </a:r>
+          </a:p>
+        </p:txBody>
+      </p:sp>
+      <p:sp>
+        <p:nvSpPr>
+          <p:cNvPr id="316" name="Content Then"/>
+          <p:cNvSpPr/>
+          <p:nvPr/>
+        </p:nvSpPr>
+        <p:spPr>
+          <a:xfrm>
+            <a:off x="2194560" y="3785616"/>
+            <a:ext cx="6446520" cy="731520"/>
+          </a:xfrm>
+          <a:prstGeom prst="roundRect">
+            <a:avLst>
+              <a:gd name="adj" fmla="val 6000"/>
+            </a:avLst>
+          </a:prstGeom>
+          <a:solidFill>
+            <a:srgbClr val="F5F7FA"/>
+          </a:solidFill>
+          <a:ln>
+            <a:noFill/>
+          </a:ln>
+        </p:spPr>
+        <p:txBody>
+          <a:bodyPr wrap="square" lIns="137160" tIns="54864" rIns="137160" bIns="54864" rtlCol="0" anchor="ctr">
+            <a:noAutofit/>
+          </a:bodyPr>
+          <a:lstStyle/>
+          <a:p>
+            <a:pPr marL="0" indent="0" latinLnBrk="0">
+              <a:lnSpc>
+                <a:spcPct val="110000"/>
+              </a:lnSpc>
+              <a:buNone/>
+              <a:defRPr/>
+            </a:pPr>
+            <a:r>
+              <a:rPr kumimoji="1" lang="en-US" altLang="ko-KR" sz="1250" dirty="0">
+                <a:solidFill>
+                  <a:srgbClr val="1F2937"/>
+                </a:solidFill>
+                <a:latin typeface="Calibri" panose="020F0502020204030204" pitchFamily="34" charset="0"/>
+                <a:ea typeface="-윤고딕340" pitchFamily="18" charset="-127"/>
+                <a:cs typeface="Calibri" panose="020F0502020204030204" pitchFamily="34" charset="0"/>
+              </a:rPr>
+              <a:t>Rank designs on the primary readout with its uncertainty → shortlist → DFT validation → synthesis and testing with the experimental team.</a:t>
+            </a:r>
+          </a:p>
+        </p:txBody>
+      </p:sp>
+      <p:sp>
+        <p:nvSpPr>
+          <p:cNvPr id="317" name="Label Method upgrades"/>
+          <p:cNvSpPr/>
+          <p:nvPr/>
+        </p:nvSpPr>
+        <p:spPr>
+          <a:xfrm>
+            <a:off x="502920" y="4626864"/>
+            <a:ext cx="1600200" cy="868680"/>
+          </a:xfrm>
+          <a:prstGeom prst="roundRect">
+            <a:avLst>
+              <a:gd name="adj" fmla="val 6000"/>
+            </a:avLst>
+          </a:prstGeom>
+          <a:solidFill>
+            <a:srgbClr val="6B7280"/>
+          </a:solidFill>
+          <a:ln>
+            <a:noFill/>
+          </a:ln>
+        </p:spPr>
+        <p:txBody>
+          <a:bodyPr wrap="square" lIns="91440" tIns="64008" rIns="91440" bIns="64008" rtlCol="0" anchor="ctr">
+            <a:noAutofit/>
+          </a:bodyPr>
+          <a:lstStyle/>
+          <a:p>
+            <a:pPr marL="0" indent="0" latinLnBrk="0" algn="ctr">
+              <a:lnSpc>
+                <a:spcPct val="100000"/>
+              </a:lnSpc>
+              <a:buNone/>
+              <a:defRPr/>
+            </a:pPr>
+            <a:r>
+              <a:rPr kumimoji="1" lang="en-US" altLang="ko-KR" sz="1250" b="1" dirty="0">
+                <a:solidFill>
+                  <a:srgbClr val="FFFFFF"/>
+                </a:solidFill>
+                <a:latin typeface="Calibri" panose="020F0502020204030204" pitchFamily="34" charset="0"/>
+                <a:ea typeface="-윤고딕340" pitchFamily="18" charset="-127"/>
+                <a:cs typeface="Calibri" panose="020F0502020204030204" pitchFamily="34" charset="0"/>
+              </a:rPr>
+              <a:t>Method upgrades</a:t>
+            </a:r>
+          </a:p>
+        </p:txBody>
+      </p:sp>
+      <p:sp>
+        <p:nvSpPr>
+          <p:cNvPr id="318" name="Content Method upgrades"/>
+          <p:cNvSpPr/>
+          <p:nvPr/>
+        </p:nvSpPr>
+        <p:spPr>
+          <a:xfrm>
+            <a:off x="2194560" y="4626864"/>
+            <a:ext cx="6446520" cy="868680"/>
+          </a:xfrm>
+          <a:prstGeom prst="roundRect">
+            <a:avLst>
+              <a:gd name="adj" fmla="val 6000"/>
+            </a:avLst>
+          </a:prstGeom>
+          <a:solidFill>
+            <a:srgbClr val="F5F7FA"/>
+          </a:solidFill>
+          <a:ln>
+            <a:noFill/>
+          </a:ln>
+        </p:spPr>
+        <p:txBody>
+          <a:bodyPr wrap="square" lIns="137160" tIns="54864" rIns="137160" bIns="54864" rtlCol="0" anchor="ctr">
+            <a:noAutofit/>
+          </a:bodyPr>
+          <a:lstStyle/>
+          <a:p>
+            <a:pPr marL="0" indent="0" latinLnBrk="0">
+              <a:lnSpc>
+                <a:spcPct val="110000"/>
+              </a:lnSpc>
+              <a:buNone/>
+              <a:defRPr/>
+            </a:pPr>
+            <a:r>
+              <a:rPr kumimoji="1" lang="en-US" altLang="ko-KR" sz="1250" dirty="0">
+                <a:solidFill>
+                  <a:srgbClr val="1F2937"/>
+                </a:solidFill>
+                <a:latin typeface="Calibri" panose="020F0502020204030204" pitchFamily="34" charset="0"/>
+                <a:ea typeface="-윤고딕340" pitchFamily="18" charset="-127"/>
+                <a:cs typeface="Calibri" panose="020F0502020204030204" pitchFamily="34" charset="0"/>
+              </a:rPr>
+              <a:t>Larger cells (≥ 2 nm) and longer runs (≥ 0.3 ns) · fine-tuned MLIP · ensemble uncertainty · dopant concentration from charge-neutral defect thermodynamics</a:t>
+            </a:r>
+          </a:p>
+        </p:txBody>
+      </p:sp>
+      <p:sp>
+        <p:nvSpPr>
+          <p:cNvPr id="319" name="Goal"/>
+          <p:cNvSpPr txBox="1"/>
+          <p:nvPr/>
+        </p:nvSpPr>
+        <p:spPr>
+          <a:xfrm>
+            <a:off x="502920" y="5559552"/>
+            <a:ext cx="8138160" cy="329184"/>
+          </a:xfrm>
+          <a:prstGeom prst="rect">
+            <a:avLst/>
+          </a:prstGeom>
+          <a:noFill/>
+        </p:spPr>
+        <p:txBody>
+          <a:bodyPr wrap="square" lIns="45720" tIns="27432" rIns="45720" bIns="27432" rtlCol="0" anchor="t">
+            <a:noAutofit/>
+          </a:bodyPr>
+          <a:lstStyle/>
+          <a:p>
             <a:pPr marL="0" indent="0" latinLnBrk="0">
               <a:lnSpc>
                 <a:spcPct val="100000"/>
@@ -15600,7 +15918,7 @@
               <a:defRPr/>
             </a:pPr>
             <a:r>
-              <a:rPr kumimoji="1" lang="en-US" altLang="ko-KR" sz="1500" dirty="0">
+              <a:rPr kumimoji="1" lang="en-US" altLang="ko-KR" sz="1250" dirty="0">
                 <a:solidFill>
                   <a:srgbClr val="0070C0"/>
                 </a:solidFill>
@@ -15608,10 +15926,10 @@
                 <a:ea typeface="-윤고딕340" pitchFamily="18" charset="-127"/>
                 <a:cs typeface="Calibri" panose="020F0502020204030204" pitchFamily="34" charset="0"/>
               </a:rPr>
-              <a:t>No dopant ranking is claimed yet — </a:t>
-            </a:r>
-            <a:r>
-              <a:rPr kumimoji="1" lang="en-US" altLang="ko-KR" sz="1500" b="1" dirty="0">
+              <a:t>Goal: a screen that </a:t>
+            </a:r>
+            <a:r>
+              <a:rPr kumimoji="1" lang="en-US" altLang="ko-KR" sz="1250" b="1" dirty="0">
                 <a:solidFill>
                   <a:srgbClr val="0070C0"/>
                 </a:solidFill>
@@ -15619,7 +15937,61 @@
                 <a:ea typeface="-윤고딕340" pitchFamily="18" charset="-127"/>
                 <a:cs typeface="Calibri" panose="020F0502020204030204" pitchFamily="34" charset="0"/>
               </a:rPr>
-              <a:t>the screen proposes, predefined tests decide.</a:t>
+              <a:t>selects</a:t>
+            </a:r>
+            <a:r>
+              <a:rPr kumimoji="1" lang="en-US" altLang="ko-KR" sz="1250" dirty="0">
+                <a:solidFill>
+                  <a:srgbClr val="0070C0"/>
+                </a:solidFill>
+                <a:latin typeface="Calibri" panose="020F0502020204030204" pitchFamily="34" charset="0"/>
+                <a:ea typeface="-윤고딕340" pitchFamily="18" charset="-127"/>
+                <a:cs typeface="Calibri" panose="020F0502020204030204" pitchFamily="34" charset="0"/>
+              </a:rPr>
+              <a:t> the precursor, with the selection rule stated in advance.</a:t>
+            </a:r>
+          </a:p>
+        </p:txBody>
+      </p:sp>
+      <p:sp>
+        <p:nvSpPr>
+          <p:cNvPr id="320" name="References"/>
+          <p:cNvSpPr txBox="1"/>
+          <p:nvPr/>
+        </p:nvSpPr>
+        <p:spPr>
+          <a:xfrm>
+            <a:off x="502920" y="5961888"/>
+            <a:ext cx="8138160" cy="329184"/>
+          </a:xfrm>
+          <a:prstGeom prst="rect">
+            <a:avLst/>
+          </a:prstGeom>
+          <a:noFill/>
+        </p:spPr>
+        <p:txBody>
+          <a:bodyPr wrap="square" lIns="45720" tIns="27432" rIns="45720" bIns="27432" rtlCol="0" anchor="t">
+            <a:noAutofit/>
+          </a:bodyPr>
+          <a:lstStyle/>
+          <a:p>
+            <a:pPr marL="0" indent="0" latinLnBrk="0">
+              <a:lnSpc>
+                <a:spcPct val="100000"/>
+              </a:lnSpc>
+              <a:buNone/>
+              <a:defRPr/>
+            </a:pPr>
+            <a:r>
+              <a:rPr kumimoji="1" lang="en-US" altLang="ko-KR" sz="900" i="1" dirty="0">
+                <a:solidFill>
+                  <a:srgbClr val="6B7280"/>
+                </a:solidFill>
+                <a:latin typeface="Calibri" panose="020F0502020204030204" pitchFamily="34" charset="0"/>
+                <a:ea typeface="-윤고딕340" pitchFamily="18" charset="-127"/>
+                <a:cs typeface="Calibri" panose="020F0502020204030204" pitchFamily="34" charset="0"/>
+              </a:rPr>
+              <a:t>Phuthi, Chem. Mater. (2026) · Muy, Chem. Mater. 37, 2395 (2025) · Alghamdi, J. Phys. Energy 8, 025013 (2026) · Grasselli, Digital Discovery 4, 2654 (2025)</a:t>
             </a:r>
           </a:p>
         </p:txBody>
@@ -15696,14 +16068,528 @@
                 <a:ea typeface="굴림" pitchFamily="50" charset="-127"/>
                 <a:cs typeface="Arial" panose="020B0604020202020204" pitchFamily="34" charset="0"/>
               </a:rPr>
-              <a:t>References</a:t>
+              <a:t>Summary</a:t>
             </a:r>
           </a:p>
         </p:txBody>
       </p:sp>
       <p:sp>
         <p:nvSpPr>
-          <p:cNvPr id="309" name="Refs left"/>
+          <p:cNvPr id="321" name="Summary Done"/>
+          <p:cNvSpPr/>
+          <p:nvPr/>
+        </p:nvSpPr>
+        <p:spPr>
+          <a:xfrm>
+            <a:off x="502920" y="1051560"/>
+            <a:ext cx="2651760" cy="3977640"/>
+          </a:xfrm>
+          <a:prstGeom prst="roundRect">
+            <a:avLst>
+              <a:gd name="adj" fmla="val 6000"/>
+            </a:avLst>
+          </a:prstGeom>
+          <a:solidFill>
+            <a:srgbClr val="E8F3EA"/>
+          </a:solidFill>
+          <a:ln>
+            <a:noFill/>
+          </a:ln>
+        </p:spPr>
+        <p:txBody>
+          <a:bodyPr wrap="square" lIns="146304" tIns="128016" rIns="146304" bIns="91440" rtlCol="0" anchor="t">
+            <a:noAutofit/>
+          </a:bodyPr>
+          <a:lstStyle/>
+          <a:p>
+            <a:pPr marL="0" indent="0" latinLnBrk="0">
+              <a:lnSpc>
+                <a:spcPct val="100000"/>
+              </a:lnSpc>
+              <a:spcAft>
+                <a:spcPts val="900"/>
+              </a:spcAft>
+              <a:buNone/>
+              <a:defRPr/>
+            </a:pPr>
+            <a:r>
+              <a:rPr kumimoji="1" lang="en-US" altLang="ko-KR" sz="1800" b="1" dirty="0">
+                <a:solidFill>
+                  <a:srgbClr val="1B5E20"/>
+                </a:solidFill>
+                <a:latin typeface="Calibri" panose="020F0502020204030204" pitchFamily="34" charset="0"/>
+                <a:ea typeface="-윤고딕340" pitchFamily="18" charset="-127"/>
+                <a:cs typeface="Calibri" panose="020F0502020204030204" pitchFamily="34" charset="0"/>
+              </a:rPr>
+              <a:t>Done</a:t>
+            </a:r>
+          </a:p>
+          <a:p>
+            <a:pPr marL="182880" indent="-182880" latinLnBrk="0">
+              <a:lnSpc>
+                <a:spcPct val="115000"/>
+              </a:lnSpc>
+              <a:spcAft>
+                <a:spcPts val="700"/>
+              </a:spcAft>
+              <a:buClr>
+                <a:srgbClr val="1F2937"/>
+              </a:buClr>
+              <a:buSzPct val="80000"/>
+              <a:buFont typeface="Arial" panose="020B0604020202020204" pitchFamily="34" charset="0"/>
+              <a:buChar char="•"/>
+              <a:defRPr/>
+            </a:pPr>
+            <a:r>
+              <a:rPr kumimoji="1" lang="en-US" altLang="ko-KR" sz="1400" dirty="0">
+                <a:solidFill>
+                  <a:srgbClr val="1F2937"/>
+                </a:solidFill>
+                <a:latin typeface="Calibri" panose="020F0502020204030204" pitchFamily="34" charset="0"/>
+                <a:ea typeface="-윤고딕340" pitchFamily="18" charset="-127"/>
+                <a:cs typeface="Calibri" panose="020F0502020204030204" pitchFamily="34" charset="0"/>
+              </a:rPr>
+              <a:t>Stage 1: all 91 precursors enumerated and relaxed (3,675 configurations)</a:t>
+            </a:r>
+          </a:p>
+          <a:p>
+            <a:pPr marL="182880" indent="-182880" latinLnBrk="0">
+              <a:lnSpc>
+                <a:spcPct val="115000"/>
+              </a:lnSpc>
+              <a:spcAft>
+                <a:spcPts val="700"/>
+              </a:spcAft>
+              <a:buClr>
+                <a:srgbClr val="1F2937"/>
+              </a:buClr>
+              <a:buSzPct val="80000"/>
+              <a:buFont typeface="Arial" panose="020B0604020202020204" pitchFamily="34" charset="0"/>
+              <a:buChar char="•"/>
+              <a:defRPr/>
+            </a:pPr>
+            <a:r>
+              <a:rPr kumimoji="1" lang="en-US" altLang="ko-KR" sz="1400" dirty="0">
+                <a:solidFill>
+                  <a:srgbClr val="1F2937"/>
+                </a:solidFill>
+                <a:latin typeface="Calibri" panose="020F0502020204030204" pitchFamily="34" charset="0"/>
+                <a:ea typeface="-윤고딕340" pitchFamily="18" charset="-127"/>
+                <a:cs typeface="Calibri" panose="020F0502020204030204" pitchFamily="34" charset="0"/>
+              </a:rPr>
+              <a:t>DFT equation of state; stability windows recomputed</a:t>
+            </a:r>
+          </a:p>
+          <a:p>
+            <a:pPr marL="182880" indent="-182880" latinLnBrk="0">
+              <a:lnSpc>
+                <a:spcPct val="115000"/>
+              </a:lnSpc>
+              <a:spcAft>
+                <a:spcPts val="700"/>
+              </a:spcAft>
+              <a:buClr>
+                <a:srgbClr val="1F2937"/>
+              </a:buClr>
+              <a:buSzPct val="80000"/>
+              <a:buFont typeface="Arial" panose="020B0604020202020204" pitchFamily="34" charset="0"/>
+              <a:buChar char="•"/>
+              <a:defRPr/>
+            </a:pPr>
+            <a:r>
+              <a:rPr kumimoji="1" lang="en-US" altLang="ko-KR" sz="1400" dirty="0">
+                <a:solidFill>
+                  <a:srgbClr val="1F2937"/>
+                </a:solidFill>
+                <a:latin typeface="Calibri" panose="020F0502020204030204" pitchFamily="34" charset="0"/>
+                <a:ea typeface="-윤고딕340" pitchFamily="18" charset="-127"/>
+                <a:cs typeface="Calibri" panose="020F0502020204030204" pitchFamily="34" charset="0"/>
+              </a:rPr>
+              <a:t>September audit → Stage-2 rules fixed before new results</a:t>
+            </a:r>
+          </a:p>
+        </p:txBody>
+      </p:sp>
+      <p:sp>
+        <p:nvSpPr>
+          <p:cNvPr id="322" name="Summary Running"/>
+          <p:cNvSpPr/>
+          <p:nvPr/>
+        </p:nvSpPr>
+        <p:spPr>
+          <a:xfrm>
+            <a:off x="3310128" y="1051560"/>
+            <a:ext cx="2651760" cy="3977640"/>
+          </a:xfrm>
+          <a:prstGeom prst="roundRect">
+            <a:avLst>
+              <a:gd name="adj" fmla="val 6000"/>
+            </a:avLst>
+          </a:prstGeom>
+          <a:solidFill>
+            <a:srgbClr val="E3EEF9"/>
+          </a:solidFill>
+          <a:ln>
+            <a:noFill/>
+          </a:ln>
+        </p:spPr>
+        <p:txBody>
+          <a:bodyPr wrap="square" lIns="146304" tIns="128016" rIns="146304" bIns="91440" rtlCol="0" anchor="t">
+            <a:noAutofit/>
+          </a:bodyPr>
+          <a:lstStyle/>
+          <a:p>
+            <a:pPr marL="0" indent="0" latinLnBrk="0">
+              <a:lnSpc>
+                <a:spcPct val="100000"/>
+              </a:lnSpc>
+              <a:spcAft>
+                <a:spcPts val="900"/>
+              </a:spcAft>
+              <a:buNone/>
+              <a:defRPr/>
+            </a:pPr>
+            <a:r>
+              <a:rPr kumimoji="1" lang="en-US" altLang="ko-KR" sz="1800" b="1" dirty="0">
+                <a:solidFill>
+                  <a:srgbClr val="0B5394"/>
+                </a:solidFill>
+                <a:latin typeface="Calibri" panose="020F0502020204030204" pitchFamily="34" charset="0"/>
+                <a:ea typeface="-윤고딕340" pitchFamily="18" charset="-127"/>
+                <a:cs typeface="Calibri" panose="020F0502020204030204" pitchFamily="34" charset="0"/>
+              </a:rPr>
+              <a:t>Running</a:t>
+            </a:r>
+          </a:p>
+          <a:p>
+            <a:pPr marL="182880" indent="-182880" latinLnBrk="0">
+              <a:lnSpc>
+                <a:spcPct val="115000"/>
+              </a:lnSpc>
+              <a:spcAft>
+                <a:spcPts val="700"/>
+              </a:spcAft>
+              <a:buClr>
+                <a:srgbClr val="1F2937"/>
+              </a:buClr>
+              <a:buSzPct val="80000"/>
+              <a:buFont typeface="Arial" panose="020B0604020202020204" pitchFamily="34" charset="0"/>
+              <a:buChar char="•"/>
+              <a:defRPr/>
+            </a:pPr>
+            <a:r>
+              <a:rPr kumimoji="1" lang="en-US" altLang="ko-KR" sz="1400" dirty="0">
+                <a:solidFill>
+                  <a:srgbClr val="1F2937"/>
+                </a:solidFill>
+                <a:latin typeface="Calibri" panose="020F0502020204030204" pitchFamily="34" charset="0"/>
+                <a:ea typeface="-윤고딕340" pitchFamily="18" charset="-127"/>
+                <a:cs typeface="Calibri" panose="020F0502020204030204" pitchFamily="34" charset="0"/>
+              </a:rPr>
+              <a:t>Stage-2 pilot: Li diffusivity ratio, Al₂O₃ vs Al₂S₃ (40 runs; ~Oct 21)</a:t>
+            </a:r>
+          </a:p>
+          <a:p>
+            <a:pPr marL="182880" indent="-182880" latinLnBrk="0">
+              <a:lnSpc>
+                <a:spcPct val="115000"/>
+              </a:lnSpc>
+              <a:spcAft>
+                <a:spcPts val="700"/>
+              </a:spcAft>
+              <a:buClr>
+                <a:srgbClr val="1F2937"/>
+              </a:buClr>
+              <a:buSzPct val="80000"/>
+              <a:buFont typeface="Arial" panose="020B0604020202020204" pitchFamily="34" charset="0"/>
+              <a:buChar char="•"/>
+              <a:defRPr/>
+            </a:pPr>
+            <a:r>
+              <a:rPr kumimoji="1" lang="en-US" altLang="ko-KR" sz="1400" dirty="0">
+                <a:solidFill>
+                  <a:srgbClr val="1F2937"/>
+                </a:solidFill>
+                <a:latin typeface="Calibri" panose="020F0502020204030204" pitchFamily="34" charset="0"/>
+                <a:ea typeface="-윤고딕340" pitchFamily="18" charset="-127"/>
+                <a:cs typeface="Calibri" panose="020F0502020204030204" pitchFamily="34" charset="0"/>
+              </a:rPr>
+              <a:t>DFT elastic constants</a:t>
+            </a:r>
+          </a:p>
+        </p:txBody>
+      </p:sp>
+      <p:sp>
+        <p:nvSpPr>
+          <p:cNvPr id="323" name="Summary Next"/>
+          <p:cNvSpPr/>
+          <p:nvPr/>
+        </p:nvSpPr>
+        <p:spPr>
+          <a:xfrm>
+            <a:off x="6117336" y="1051560"/>
+            <a:ext cx="2651760" cy="3977640"/>
+          </a:xfrm>
+          <a:prstGeom prst="roundRect">
+            <a:avLst>
+              <a:gd name="adj" fmla="val 6000"/>
+            </a:avLst>
+          </a:prstGeom>
+          <a:solidFill>
+            <a:srgbClr val="F3F4F6"/>
+          </a:solidFill>
+          <a:ln>
+            <a:noFill/>
+          </a:ln>
+        </p:spPr>
+        <p:txBody>
+          <a:bodyPr wrap="square" lIns="146304" tIns="128016" rIns="146304" bIns="91440" rtlCol="0" anchor="t">
+            <a:noAutofit/>
+          </a:bodyPr>
+          <a:lstStyle/>
+          <a:p>
+            <a:pPr marL="0" indent="0" latinLnBrk="0">
+              <a:lnSpc>
+                <a:spcPct val="100000"/>
+              </a:lnSpc>
+              <a:spcAft>
+                <a:spcPts val="900"/>
+              </a:spcAft>
+              <a:buNone/>
+              <a:defRPr/>
+            </a:pPr>
+            <a:r>
+              <a:rPr kumimoji="1" lang="en-US" altLang="ko-KR" sz="1800" b="1" dirty="0">
+                <a:solidFill>
+                  <a:srgbClr val="374151"/>
+                </a:solidFill>
+                <a:latin typeface="Calibri" panose="020F0502020204030204" pitchFamily="34" charset="0"/>
+                <a:ea typeface="-윤고딕340" pitchFamily="18" charset="-127"/>
+                <a:cs typeface="Calibri" panose="020F0502020204030204" pitchFamily="34" charset="0"/>
+              </a:rPr>
+              <a:t>Next</a:t>
+            </a:r>
+          </a:p>
+          <a:p>
+            <a:pPr marL="182880" indent="-182880" latinLnBrk="0">
+              <a:lnSpc>
+                <a:spcPct val="115000"/>
+              </a:lnSpc>
+              <a:spcAft>
+                <a:spcPts val="700"/>
+              </a:spcAft>
+              <a:buClr>
+                <a:srgbClr val="1F2937"/>
+              </a:buClr>
+              <a:buSzPct val="80000"/>
+              <a:buFont typeface="Arial" panose="020B0604020202020204" pitchFamily="34" charset="0"/>
+              <a:buChar char="•"/>
+              <a:defRPr/>
+            </a:pPr>
+            <a:r>
+              <a:rPr kumimoji="1" lang="en-US" altLang="ko-KR" sz="1400" dirty="0">
+                <a:solidFill>
+                  <a:srgbClr val="1F2937"/>
+                </a:solidFill>
+                <a:latin typeface="Calibri" panose="020F0502020204030204" pitchFamily="34" charset="0"/>
+                <a:ea typeface="-윤고딕340" pitchFamily="18" charset="-127"/>
+                <a:cs typeface="Calibri" panose="020F0502020204030204" pitchFamily="34" charset="0"/>
+              </a:rPr>
+              <a:t>Execution scope and ranking margin, fixed in advance</a:t>
+            </a:r>
+          </a:p>
+          <a:p>
+            <a:pPr marL="182880" indent="-182880" latinLnBrk="0">
+              <a:lnSpc>
+                <a:spcPct val="115000"/>
+              </a:lnSpc>
+              <a:spcAft>
+                <a:spcPts val="700"/>
+              </a:spcAft>
+              <a:buClr>
+                <a:srgbClr val="1F2937"/>
+              </a:buClr>
+              <a:buSzPct val="80000"/>
+              <a:buFont typeface="Arial" panose="020B0604020202020204" pitchFamily="34" charset="0"/>
+              <a:buChar char="•"/>
+              <a:defRPr/>
+            </a:pPr>
+            <a:r>
+              <a:rPr kumimoji="1" lang="en-US" altLang="ko-KR" sz="1400" dirty="0">
+                <a:solidFill>
+                  <a:srgbClr val="1F2937"/>
+                </a:solidFill>
+                <a:latin typeface="Calibri" panose="020F0502020204030204" pitchFamily="34" charset="0"/>
+                <a:ea typeface="-윤고딕340" pitchFamily="18" charset="-127"/>
+                <a:cs typeface="Calibri" panose="020F0502020204030204" pitchFamily="34" charset="0"/>
+              </a:rPr>
+              <a:t>Check Stage-1 descriptors against the measured transport</a:t>
+            </a:r>
+          </a:p>
+          <a:p>
+            <a:pPr marL="182880" indent="-182880" latinLnBrk="0">
+              <a:lnSpc>
+                <a:spcPct val="115000"/>
+              </a:lnSpc>
+              <a:spcAft>
+                <a:spcPts val="700"/>
+              </a:spcAft>
+              <a:buClr>
+                <a:srgbClr val="1F2937"/>
+              </a:buClr>
+              <a:buSzPct val="80000"/>
+              <a:buFont typeface="Arial" panose="020B0604020202020204" pitchFamily="34" charset="0"/>
+              <a:buChar char="•"/>
+              <a:defRPr/>
+            </a:pPr>
+            <a:r>
+              <a:rPr kumimoji="1" lang="en-US" altLang="ko-KR" sz="1400" dirty="0">
+                <a:solidFill>
+                  <a:srgbClr val="1F2937"/>
+                </a:solidFill>
+                <a:latin typeface="Calibri" panose="020F0502020204030204" pitchFamily="34" charset="0"/>
+                <a:ea typeface="-윤고딕340" pitchFamily="18" charset="-127"/>
+                <a:cs typeface="Calibri" panose="020F0502020204030204" pitchFamily="34" charset="0"/>
+              </a:rPr>
+              <a:t>Shortlist → DFT → experiment</a:t>
+            </a:r>
+          </a:p>
+        </p:txBody>
+      </p:sp>
+      <p:sp>
+        <p:nvSpPr>
+          <p:cNvPr id="324" name="Bottom line"/>
+          <p:cNvSpPr txBox="1"/>
+          <p:nvPr/>
+        </p:nvSpPr>
+        <p:spPr>
+          <a:xfrm>
+            <a:off x="502920" y="5257800"/>
+            <a:ext cx="8138160" cy="502920"/>
+          </a:xfrm>
+          <a:prstGeom prst="rect">
+            <a:avLst/>
+          </a:prstGeom>
+          <a:noFill/>
+        </p:spPr>
+        <p:txBody>
+          <a:bodyPr wrap="square" lIns="45720" tIns="27432" rIns="45720" bIns="27432" rtlCol="0" anchor="t">
+            <a:noAutofit/>
+          </a:bodyPr>
+          <a:lstStyle/>
+          <a:p>
+            <a:pPr marL="0" indent="0" latinLnBrk="0">
+              <a:lnSpc>
+                <a:spcPct val="100000"/>
+              </a:lnSpc>
+              <a:buNone/>
+              <a:defRPr/>
+            </a:pPr>
+            <a:r>
+              <a:rPr kumimoji="1" lang="en-US" altLang="ko-KR" sz="1500" dirty="0">
+                <a:solidFill>
+                  <a:srgbClr val="0070C0"/>
+                </a:solidFill>
+                <a:latin typeface="Calibri" panose="020F0502020204030204" pitchFamily="34" charset="0"/>
+                <a:ea typeface="-윤고딕340" pitchFamily="18" charset="-127"/>
+                <a:cs typeface="Calibri" panose="020F0502020204030204" pitchFamily="34" charset="0"/>
+              </a:rPr>
+              <a:t>No dopant ranking is claimed yet — </a:t>
+            </a:r>
+            <a:r>
+              <a:rPr kumimoji="1" lang="en-US" altLang="ko-KR" sz="1500" b="1" dirty="0">
+                <a:solidFill>
+                  <a:srgbClr val="0070C0"/>
+                </a:solidFill>
+                <a:latin typeface="Calibri" panose="020F0502020204030204" pitchFamily="34" charset="0"/>
+                <a:ea typeface="-윤고딕340" pitchFamily="18" charset="-127"/>
+                <a:cs typeface="Calibri" panose="020F0502020204030204" pitchFamily="34" charset="0"/>
+              </a:rPr>
+              <a:t>the screen proposes, predefined tests decide.</a:t>
+            </a:r>
+          </a:p>
+        </p:txBody>
+      </p:sp>
+    </p:spTree>
+    <p:extLst>
+      <p:ext uri="{BB962C8B-B14F-4D97-AF65-F5344CB8AC3E}">
+        <p14:creationId xmlns:p14="http://schemas.microsoft.com/office/powerpoint/2010/main" val="3937225348"/>
+      </p:ext>
+    </p:extLst>
+  </p:cSld>
+  <p:clrMapOvr>
+    <a:masterClrMapping/>
+  </p:clrMapOvr>
+</p:sld>
+</file>
+
+<file path=ppt/slides/slide29.xml><?xml version="1.0" encoding="utf-8"?>
+<p:sld xmlns:a="http://schemas.openxmlformats.org/drawingml/2006/main" xmlns:r="http://schemas.openxmlformats.org/officeDocument/2006/relationships" xmlns:p="http://schemas.openxmlformats.org/presentationml/2006/main">
+  <p:cSld>
+    <p:spTree>
+      <p:nvGrpSpPr>
+        <p:cNvPr id="1" name=""/>
+        <p:cNvGrpSpPr/>
+        <p:nvPr/>
+      </p:nvGrpSpPr>
+      <p:grpSpPr>
+        <a:xfrm>
+          <a:off x="0" y="0"/>
+          <a:ext cx="0" cy="0"/>
+          <a:chOff x="0" y="0"/>
+          <a:chExt cx="0" cy="0"/>
+        </a:xfrm>
+      </p:grpSpPr>
+      <p:sp>
+        <p:nvSpPr>
+          <p:cNvPr id="21" name="TextBox 20"/>
+          <p:cNvSpPr txBox="1"/>
+          <p:nvPr/>
+        </p:nvSpPr>
+        <p:spPr>
+          <a:xfrm>
+            <a:off x="530926" y="324246"/>
+            <a:ext cx="7992888" cy="369332"/>
+          </a:xfrm>
+          <a:prstGeom prst="rect">
+            <a:avLst/>
+          </a:prstGeom>
+          <a:noFill/>
+        </p:spPr>
+        <p:txBody>
+          <a:bodyPr wrap="square" lIns="0" tIns="0" rIns="0" bIns="0" rtlCol="0" anchor="ctr" anchorCtr="0">
+            <a:spAutoFit/>
+            <a:scene3d>
+              <a:camera prst="orthographicFront"/>
+              <a:lightRig rig="threePt" dir="t"/>
+            </a:scene3d>
+            <a:sp3d>
+              <a:bevelT w="1270" h="1270"/>
+              <a:bevelB w="1270" h="1270"/>
+            </a:sp3d>
+          </a:bodyPr>
+          <a:lstStyle/>
+          <a:p>
+            <a:pPr latinLnBrk="0">
+              <a:defRPr/>
+            </a:pPr>
+            <a:r>
+              <a:rPr lang="en-US" altLang="en-US" sz="2400" b="1" kern="0" spc="-30" dirty="0">
+                <a:solidFill>
+                  <a:schemeClr val="bg2"/>
+                </a:solidFill>
+                <a:latin typeface="Arial" panose="020B0604020202020204" pitchFamily="34" charset="0"/>
+                <a:ea typeface="굴림" pitchFamily="50" charset="-127"/>
+                <a:cs typeface="Arial" panose="020B0604020202020204" pitchFamily="34" charset="0"/>
+              </a:rPr>
+              <a:t>References</a:t>
+            </a:r>
+          </a:p>
+        </p:txBody>
+      </p:sp>
+      <p:sp>
+        <p:nvSpPr>
+          <p:cNvPr id="325" name="Refs left"/>
           <p:cNvSpPr txBox="1"/>
           <p:nvPr/>
         </p:nvSpPr>
@@ -16123,7 +17009,7 @@
       </p:sp>
       <p:sp>
         <p:nvSpPr>
-          <p:cNvPr id="310" name="Refs right"/>
+          <p:cNvPr id="326" name="Refs right"/>
           <p:cNvSpPr txBox="1"/>
           <p:nvPr/>
         </p:nvSpPr>
@@ -18571,28 +19457,6 @@
                           <a:ea typeface="+mn-ea"/>
                           <a:cs typeface="Calibri" panose="020F0502020204030204" pitchFamily="34" charset="0"/>
                         </a:rPr>
-                        <a:t>89</a:t>
-                      </a:r>
-                      <a:r>
-                        <a:rPr lang="en-US" sz="1050" kern="1200" dirty="0">
-                          <a:solidFill>
-                            <a:schemeClr val="bg1"/>
-                          </a:solidFill>
-                          <a:latin typeface="Calibri" panose="020F0502020204030204" pitchFamily="34" charset="0"/>
-                          <a:ea typeface="+mn-ea"/>
-                          <a:cs typeface="Calibri" panose="020F0502020204030204" pitchFamily="34" charset="0"/>
-                        </a:rPr>
-                        <a:t> (</a:t>
-                      </a:r>
-                      <a:r>
-                        <a:rPr sz="1050" kern="1200" dirty="0">
-                          <a:solidFill>
-                            <a:schemeClr val="bg1"/>
-                          </a:solidFill>
-                          <a:latin typeface="Calibri" panose="020F0502020204030204" pitchFamily="34" charset="0"/>
-                          <a:ea typeface="+mn-ea"/>
-                          <a:cs typeface="Calibri" panose="020F0502020204030204" pitchFamily="34" charset="0"/>
-                        </a:rPr>
                         <a:t>91</a:t>
                       </a:r>
                       <a:r>
@@ -18604,7 +19468,29 @@
                           <a:ea typeface="+mn-ea"/>
                           <a:cs typeface="Calibri" panose="020F0502020204030204" pitchFamily="34" charset="0"/>
                         </a:rPr>
-                        <a:t> planned)</a:t>
+                        <a:t/>
+                      </a:r>
+                      <a:r>
+                        <a:rPr sz="1050" kern="1200" dirty="0">
+                          <a:solidFill>
+                            <a:schemeClr val="bg1"/>
+                          </a:solidFill>
+                          <a:latin typeface="Calibri" panose="020F0502020204030204" pitchFamily="34" charset="0"/>
+                          <a:ea typeface="+mn-ea"/>
+                          <a:cs typeface="Calibri" panose="020F0502020204030204" pitchFamily="34" charset="0"/>
+                        </a:rPr>
+                        <a:t/>
+                      </a:r>
+                      <a:r>
+                        <a:rPr lang="en-US" sz="1050" kern="1200" dirty="0">
+                          <a:solidFill>
+                            <a:schemeClr val="bg1"/>
+                          </a:solidFill>
+                          <a:latin typeface="Calibri" panose="020F0502020204030204" pitchFamily="34" charset="0"/>
+                          <a:ea typeface="+mn-ea"/>
+                          <a:cs typeface="Calibri" panose="020F0502020204030204" pitchFamily="34" charset="0"/>
+                        </a:rPr>
+                        <a:t/>
                       </a:r>
                       <a:endParaRPr sz="1050" kern="1200" dirty="0">
                         <a:solidFill>
@@ -22492,7 +23378,7 @@
                 <a:ea typeface="-윤고딕340" pitchFamily="18" charset="-127"/>
                 <a:cs typeface="Calibri" panose="020F0502020204030204" pitchFamily="34" charset="0"/>
               </a:rPr>
-              <a:t>89 of 91 computed (As₂S₃: no valid configuration; AlI₃: incomplete).</a:t>
+              <a:t>All 91 relaxed — As₂S₃ and AlI₃ were completed in an August re-run.</a:t>
             </a:r>
           </a:p>
         </p:txBody>

--- a/kb/seminars/Research_Seminar_2026_10_13_cascade_progress.pptx
+++ b/kb/seminars/Research_Seminar_2026_10_13_cascade_progress.pptx
@@ -4255,7 +4255,7 @@
                 <a:ea typeface="-윤고딕340" pitchFamily="18" charset="-127"/>
                 <a:cs typeface="Calibri" panose="020F0502020204030204" pitchFamily="34" charset="0"/>
               </a:rPr>
-              <a:t>Low bond-valence site energy marks Li-accessible regions — a structural proxy, not a diffusion coefficient.</a:t>
+              <a:t>Low bond-valence site energy marks Li-accessible regions; it is a structural proxy for Li pathways.</a:t>
             </a:r>
           </a:p>
         </p:txBody>

--- a/kb/seminars/Research_Seminar_2026_10_13_cascade_progress.pptx
+++ b/kb/seminars/Research_Seminar_2026_10_13_cascade_progress.pptx
@@ -17005,6 +17005,29 @@
               <a:t>[15] Xu et al., Nano Energy 157, 112246 (2026)</a:t>
             </a:r>
           </a:p>
+          <a:p>
+            <a:pPr marL="0" indent="0" latinLnBrk="0">
+              <a:lnSpc>
+                <a:spcPct val="100000"/>
+              </a:lnSpc>
+              <a:spcAft>
+                <a:spcPts val="80"/>
+              </a:spcAft>
+              <a:buNone/>
+              <a:defRPr/>
+            </a:pPr>
+            <a:r>
+              <a:rPr kumimoji="1" lang="en-US" altLang="ko-KR" sz="1000" dirty="0">
+                <a:solidFill>
+                  <a:srgbClr val="1F2937"/>
+                </a:solidFill>
+                <a:latin typeface="Calibri" panose="020F0502020204030204" pitchFamily="34" charset="0"/>
+                <a:ea typeface="-윤고딕340" pitchFamily="18" charset="-127"/>
+                <a:cs typeface="Calibri" panose="020F0502020204030204" pitchFamily="34" charset="0"/>
+              </a:rPr>
+              <a:t>[16] Jung et al., Adv. Funct. Mater. (2026), doi:10.1002/adfm.78249</a:t>
+            </a:r>
+          </a:p>
         </p:txBody>
       </p:sp>
       <p:sp>
@@ -17074,7 +17097,7 @@
                 <a:ea typeface="-윤고딕340" pitchFamily="18" charset="-127"/>
                 <a:cs typeface="Calibri" panose="020F0502020204030204" pitchFamily="34" charset="0"/>
               </a:rPr>
-              <a:t>[16] Wood et al. (UMA), arXiv:2506.23971 (2026)</a:t>
+              <a:t>[17] Wood et al. (UMA), arXiv:2506.23971 (2026)</a:t>
             </a:r>
           </a:p>
           <a:p>
@@ -17097,7 +17120,7 @@
                 <a:ea typeface="-윤고딕340" pitchFamily="18" charset="-127"/>
                 <a:cs typeface="Calibri" panose="020F0502020204030204" pitchFamily="34" charset="0"/>
               </a:rPr>
-              <a:t>[17] Rao et al., Phys. Status Solidi A 208, 1804 (2011)</a:t>
+              <a:t>[18] Rao et al., Phys. Status Solidi A 208, 1804 (2011)</a:t>
             </a:r>
           </a:p>
           <a:p>
@@ -17120,7 +17143,7 @@
                 <a:ea typeface="-윤고딕340" pitchFamily="18" charset="-127"/>
                 <a:cs typeface="Calibri" panose="020F0502020204030204" pitchFamily="34" charset="0"/>
               </a:rPr>
-              <a:t>[18] Deng et al., J. Electrochem. Soc. 163, A67 (2016)</a:t>
+              <a:t>[19] Deng et al., J. Electrochem. Soc. 163, A67 (2016)</a:t>
             </a:r>
           </a:p>
           <a:p>
@@ -17143,7 +17166,7 @@
                 <a:ea typeface="-윤고딕340" pitchFamily="18" charset="-127"/>
                 <a:cs typeface="Calibri" panose="020F0502020204030204" pitchFamily="34" charset="0"/>
               </a:rPr>
-              <a:t>[19] Torii et al., J. Phys. Chem. C 129, 17882 (2025)</a:t>
+              <a:t>[20] Torii et al., J. Phys. Chem. C 129, 17882 (2025)</a:t>
             </a:r>
           </a:p>
           <a:p>
@@ -17166,7 +17189,7 @@
                 <a:ea typeface="-윤고딕340" pitchFamily="18" charset="-127"/>
                 <a:cs typeface="Calibri" panose="020F0502020204030204" pitchFamily="34" charset="0"/>
               </a:rPr>
-              <a:t>[20] Zhu et al., ACS Appl. Mater. Interfaces 7, 23685 (2015)</a:t>
+              <a:t>[21] Zhu et al., ACS Appl. Mater. Interfaces 7, 23685 (2015)</a:t>
             </a:r>
           </a:p>
           <a:p>
@@ -17189,7 +17212,7 @@
                 <a:ea typeface="-윤고딕340" pitchFamily="18" charset="-127"/>
                 <a:cs typeface="Calibri" panose="020F0502020204030204" pitchFamily="34" charset="0"/>
               </a:rPr>
-              <a:t>[21] Richards et al., Chem. Mater. 28, 266 (2016)</a:t>
+              <a:t>[22] Richards et al., Chem. Mater. 28, 266 (2016)</a:t>
             </a:r>
           </a:p>
           <a:p>
@@ -17212,7 +17235,7 @@
                 <a:ea typeface="-윤고딕340" pitchFamily="18" charset="-127"/>
                 <a:cs typeface="Calibri" panose="020F0502020204030204" pitchFamily="34" charset="0"/>
               </a:rPr>
-              <a:t>[22] Xiao et al., Nat. Rev. Mater. 5, 105 (2020)</a:t>
+              <a:t>[23] Xiao et al., Nat. Rev. Mater. 5, 105 (2020)</a:t>
             </a:r>
           </a:p>
           <a:p>
@@ -17235,7 +17258,7 @@
                 <a:ea typeface="-윤고딕340" pitchFamily="18" charset="-127"/>
                 <a:cs typeface="Calibri" panose="020F0502020204030204" pitchFamily="34" charset="0"/>
               </a:rPr>
-              <a:t>[23] Schwietert et al., Nat. Mater. 19, 428 (2020)</a:t>
+              <a:t>[24] Schwietert et al., Nat. Mater. 19, 428 (2020)</a:t>
             </a:r>
           </a:p>
           <a:p>
@@ -17258,7 +17281,30 @@
                 <a:ea typeface="-윤고딕340" pitchFamily="18" charset="-127"/>
                 <a:cs typeface="Calibri" panose="020F0502020204030204" pitchFamily="34" charset="0"/>
               </a:rPr>
-              <a:t>[24] Sundar et al., Adv. Sci. 12, e13191 (2025)</a:t>
+              <a:t>[25] Schwietert et al., JACS Au 1, 1488 (2021)</a:t>
+            </a:r>
+          </a:p>
+          <a:p>
+            <a:pPr marL="0" indent="0" latinLnBrk="0">
+              <a:lnSpc>
+                <a:spcPct val="100000"/>
+              </a:lnSpc>
+              <a:spcAft>
+                <a:spcPts val="80"/>
+              </a:spcAft>
+              <a:buNone/>
+              <a:defRPr/>
+            </a:pPr>
+            <a:r>
+              <a:rPr kumimoji="1" lang="en-US" altLang="ko-KR" sz="1000" dirty="0">
+                <a:solidFill>
+                  <a:srgbClr val="1F2937"/>
+                </a:solidFill>
+                <a:latin typeface="Calibri" panose="020F0502020204030204" pitchFamily="34" charset="0"/>
+                <a:ea typeface="-윤고딕340" pitchFamily="18" charset="-127"/>
+                <a:cs typeface="Calibri" panose="020F0502020204030204" pitchFamily="34" charset="0"/>
+              </a:rPr>
+              <a:t>[26] Sundar et al., Adv. Sci. 12, e13191 (2025)</a:t>
             </a:r>
           </a:p>
           <a:p>
@@ -17307,7 +17353,7 @@
                 <a:ea typeface="-윤고딕340" pitchFamily="18" charset="-127"/>
                 <a:cs typeface="Calibri" panose="020F0502020204030204" pitchFamily="34" charset="0"/>
               </a:rPr>
-              <a:t>[25] He et al., npj Comput. Mater. 4, 18 (2018)</a:t>
+              <a:t>[27] He et al., npj Comput. Mater. 4, 18 (2018)</a:t>
             </a:r>
           </a:p>
           <a:p>
@@ -17330,7 +17376,7 @@
                 <a:ea typeface="-윤고딕340" pitchFamily="18" charset="-127"/>
                 <a:cs typeface="Calibri" panose="020F0502020204030204" pitchFamily="34" charset="0"/>
               </a:rPr>
-              <a:t>[26] Phuthi et al., Chem. Mater. (2026), Perspective</a:t>
+              <a:t>[28] Phuthi et al., Chem. Mater. (2026), Perspective</a:t>
             </a:r>
           </a:p>
           <a:p>
@@ -17353,7 +17399,7 @@
                 <a:ea typeface="-윤고딕340" pitchFamily="18" charset="-127"/>
                 <a:cs typeface="Calibri" panose="020F0502020204030204" pitchFamily="34" charset="0"/>
               </a:rPr>
-              <a:t>[27] Marcolongo et al., Phys. Rev. Materials 1, 025402 (2017)</a:t>
+              <a:t>[29] Marcolongo et al., Phys. Rev. Materials 1, 025402 (2017)</a:t>
             </a:r>
           </a:p>
           <a:p>
@@ -17376,7 +17422,7 @@
                 <a:ea typeface="-윤고딕340" pitchFamily="18" charset="-127"/>
                 <a:cs typeface="Calibri" panose="020F0502020204030204" pitchFamily="34" charset="0"/>
               </a:rPr>
-              <a:t>[28] Alghamdi et al., J. Phys. Energy 8, 025013 (2026)</a:t>
+              <a:t>[30] Alghamdi et al., J. Phys. Energy 8, 025013 (2026)</a:t>
             </a:r>
           </a:p>
           <a:p>
@@ -17399,7 +17445,7 @@
                 <a:ea typeface="-윤고딕340" pitchFamily="18" charset="-127"/>
                 <a:cs typeface="Calibri" panose="020F0502020204030204" pitchFamily="34" charset="0"/>
               </a:rPr>
-              <a:t>[29] Grasselli et al., Digital Discovery 4, 2654 (2025)</a:t>
+              <a:t>[31] Grasselli et al., Digital Discovery 4, 2654 (2025)</a:t>
             </a:r>
           </a:p>
         </p:txBody>

--- a/kb/seminars/Research_Seminar_2026_10_13_cascade_progress.pptx
+++ b/kb/seminars/Research_Seminar_2026_10_13_cascade_progress.pptx
@@ -3742,7 +3742,7 @@
                 <a:ea typeface="-윤고딕340" pitchFamily="18" charset="-127"/>
                 <a:cs typeface="Calibri" panose="020F0502020204030204" pitchFamily="34" charset="0"/>
               </a:rPr>
-              <a:t>A short anneal (500 K, 50 ps) moves each structure out of its local minimum.</a:t>
+              <a:t>A short anneal (500 K, 50 ps) moves selected structures out of their local minimum.</a:t>
             </a:r>
           </a:p>
         </p:txBody>

--- a/kb/seminars/Research_Seminar_2026_10_13_cascade_progress.pptx
+++ b/kb/seminars/Research_Seminar_2026_10_13_cascade_progress.pptx
@@ -6808,7 +6808,7 @@
                 <a:ea typeface="-윤고딕340" pitchFamily="18" charset="-127"/>
                 <a:cs typeface="Calibri" panose="020F0502020204030204" pitchFamily="34" charset="0"/>
               </a:rPr>
-              <a:t>Li₂S (SEI component)</a:t>
+              <a:t>Li₂S–Li₆PS₅Cl interphase</a:t>
             </a:r>
           </a:p>
         </p:txBody>
@@ -6902,7 +6902,7 @@
                 <a:ea typeface="-윤고딕340" pitchFamily="18" charset="-127"/>
                 <a:cs typeface="Calibri" panose="020F0502020204030204" pitchFamily="34" charset="0"/>
               </a:rPr>
-              <a:t>Li-vacancy migration barrier (NEB, charged cell) and supercell-size convergence</a:t>
+              <a:t>Amorphous interphase in Li₂S composite cathodes: glass model, DFT-checked MLIP, MLIP-MD — with a collaborator</a:t>
             </a:r>
           </a:p>
         </p:txBody>

--- a/kb/seminars/Research_Seminar_2026_10_13_cascade_progress.pptx
+++ b/kb/seminars/Research_Seminar_2026_10_13_cascade_progress.pptx
@@ -18259,7 +18259,7 @@
                           <a:ea typeface="+mn-ea"/>
                           <a:cs typeface="Calibri" panose="020F0502020204030204" pitchFamily="34" charset="0"/>
                         </a:rPr>
-                        <a:t>Miara 2015 (via Anderson)</a:t>
+                        <a:t>Miara 2015</a:t>
                       </a:r>
                     </a:p>
                   </a:txBody>
@@ -18387,7 +18387,7 @@
                           <a:ea typeface="+mn-ea"/>
                           <a:cs typeface="Calibri" panose="020F0502020204030204" pitchFamily="34" charset="0"/>
                         </a:rPr>
-                        <a:t>one cation, 3 sites</a:t>
+                        <a:t>one cation, 3 sites (Li, La, Zr)</a:t>
                       </a:r>
                     </a:p>
                   </a:txBody>
@@ -18457,7 +18457,7 @@
                           <a:ea typeface="+mn-ea"/>
                           <a:cs typeface="Calibri" panose="020F0502020204030204" pitchFamily="34" charset="0"/>
                         </a:rPr>
-                        <a:t>45</a:t>
+                        <a:t>128</a:t>
                       </a:r>
                     </a:p>
                   </a:txBody>
@@ -18732,7 +18732,7 @@
                           <a:ea typeface="+mn-ea"/>
                           <a:cs typeface="Calibri" panose="020F0502020204030204" pitchFamily="34" charset="0"/>
                         </a:rPr>
-                        <a:t>elements already in the formula</a:t>
+                        <a:t>P-site cations and halides</a:t>
                       </a:r>
                     </a:p>
                   </a:txBody>
@@ -19018,7 +19018,7 @@
                           <a:ea typeface="+mn-ea"/>
                           <a:cs typeface="Calibri" panose="020F0502020204030204" pitchFamily="34" charset="0"/>
                         </a:rPr>
-                        <a:t> — free coating</a:t>
+                        <a:t> — coating layer</a:t>
                       </a:r>
                     </a:p>
                   </a:txBody>
@@ -19778,7 +19778,7 @@
                 <a:ea typeface="-윤고딕340" pitchFamily="18" charset="-127"/>
                 <a:cs typeface="Calibri" panose="020F0502020204030204" pitchFamily="34" charset="0"/>
               </a:rPr>
-              <a:t>Earlier screens place one element on a site, or screen hostless compounds.</a:t>
+              <a:t>Earlier screens varied elements, or a coating compound without a host.</a:t>
             </a:r>
           </a:p>
           <a:p>
@@ -19803,7 +19803,7 @@
                 <a:ea typeface="-윤고딕340" pitchFamily="18" charset="-127"/>
                 <a:cs typeface="Calibri" panose="020F0502020204030204" pitchFamily="34" charset="0"/>
               </a:rPr>
-              <a:t>Here a </a:t>
+              <a:t>Here one </a:t>
             </a:r>
             <a:r>
               <a:rPr kumimoji="1" lang="en-US" altLang="ko-KR" sz="1500" dirty="0">
@@ -19825,7 +19825,7 @@
                 <a:ea typeface="-윤고딕340" pitchFamily="18" charset="-127"/>
                 <a:cs typeface="Calibri" panose="020F0502020204030204" pitchFamily="34" charset="0"/>
               </a:rPr>
-              <a:t> fills one cation and one anion site at once.</a:t>
+              <a:t> adds its cation and anion together, in its formula ratio.</a:t>
             </a:r>
           </a:p>
         </p:txBody>
@@ -19868,7 +19868,7 @@
                 <a:ea typeface="-윤고딕340" pitchFamily="18" charset="-127"/>
                 <a:cs typeface="Calibri" panose="020F0502020204030204" pitchFamily="34" charset="0"/>
               </a:rPr>
-              <a:t>Chem. Mater. 27, 4040 (2015) · Adv. Energy Mater. 14, 2304025 (2024)</a:t>
+              <a:t>Chem. Mater. 27, 4040 (2015) · Joule 3, 1252 (2019)</a:t>
             </a:r>
           </a:p>
           <a:p>
@@ -19888,7 +19888,7 @@
                 <a:ea typeface="-윤고딕340" pitchFamily="18" charset="-127"/>
                 <a:cs typeface="Calibri" panose="020F0502020204030204" pitchFamily="34" charset="0"/>
               </a:rPr>
-              <a:t>J. Mater. Chem. A 12, 7272 (2024) · Joule 3, 1252 (2019)</a:t>
+              <a:t>J. Mater. Chem. A 12, 7272 (2024)</a:t>
             </a:r>
           </a:p>
         </p:txBody>

--- a/kb/seminars/Research_Seminar_2026_10_13_cascade_progress.pptx
+++ b/kb/seminars/Research_Seminar_2026_10_13_cascade_progress.pptx
@@ -19614,7 +19614,7 @@
                           <a:ea typeface="+mn-ea"/>
                           <a:cs typeface="Calibri" panose="020F0502020204030204" pitchFamily="34" charset="0"/>
                         </a:rPr>
-                        <a:t>DFT reference + MLIP descriptor (not a gate)</a:t>
+                        <a:t>DFT reference + MLIP descriptor</a:t>
                       </a:r>
                       <a:br>
                         <a:rPr lang="en-US" sz="1050" kern="1200" dirty="0">
@@ -19626,7 +19626,7 @@
                           <a:cs typeface="Calibri" panose="020F0502020204030204" pitchFamily="34" charset="0"/>
                         </a:rPr>
                       </a:br>
-                      <a:br>
+                      <a:r>
                         <a:rPr lang="en-US" sz="1050" kern="1200" dirty="0">
                           <a:solidFill>
                             <a:srgbClr val="0070C0"/>
@@ -19635,7 +19635,8 @@
                           <a:ea typeface="+mn-ea"/>
                           <a:cs typeface="Calibri" panose="020F0502020204030204" pitchFamily="34" charset="0"/>
                         </a:rPr>
-                      </a:br>
+                        <a:t>(not used for screening)</a:t>
+                      </a:r>
                       <a:endParaRPr sz="1050" kern="1200" dirty="0">
                         <a:solidFill>
                           <a:srgbClr val="0070C0"/>

--- a/kb/seminars/Research_Seminar_2026_10_13_cascade_progress.pptx
+++ b/kb/seminars/Research_Seminar_2026_10_13_cascade_progress.pptx
@@ -20362,7 +20362,7 @@
                           <a:ea typeface="Calibri" panose="020F0502020204030204" pitchFamily="34" charset="0"/>
                           <a:cs typeface="Calibri" panose="020F0502020204030204" pitchFamily="34" charset="0"/>
                         </a:rPr>
-                        <a:t>role in the design</a:t>
+                        <a:t>anion vs. host</a:t>
                       </a:r>
                     </a:p>
                   </a:txBody>
@@ -20645,7 +20645,7 @@
                           <a:ea typeface="Calibri" panose="020F0502020204030204" pitchFamily="34" charset="0"/>
                           <a:cs typeface="Calibri" panose="020F0502020204030204" pitchFamily="34" charset="0"/>
                         </a:rPr>
-                        <a:t>strong M–O bonds</a:t>
+                        <a:t>O²⁻, smaller than S²⁻</a:t>
                       </a:r>
                     </a:p>
                   </a:txBody>
@@ -20983,7 +20983,7 @@
                           <a:ea typeface="Calibri" panose="020F0502020204030204" pitchFamily="34" charset="0"/>
                           <a:cs typeface="Calibri" panose="020F0502020204030204" pitchFamily="34" charset="0"/>
                         </a:rPr>
-                        <a:t>the host already has Cl</a:t>
+                        <a:t>Cl⁻, already in the host</a:t>
                       </a:r>
                     </a:p>
                   </a:txBody>
@@ -21321,128 +21321,7 @@
                           <a:ea typeface="Calibri" panose="020F0502020204030204" pitchFamily="34" charset="0"/>
                           <a:cs typeface="Calibri" panose="020F0502020204030204" pitchFamily="34" charset="0"/>
                         </a:rPr>
-                        <a:t>control</a:t>
-                      </a:r>
-                      <a:r>
-                        <a:rPr lang="ko-KR" altLang="en-US" sz="1300" b="0" kern="1200" dirty="0">
-                          <a:solidFill>
-                            <a:schemeClr val="bg1"/>
-                          </a:solidFill>
-                          <a:latin typeface="Calibri" panose="020F0502020204030204" pitchFamily="34" charset="0"/>
-                          <a:ea typeface="+mn-ea"/>
-                          <a:cs typeface="Calibri" panose="020F0502020204030204" pitchFamily="34" charset="0"/>
-                        </a:rPr>
-                        <a:t> </a:t>
-                      </a:r>
-                      <a:r>
-                        <a:rPr lang="en-US" altLang="ko-KR" sz="1300" b="0" kern="1200" dirty="0">
-                          <a:solidFill>
-                            <a:schemeClr val="bg1"/>
-                          </a:solidFill>
-                          <a:latin typeface="Calibri" panose="020F0502020204030204" pitchFamily="34" charset="0"/>
-                          <a:ea typeface="Calibri" panose="020F0502020204030204" pitchFamily="34" charset="0"/>
-                          <a:cs typeface="Calibri" panose="020F0502020204030204" pitchFamily="34" charset="0"/>
-                        </a:rPr>
-                        <a:t>— </a:t>
-                      </a:r>
-                      <a:r>
-                        <a:rPr lang="en-US" altLang="ko-KR" sz="1300" b="0" kern="1200" dirty="0" err="1">
-                          <a:solidFill>
-                            <a:schemeClr val="bg1"/>
-                          </a:solidFill>
-                          <a:latin typeface="Calibri" panose="020F0502020204030204" pitchFamily="34" charset="0"/>
-                          <a:ea typeface="Calibri" panose="020F0502020204030204" pitchFamily="34" charset="0"/>
-                          <a:cs typeface="Calibri" panose="020F0502020204030204" pitchFamily="34" charset="0"/>
-                        </a:rPr>
-                        <a:t>same</a:t>
-                      </a:r>
-                      <a:r>
-                        <a:rPr lang="ko-KR" altLang="en-US" sz="1300" b="0" kern="1200" dirty="0">
-                          <a:solidFill>
-                            <a:schemeClr val="bg1"/>
-                          </a:solidFill>
-                          <a:latin typeface="Calibri" panose="020F0502020204030204" pitchFamily="34" charset="0"/>
-                          <a:ea typeface="+mn-ea"/>
-                          <a:cs typeface="Calibri" panose="020F0502020204030204" pitchFamily="34" charset="0"/>
-                        </a:rPr>
-                        <a:t> </a:t>
-                      </a:r>
-                      <a:r>
-                        <a:rPr lang="en-US" altLang="ko-KR" sz="1300" b="0" kern="1200" dirty="0" err="1">
-                          <a:solidFill>
-                            <a:schemeClr val="bg1"/>
-                          </a:solidFill>
-                          <a:latin typeface="Calibri" panose="020F0502020204030204" pitchFamily="34" charset="0"/>
-                          <a:ea typeface="Calibri" panose="020F0502020204030204" pitchFamily="34" charset="0"/>
-                          <a:cs typeface="Calibri" panose="020F0502020204030204" pitchFamily="34" charset="0"/>
-                        </a:rPr>
-                        <a:t>anion</a:t>
-                      </a:r>
-                      <a:r>
-                        <a:rPr lang="ko-KR" altLang="en-US" sz="1300" b="0" kern="1200" dirty="0">
-                          <a:solidFill>
-                            <a:schemeClr val="bg1"/>
-                          </a:solidFill>
-                          <a:latin typeface="Calibri" panose="020F0502020204030204" pitchFamily="34" charset="0"/>
-                          <a:ea typeface="+mn-ea"/>
-                          <a:cs typeface="Calibri" panose="020F0502020204030204" pitchFamily="34" charset="0"/>
-                        </a:rPr>
-                        <a:t> </a:t>
-                      </a:r>
-                      <a:r>
-                        <a:rPr lang="en-US" altLang="ko-KR" sz="1300" b="0" kern="1200" dirty="0" err="1">
-                          <a:solidFill>
-                            <a:schemeClr val="bg1"/>
-                          </a:solidFill>
-                          <a:latin typeface="Calibri" panose="020F0502020204030204" pitchFamily="34" charset="0"/>
-                          <a:ea typeface="Calibri" panose="020F0502020204030204" pitchFamily="34" charset="0"/>
-                          <a:cs typeface="Calibri" panose="020F0502020204030204" pitchFamily="34" charset="0"/>
-                        </a:rPr>
-                        <a:t>as</a:t>
-                      </a:r>
-                      <a:r>
-                        <a:rPr lang="ko-KR" altLang="en-US" sz="1300" b="0" kern="1200" dirty="0">
-                          <a:solidFill>
-                            <a:schemeClr val="bg1"/>
-                          </a:solidFill>
-                          <a:latin typeface="Calibri" panose="020F0502020204030204" pitchFamily="34" charset="0"/>
-                          <a:ea typeface="+mn-ea"/>
-                          <a:cs typeface="Calibri" panose="020F0502020204030204" pitchFamily="34" charset="0"/>
-                        </a:rPr>
-                        <a:t> </a:t>
-                      </a:r>
-                      <a:r>
-                        <a:rPr lang="en-US" altLang="ko-KR" sz="1300" b="0" kern="1200" dirty="0" err="1">
-                          <a:solidFill>
-                            <a:schemeClr val="bg1"/>
-                          </a:solidFill>
-                          <a:latin typeface="Calibri" panose="020F0502020204030204" pitchFamily="34" charset="0"/>
-                          <a:ea typeface="Calibri" panose="020F0502020204030204" pitchFamily="34" charset="0"/>
-                          <a:cs typeface="Calibri" panose="020F0502020204030204" pitchFamily="34" charset="0"/>
-                        </a:rPr>
-                        <a:t>the</a:t>
-                      </a:r>
-                      <a:r>
-                        <a:rPr lang="ko-KR" altLang="en-US" sz="1300" b="0" kern="1200" dirty="0">
-                          <a:solidFill>
-                            <a:schemeClr val="bg1"/>
-                          </a:solidFill>
-                          <a:latin typeface="Calibri" panose="020F0502020204030204" pitchFamily="34" charset="0"/>
-                          <a:ea typeface="+mn-ea"/>
-                          <a:cs typeface="Calibri" panose="020F0502020204030204" pitchFamily="34" charset="0"/>
-                        </a:rPr>
-                        <a:t> </a:t>
-                      </a:r>
-                      <a:r>
-                        <a:rPr lang="en-US" altLang="ko-KR" sz="1300" b="0" kern="1200" dirty="0" err="1">
-                          <a:solidFill>
-                            <a:schemeClr val="bg1"/>
-                          </a:solidFill>
-                          <a:latin typeface="Calibri" panose="020F0502020204030204" pitchFamily="34" charset="0"/>
-                          <a:ea typeface="Calibri" panose="020F0502020204030204" pitchFamily="34" charset="0"/>
-                          <a:cs typeface="Calibri" panose="020F0502020204030204" pitchFamily="34" charset="0"/>
-                        </a:rPr>
-                        <a:t>host</a:t>
+                        <a:t>S²⁻, already in the host</a:t>
                       </a:r>
                       <a:endParaRPr lang="ko-KR" altLang="en-US" sz="1300" b="0" kern="1200" dirty="0">
                         <a:solidFill>
@@ -21810,73 +21689,7 @@
                           <a:ea typeface="Calibri" panose="020F0502020204030204" pitchFamily="34" charset="0"/>
                           <a:cs typeface="Calibri" panose="020F0502020204030204" pitchFamily="34" charset="0"/>
                         </a:rPr>
-                        <a:t>strongest</a:t>
-                      </a:r>
-                      <a:r>
-                        <a:rPr lang="ko-KR" altLang="en-US" sz="1300" b="0" kern="1200" dirty="0">
-                          <a:solidFill>
-                            <a:schemeClr val="bg1"/>
-                          </a:solidFill>
-                          <a:latin typeface="Calibri" panose="020F0502020204030204" pitchFamily="34" charset="0"/>
-                          <a:ea typeface="+mn-ea"/>
-                          <a:cs typeface="Calibri" panose="020F0502020204030204" pitchFamily="34" charset="0"/>
-                        </a:rPr>
-                        <a:t> </a:t>
-                      </a:r>
-                      <a:r>
-                        <a:rPr lang="en-US" altLang="ko-KR" sz="1300" b="0" kern="1200" dirty="0" err="1">
-                          <a:solidFill>
-                            <a:schemeClr val="bg1"/>
-                          </a:solidFill>
-                          <a:latin typeface="Calibri" panose="020F0502020204030204" pitchFamily="34" charset="0"/>
-                          <a:ea typeface="Calibri" panose="020F0502020204030204" pitchFamily="34" charset="0"/>
-                          <a:cs typeface="Calibri" panose="020F0502020204030204" pitchFamily="34" charset="0"/>
-                        </a:rPr>
-                        <a:t>bonds</a:t>
-                      </a:r>
-                      <a:r>
-                        <a:rPr lang="en-US" altLang="ko-KR" sz="1300" b="0" kern="1200" dirty="0">
-                          <a:solidFill>
-                            <a:schemeClr val="bg1"/>
-                          </a:solidFill>
-                          <a:latin typeface="Calibri" panose="020F0502020204030204" pitchFamily="34" charset="0"/>
-                          <a:ea typeface="Calibri" panose="020F0502020204030204" pitchFamily="34" charset="0"/>
-                          <a:cs typeface="Calibri" panose="020F0502020204030204" pitchFamily="34" charset="0"/>
-                        </a:rPr>
-                        <a:t>, </a:t>
-                      </a:r>
-                      <a:r>
-                        <a:rPr lang="en-US" altLang="ko-KR" sz="1300" b="0" kern="1200" dirty="0" err="1">
-                          <a:solidFill>
-                            <a:schemeClr val="bg1"/>
-                          </a:solidFill>
-                          <a:latin typeface="Calibri" panose="020F0502020204030204" pitchFamily="34" charset="0"/>
-                          <a:ea typeface="Calibri" panose="020F0502020204030204" pitchFamily="34" charset="0"/>
-                          <a:cs typeface="Calibri" panose="020F0502020204030204" pitchFamily="34" charset="0"/>
-                        </a:rPr>
-                        <a:t>mobility</a:t>
-                      </a:r>
-                      <a:r>
-                        <a:rPr lang="ko-KR" altLang="en-US" sz="1300" b="0" kern="1200" dirty="0">
-                          <a:solidFill>
-                            <a:schemeClr val="bg1"/>
-                          </a:solidFill>
-                          <a:latin typeface="Calibri" panose="020F0502020204030204" pitchFamily="34" charset="0"/>
-                          <a:ea typeface="+mn-ea"/>
-                          <a:cs typeface="Calibri" panose="020F0502020204030204" pitchFamily="34" charset="0"/>
-                        </a:rPr>
-                        <a:t> </a:t>
-                      </a:r>
-                      <a:r>
-                        <a:rPr lang="en-US" altLang="ko-KR" sz="1300" b="0" kern="1200" dirty="0" err="1">
-                          <a:solidFill>
-                            <a:schemeClr val="bg1"/>
-                          </a:solidFill>
-                          <a:latin typeface="Calibri" panose="020F0502020204030204" pitchFamily="34" charset="0"/>
-                          <a:ea typeface="Calibri" panose="020F0502020204030204" pitchFamily="34" charset="0"/>
-                          <a:cs typeface="Calibri" panose="020F0502020204030204" pitchFamily="34" charset="0"/>
-                        </a:rPr>
-                        <a:t>risk</a:t>
+                        <a:t>F⁻, smaller than Cl⁻</a:t>
                       </a:r>
                       <a:endParaRPr lang="ko-KR" altLang="en-US" sz="1300" b="0" kern="1200" dirty="0">
                         <a:solidFill>
@@ -22244,29 +22057,7 @@
                           <a:ea typeface="Calibri" panose="020F0502020204030204" pitchFamily="34" charset="0"/>
                           <a:cs typeface="Calibri" panose="020F0502020204030204" pitchFamily="34" charset="0"/>
                         </a:rPr>
-                        <a:t>control</a:t>
-                      </a:r>
-                      <a:r>
-                        <a:rPr lang="ko-KR" altLang="en-US" sz="1300" b="0" kern="1200" dirty="0">
-                          <a:solidFill>
-                            <a:schemeClr val="bg1"/>
-                          </a:solidFill>
-                          <a:latin typeface="Calibri" panose="020F0502020204030204" pitchFamily="34" charset="0"/>
-                          <a:ea typeface="+mn-ea"/>
-                          <a:cs typeface="Calibri" panose="020F0502020204030204" pitchFamily="34" charset="0"/>
-                        </a:rPr>
-                        <a:t> </a:t>
-                      </a:r>
-                      <a:r>
-                        <a:rPr lang="en-US" altLang="ko-KR" sz="1300" b="0" kern="1200" dirty="0">
-                          <a:solidFill>
-                            <a:schemeClr val="bg1"/>
-                          </a:solidFill>
-                          <a:latin typeface="Calibri" panose="020F0502020204030204" pitchFamily="34" charset="0"/>
-                          <a:ea typeface="Calibri" panose="020F0502020204030204" pitchFamily="34" charset="0"/>
-                          <a:cs typeface="Calibri" panose="020F0502020204030204" pitchFamily="34" charset="0"/>
-                        </a:rPr>
-                        <a:t>— larger halide</a:t>
+                        <a:t>Br⁻, larger than Cl⁻</a:t>
                       </a:r>
                     </a:p>
                   </a:txBody>
@@ -22604,29 +22395,7 @@
                           <a:ea typeface="Calibri" panose="020F0502020204030204" pitchFamily="34" charset="0"/>
                           <a:cs typeface="Calibri" panose="020F0502020204030204" pitchFamily="34" charset="0"/>
                         </a:rPr>
-                        <a:t>control</a:t>
-                      </a:r>
-                      <a:r>
-                        <a:rPr lang="ko-KR" altLang="en-US" sz="1300" b="0" kern="1200" dirty="0">
-                          <a:solidFill>
-                            <a:schemeClr val="bg1"/>
-                          </a:solidFill>
-                          <a:latin typeface="Calibri" panose="020F0502020204030204" pitchFamily="34" charset="0"/>
-                          <a:ea typeface="+mn-ea"/>
-                          <a:cs typeface="Calibri" panose="020F0502020204030204" pitchFamily="34" charset="0"/>
-                        </a:rPr>
-                        <a:t> </a:t>
-                      </a:r>
-                      <a:r>
-                        <a:rPr lang="en-US" altLang="ko-KR" sz="1300" b="0" kern="1200" dirty="0">
-                          <a:solidFill>
-                            <a:schemeClr val="bg1"/>
-                          </a:solidFill>
-                          <a:latin typeface="Calibri" panose="020F0502020204030204" pitchFamily="34" charset="0"/>
-                          <a:ea typeface="Calibri" panose="020F0502020204030204" pitchFamily="34" charset="0"/>
-                          <a:cs typeface="Calibri" panose="020F0502020204030204" pitchFamily="34" charset="0"/>
-                        </a:rPr>
-                        <a:t>— higher anion charge</a:t>
+                        <a:t>N³⁻, higher charge than S²⁻</a:t>
                       </a:r>
                     </a:p>
                   </a:txBody>
@@ -23041,29 +22810,7 @@
                           <a:ea typeface="Calibri" panose="020F0502020204030204" pitchFamily="34" charset="0"/>
                           <a:cs typeface="Calibri" panose="020F0502020204030204" pitchFamily="34" charset="0"/>
                         </a:rPr>
-                        <a:t>control</a:t>
-                      </a:r>
-                      <a:r>
-                        <a:rPr lang="ko-KR" altLang="en-US" sz="1300" b="0" kern="1200" dirty="0">
-                          <a:solidFill>
-                            <a:schemeClr val="bg1"/>
-                          </a:solidFill>
-                          <a:latin typeface="Calibri" panose="020F0502020204030204" pitchFamily="34" charset="0"/>
-                          <a:ea typeface="+mn-ea"/>
-                          <a:cs typeface="Calibri" panose="020F0502020204030204" pitchFamily="34" charset="0"/>
-                        </a:rPr>
-                        <a:t> </a:t>
-                      </a:r>
-                      <a:r>
-                        <a:rPr lang="en-US" altLang="ko-KR" sz="1300" b="0" kern="1200" dirty="0">
-                          <a:solidFill>
-                            <a:schemeClr val="bg1"/>
-                          </a:solidFill>
-                          <a:latin typeface="Calibri" panose="020F0502020204030204" pitchFamily="34" charset="0"/>
-                          <a:ea typeface="Calibri" panose="020F0502020204030204" pitchFamily="34" charset="0"/>
-                          <a:cs typeface="Calibri" panose="020F0502020204030204" pitchFamily="34" charset="0"/>
-                        </a:rPr>
-                        <a:t>— largest halide</a:t>
+                        <a:t>I⁻, much larger than Cl⁻</a:t>
                       </a:r>
                     </a:p>
                   </a:txBody>
@@ -23375,7 +23122,7 @@
                 <a:ea typeface="-윤고딕340" pitchFamily="18" charset="-127"/>
                 <a:cs typeface="Calibri" panose="020F0502020204030204" pitchFamily="34" charset="0"/>
               </a:rPr>
-              <a:t>Candidate set: 91 precursor compounds in seven anion families</a:t>
+              <a:t>91 precursors in seven anion families</a:t>
             </a:r>
           </a:p>
           <a:p>
@@ -23400,7 +23147,29 @@
                 <a:ea typeface="-윤고딕340" pitchFamily="18" charset="-127"/>
                 <a:cs typeface="Calibri" panose="020F0502020204030204" pitchFamily="34" charset="0"/>
               </a:rPr>
-              <a:t>Cations +1 to +6, anions O²⁻ to I⁻; only existing compounds are used.</a:t>
+              <a:t>Every precursor is an </a:t>
+            </a:r>
+            <a:r>
+              <a:rPr kumimoji="1" lang="en-US" altLang="ko-KR" sz="1500" dirty="0">
+                <a:solidFill>
+                  <a:srgbClr val="0070C0"/>
+                </a:solidFill>
+                <a:latin typeface="Calibri" panose="020F0502020204030204" pitchFamily="34" charset="0"/>
+                <a:ea typeface="-윤고딕340" pitchFamily="18" charset="-127"/>
+                <a:cs typeface="Calibri" panose="020F0502020204030204" pitchFamily="34" charset="0"/>
+              </a:rPr>
+              <a:t>existing compound</a:t>
+            </a:r>
+            <a:r>
+              <a:rPr kumimoji="1" lang="en-US" altLang="ko-KR" sz="1500" dirty="0">
+                <a:solidFill>
+                  <a:schemeClr val="bg1"/>
+                </a:solidFill>
+                <a:latin typeface="Calibri" panose="020F0502020204030204" pitchFamily="34" charset="0"/>
+                <a:ea typeface="-윤고딕340" pitchFamily="18" charset="-127"/>
+                <a:cs typeface="Calibri" panose="020F0502020204030204" pitchFamily="34" charset="0"/>
+              </a:rPr>
+              <a:t>, with a cation from +1 to +6.</a:t>
             </a:r>
           </a:p>
           <a:p>
@@ -23419,13 +23188,24 @@
             <a:r>
               <a:rPr kumimoji="1" lang="en-US" altLang="ko-KR" sz="1500" dirty="0">
                 <a:solidFill>
+                  <a:srgbClr val="0070C0"/>
+                </a:solidFill>
+                <a:latin typeface="Calibri" panose="020F0502020204030204" pitchFamily="34" charset="0"/>
+                <a:ea typeface="-윤고딕340" pitchFamily="18" charset="-127"/>
+                <a:cs typeface="Calibri" panose="020F0502020204030204" pitchFamily="34" charset="0"/>
+              </a:rPr>
+              <a:t>Al, Li, and Mg</a:t>
+            </a:r>
+            <a:r>
+              <a:rPr kumimoji="1" lang="en-US" altLang="ko-KR" sz="1500" dirty="0">
+                <a:solidFill>
                   <a:schemeClr val="bg1"/>
                 </a:solidFill>
                 <a:latin typeface="Calibri" panose="020F0502020204030204" pitchFamily="34" charset="0"/>
                 <a:ea typeface="-윤고딕340" pitchFamily="18" charset="-127"/>
                 <a:cs typeface="Calibri" panose="020F0502020204030204" pitchFamily="34" charset="0"/>
               </a:rPr>
-              <a:t>All 91 relaxed — As₂S₃ and AlI₃ were completed in an August re-run.</a:t>
+              <a:t> appear in all seven families, so their partner anions can be compared.</a:t>
             </a:r>
           </a:p>
         </p:txBody>

--- a/kb/seminars/Research_Seminar_2026_10_13_cascade_progress.pptx
+++ b/kb/seminars/Research_Seminar_2026_10_13_cascade_progress.pptx
@@ -3619,7 +3619,7 @@
                 <a:ea typeface="굴림" pitchFamily="50" charset="-127"/>
                 <a:cs typeface="Arial" panose="020B0604020202020204" pitchFamily="34" charset="0"/>
               </a:rPr>
-              <a:t>Approach</a:t>
+              <a:t>Results &amp; Discussion</a:t>
             </a:r>
           </a:p>
         </p:txBody>
@@ -4344,7 +4344,7 @@
                 <a:ea typeface="굴림" pitchFamily="50" charset="-127"/>
                 <a:cs typeface="Arial" panose="020B0604020202020204" pitchFamily="34" charset="0"/>
               </a:rPr>
-              <a:t>Approach</a:t>
+              <a:t>Results &amp; Discussion</a:t>
             </a:r>
           </a:p>
         </p:txBody>
@@ -8037,7 +8037,7 @@
                 <a:ea typeface="굴림" pitchFamily="50" charset="-127"/>
                 <a:cs typeface="Arial" panose="020B0604020202020204" pitchFamily="34" charset="0"/>
               </a:rPr>
-              <a:t>Approach</a:t>
+              <a:t>Results &amp; Discussion</a:t>
             </a:r>
           </a:p>
         </p:txBody>
@@ -10921,7 +10921,7 @@
                 <a:ea typeface="굴림" pitchFamily="50" charset="-127"/>
                 <a:cs typeface="Arial" panose="020B0604020202020204" pitchFamily="34" charset="0"/>
               </a:rPr>
-              <a:t>Approach</a:t>
+              <a:t>Results &amp; Discussion</a:t>
             </a:r>
           </a:p>
         </p:txBody>
@@ -11850,7 +11850,7 @@
                 <a:ea typeface="굴림" pitchFamily="50" charset="-127"/>
                 <a:cs typeface="Arial" panose="020B0604020202020204" pitchFamily="34" charset="0"/>
               </a:rPr>
-              <a:t>Progress</a:t>
+              <a:t>Results &amp; Discussion</a:t>
             </a:r>
           </a:p>
         </p:txBody>
@@ -12967,7 +12967,7 @@
                 <a:ea typeface="굴림" pitchFamily="50" charset="-127"/>
                 <a:cs typeface="Arial" panose="020B0604020202020204" pitchFamily="34" charset="0"/>
               </a:rPr>
-              <a:t>Progress</a:t>
+              <a:t>Results &amp; Discussion</a:t>
             </a:r>
           </a:p>
         </p:txBody>
@@ -14544,7 +14544,7 @@
                 <a:ea typeface="굴림" pitchFamily="50" charset="-127"/>
                 <a:cs typeface="Arial" panose="020B0604020202020204" pitchFamily="34" charset="0"/>
               </a:rPr>
-              <a:t>Progress</a:t>
+              <a:t>Results &amp; Discussion</a:t>
             </a:r>
           </a:p>
         </p:txBody>
@@ -20139,7 +20139,7 @@
                 <a:ea typeface="굴림" pitchFamily="50" charset="-127"/>
                 <a:cs typeface="Arial" panose="020B0604020202020204" pitchFamily="34" charset="0"/>
               </a:rPr>
-              <a:t>Approach</a:t>
+              <a:t>Results &amp; Discussion</a:t>
             </a:r>
           </a:p>
         </p:txBody>

--- a/kb/seminars/Research_Seminar_2026_10_13_cascade_progress.pptx
+++ b/kb/seminars/Research_Seminar_2026_10_13_cascade_progress.pptx
@@ -20362,7 +20362,7 @@
                           <a:ea typeface="Calibri" panose="020F0502020204030204" pitchFamily="34" charset="0"/>
                           <a:cs typeface="Calibri" panose="020F0502020204030204" pitchFamily="34" charset="0"/>
                         </a:rPr>
-                        <a:t>anion vs. host</a:t>
+                        <a:t>anion vs host</a:t>
                       </a:r>
                     </a:p>
                   </a:txBody>

--- a/kb/seminars/Research_Seminar_2026_10_13_cascade_progress.pptx
+++ b/kb/seminars/Research_Seminar_2026_10_13_cascade_progress.pptx
@@ -2929,7 +2929,7 @@
                 <a:latin typeface="Arial" panose="020B0604020202020204" pitchFamily="34" charset="0"/>
                 <a:cs typeface="Arial" panose="020B0604020202020204" pitchFamily="34" charset="0"/>
               </a:rPr>
-              <a:t>October 13, 2026</a:t>
+              <a:t>October 16, 2026</a:t>
             </a:r>
           </a:p>
         </p:txBody>

--- a/kb/seminars/Research_Seminar_2026_10_13_cascade_progress.pptx
+++ b/kb/seminars/Research_Seminar_2026_10_13_cascade_progress.pptx
@@ -10301,7 +10301,7 @@
                           <a:ea typeface="-윤고딕340" pitchFamily="18" charset="-127"/>
                           <a:cs typeface="Calibri" panose="020F0502020204030204" pitchFamily="34" charset="0"/>
                         </a:rPr>
-                        <a:t>90 precursors</a:t>
+                        <a:t>91 precursors</a:t>
                       </a:r>
                     </a:p>
                   </a:txBody>
@@ -10626,7 +10626,7 @@
                           <a:ea typeface="-윤고딕340" pitchFamily="18" charset="-127"/>
                           <a:cs typeface="Calibri" panose="020F0502020204030204" pitchFamily="34" charset="0"/>
                         </a:rPr>
-                        <a:t>90 precursors</a:t>
+                        <a:t>91 precursors</a:t>
                       </a:r>
                     </a:p>
                   </a:txBody>
@@ -10690,7 +10690,7 @@
                           <a:ea typeface="-윤고딕340" pitchFamily="18" charset="-127"/>
                           <a:cs typeface="Calibri" panose="020F0502020204030204" pitchFamily="34" charset="0"/>
                         </a:rPr>
-                        <a:t>Done · products redo</a:t>
+                        <a:t>Done · product statistics on hold</a:t>
                       </a:r>
                     </a:p>
                   </a:txBody>
@@ -10779,7 +10779,7 @@
                 <a:ea typeface="-윤고딕340" pitchFamily="18" charset="-127"/>
                 <a:cs typeface="Calibri" panose="020F0502020204030204" pitchFamily="34" charset="0"/>
               </a:rPr>
-              <a:t>As₂S₃ and AlI₃ were completed in an August re-run; As₂S₃ is not yet in the stability and interface tables (rows 6–7). Since the September audit these outputs are </a:t>
+              <a:t>As₂S₃ and AlI₃ were completed in an August re-run, and As₂S₃ was added to the stability and interface tables on October 14. Since the September audit these outputs are </a:t>
             </a:r>
             <a:r>
               <a:rPr kumimoji="1" lang="en-US" altLang="ko-KR" sz="1150" b="1" dirty="0">

--- a/kb/seminars/Research_Seminar_2026_10_13_cascade_progress.pptx
+++ b/kb/seminars/Research_Seminar_2026_10_13_cascade_progress.pptx
@@ -18,10 +18,10 @@
     <p:sldId id="1327" r:id="rId11"/>
     <p:sldId id="1328" r:id="rId12"/>
     <p:sldId id="1342" r:id="rId32"/>
+    <p:sldId id="1344" r:id="rId34"/>
     <p:sldId id="1332" r:id="rId15"/>
     <p:sldId id="1337" r:id="rId20"/>
     <p:sldId id="1343" r:id="rId33"/>
-    <p:sldId id="1344" r:id="rId34"/>
     <p:sldId id="1345" r:id="rId35"/>
     <p:sldId id="1346" r:id="rId36"/>
     <p:sldId id="1347" r:id="rId37"/>
@@ -11098,7 +11098,7 @@
                 <a:ea typeface="-윤고딕340" pitchFamily="18" charset="-127"/>
                 <a:cs typeface="Calibri" panose="020F0502020204030204" pitchFamily="34" charset="0"/>
               </a:rPr>
-              <a:t>Recomputed for the 90 precursors in the stability table with this definition (Oct); the earlier definition overestimated window widths.</a:t>
+              <a:t>Recomputed for the 91 precursors in the stability table with this definition (Oct); the earlier definition overestimated window widths.</a:t>
             </a:r>
           </a:p>
         </p:txBody>
@@ -11686,7 +11686,7 @@
                 <a:ea typeface="-윤고딕340" pitchFamily="18" charset="-127"/>
                 <a:cs typeface="Calibri" panose="020F0502020204030204" pitchFamily="34" charset="0"/>
               </a:rPr>
-              <a:t>A separate table treats the precursor itself as a second phase (coating view, as in the figure); its product band gaps are being </a:t>
+              <a:t>A separate table treats the precursor itself as a second phase (coating view, as in the figure); its product band gaps were </a:t>
             </a:r>
             <a:r>
               <a:rPr kumimoji="1" lang="en-US" altLang="ko-KR" sz="1250" dirty="0">
@@ -11730,7 +11730,7 @@
                 <a:ea typeface="-윤고딕340" pitchFamily="18" charset="-127"/>
                 <a:cs typeface="Calibri" panose="020F0502020204030204" pitchFamily="34" charset="0"/>
               </a:rPr>
-              <a:t> = 0).</a:t>
+              <a:t> = 0) on October 14 and are not used yet, because the metal or insulator call depends on MP band-gap values.</a:t>
             </a:r>
           </a:p>
         </p:txBody>

--- a/kb/seminars/Research_Seminar_2026_10_13_cascade_progress.pptx
+++ b/kb/seminars/Research_Seminar_2026_10_13_cascade_progress.pptx
@@ -11963,7 +11963,7 @@
                 <a:spcPct val="108000"/>
               </a:lnSpc>
               <a:spcAft>
-                <a:spcPts val="450"/>
+                <a:spcPts val="330"/>
               </a:spcAft>
               <a:buClr>
                 <a:srgbClr val="1F2937"/>
@@ -11991,7 +11991,7 @@
                 <a:spcPct val="108000"/>
               </a:lnSpc>
               <a:spcAft>
-                <a:spcPts val="450"/>
+                <a:spcPts val="330"/>
               </a:spcAft>
               <a:buClr>
                 <a:srgbClr val="1F2937"/>
@@ -12019,7 +12019,7 @@
                 <a:spcPct val="108000"/>
               </a:lnSpc>
               <a:spcAft>
-                <a:spcPts val="450"/>
+                <a:spcPts val="330"/>
               </a:spcAft>
               <a:buClr>
                 <a:srgbClr val="1F2937"/>
@@ -12038,7 +12038,7 @@
                 <a:ea typeface="-윤고딕340" pitchFamily="18" charset="-127"/>
                 <a:cs typeface="Calibri" panose="020F0502020204030204" pitchFamily="34" charset="0"/>
               </a:rPr>
-              <a:t>Young's modulus: scatter among configurations of one precursor ≈ spread between precursors (ratio 1.1; substitution energy 0.2).</a:t>
+              <a:t>Young's modulus scattered among configurations of one precursor as much as between precursors (ratio 1.1; substitution energy 0.2).</a:t>
             </a:r>
           </a:p>
           <a:p>
@@ -12046,6 +12046,9 @@
               <a:lnSpc>
                 <a:spcPct val="108000"/>
               </a:lnSpc>
+              <a:spcAft>
+                <a:spcPts val="330"/>
+              </a:spcAft>
               <a:buClr>
                 <a:srgbClr val="1F2937"/>
               </a:buClr>
@@ -12064,6 +12067,31 @@
                 <a:cs typeface="Calibri" panose="020F0502020204030204" pitchFamily="34" charset="0"/>
               </a:rPr>
               <a:t>Several descriptors were merged into one score without a stated primary objective.</a:t>
+            </a:r>
+          </a:p>
+          <a:p>
+            <a:pPr marL="182880" indent="-182880" latinLnBrk="0">
+              <a:lnSpc>
+                <a:spcPct val="108000"/>
+              </a:lnSpc>
+              <a:buClr>
+                <a:srgbClr val="0070C0"/>
+              </a:buClr>
+              <a:buSzPct val="80000"/>
+              <a:buFont typeface="Arial" panose="020B0604020202020204" pitchFamily="34" charset="0"/>
+              <a:buChar char="•"/>
+              <a:defRPr/>
+            </a:pPr>
+            <a:r>
+              <a:rPr kumimoji="1" lang="en-US" altLang="ko-KR" sz="1150" dirty="0">
+                <a:solidFill>
+                  <a:srgbClr val="0070C0"/>
+                </a:solidFill>
+                <a:latin typeface="Calibri" panose="020F0502020204030204" pitchFamily="34" charset="0"/>
+                <a:ea typeface="-윤고딕340" pitchFamily="18" charset="-127"/>
+                <a:cs typeface="Calibri" panose="020F0502020204030204" pitchFamily="34" charset="0"/>
+              </a:rPr>
+              <a:t>Found on Oct 14 while rescoring — the energy term had no reference for the added elements, so part of the oxide lead reflects bond strength.</a:t>
             </a:r>
           </a:p>
         </p:txBody>
